--- a/V2授课PPT/W07-第14次课-不写SQL也能操作数据库.pptx
+++ b/V2授课PPT/W07-第14次课-不写SQL也能操作数据库.pptx
@@ -6,6 +6,7 @@
   </p:sldMasterIdLst>
   <p:sldIdLst>
     <p:sldId id="256" r:id="rId7"/>
+    <p:sldId id="374" r:id="rId21"/>
     <p:sldId id="311" r:id="rId63"/>
     <p:sldId id="368" r:id="rId15"/>
     <p:sldId id="369" r:id="rId16"/>
@@ -18,6 +19,8 @@
     <p:sldId id="338" r:id="rId90"/>
     <p:sldId id="365" r:id="rId117"/>
     <p:sldId id="366" r:id="rId118"/>
+    <p:sldId id="375" r:id="rId22"/>
+    <p:sldId id="376" r:id="rId23"/>
   </p:sldIdLst>
   <p:sldSz cx="12192000" cy="6858000" type="screen4x3"/>
   <p:notesSz cx="6858000" cy="9144000"/>
@@ -4228,20 +4231,22 @@
       <p:grpSpPr/>
       <p:sp>
         <p:nvSpPr>
-          <p:cNvPr id="2" name="Rectangle 1"/>
+          <p:cNvPr id="2" name="Rounded Rectangle 1"/>
           <p:cNvSpPr/>
           <p:nvPr/>
         </p:nvSpPr>
         <p:spPr>
           <a:xfrm>
             <a:off x="0" y="0"/>
-            <a:ext cx="12192000" cy="1150000"/>
-          </a:xfrm>
-          <a:prstGeom prst="rect">
-            <a:avLst/>
+            <a:ext cx="12191695" cy="64008"/>
+          </a:xfrm>
+          <a:prstGeom prst="roundRect">
+            <a:avLst>
+              <a:gd name="adj" fmla="val 50000"/>
+            </a:avLst>
           </a:prstGeom>
           <a:solidFill>
-            <a:srgbClr val="010328"/>
+            <a:srgbClr val="0B5E54"/>
           </a:solidFill>
           <a:ln>
             <a:noFill/>
@@ -4272,20 +4277,60 @@
       </p:sp>
       <p:sp>
         <p:nvSpPr>
-          <p:cNvPr id="3" name="Rectangle 2"/>
+          <p:cNvPr id="3" name="TextBox 2"/>
+          <p:cNvSpPr txBox="1"/>
+          <p:nvPr/>
+        </p:nvSpPr>
+        <p:spPr>
+          <a:xfrm>
+            <a:off x="475488" y="146304"/>
+            <a:ext cx="8229600" cy="292608"/>
+          </a:xfrm>
+          <a:prstGeom prst="rect">
+            <a:avLst/>
+          </a:prstGeom>
+          <a:noFill/>
+        </p:spPr>
+        <p:txBody>
+          <a:bodyPr wrap="square" anchor="t" lIns="0" rIns="0" tIns="0" bIns="0">
+            <a:spAutoFit/>
+          </a:bodyPr>
+          <a:lstStyle/>
+          <a:p>
+            <a:pPr algn="l">
+              <a:lnSpc>
+                <a:spcPct val="114000"/>
+              </a:lnSpc>
+            </a:pPr>
+            <a:r>
+              <a:rPr sz="1100" b="1">
+                <a:solidFill>
+                  <a:srgbClr val="0B5E54"/>
+                </a:solidFill>
+              </a:rPr>
+              <a:t>工单实战 · 运行留证</a:t>
+            </a:r>
+          </a:p>
+        </p:txBody>
+      </p:sp>
+      <p:sp>
+        <p:nvSpPr>
+          <p:cNvPr id="4" name="Rounded Rectangle 3"/>
           <p:cNvSpPr/>
           <p:nvPr/>
         </p:nvSpPr>
         <p:spPr>
           <a:xfrm>
-            <a:off x="0" y="1150000"/>
-            <a:ext cx="2600000" cy="70000"/>
-          </a:xfrm>
-          <a:prstGeom prst="rect">
-            <a:avLst/>
+            <a:off x="475488" y="475488"/>
+            <a:ext cx="2027872" cy="310896"/>
+          </a:xfrm>
+          <a:prstGeom prst="roundRect">
+            <a:avLst>
+              <a:gd name="adj" fmla="val 50000"/>
+            </a:avLst>
           </a:prstGeom>
           <a:solidFill>
-            <a:srgbClr val="F5670F"/>
+            <a:srgbClr val="C9A227"/>
           </a:solidFill>
           <a:ln>
             <a:noFill/>
@@ -4316,14 +4361,14 @@
       </p:sp>
       <p:sp>
         <p:nvSpPr>
-          <p:cNvPr id="4" name="TextBox 3"/>
+          <p:cNvPr id="5" name="TextBox 4"/>
           <p:cNvSpPr txBox="1"/>
           <p:nvPr/>
         </p:nvSpPr>
         <p:spPr>
           <a:xfrm>
-            <a:off x="700000" y="300000"/>
-            <a:ext cx="10792000" cy="700000"/>
+            <a:off x="475488" y="475488"/>
+            <a:ext cx="2027872" cy="310896"/>
           </a:xfrm>
           <a:prstGeom prst="rect">
             <a:avLst/>
@@ -4331,47 +4376,83 @@
           <a:noFill/>
         </p:spPr>
         <p:txBody>
-          <a:bodyPr wrap="square" anchor="t">
+          <a:bodyPr wrap="square" anchor="ctr" lIns="0" rIns="0" tIns="0" bIns="0">
             <a:spAutoFit/>
           </a:bodyPr>
           <a:lstStyle/>
           <a:p>
+            <a:pPr algn="ctr">
+              <a:lnSpc>
+                <a:spcPct val="114000"/>
+              </a:lnSpc>
+            </a:pPr>
+            <a:r>
+              <a:rPr sz="1050" b="1">
+                <a:solidFill>
+                  <a:srgbClr val="FFFFFF"/>
+                </a:solidFill>
+              </a:rPr>
+              <a:t>SCREENSHOT · 终端逐字截图</a:t>
+            </a:r>
+          </a:p>
+        </p:txBody>
+      </p:sp>
+      <p:sp>
+        <p:nvSpPr>
+          <p:cNvPr id="6" name="TextBox 5"/>
+          <p:cNvSpPr txBox="1"/>
+          <p:nvPr/>
+        </p:nvSpPr>
+        <p:spPr>
+          <a:xfrm>
+            <a:off x="475488" y="859536"/>
+            <a:ext cx="11237976" cy="502920"/>
+          </a:xfrm>
+          <a:prstGeom prst="rect">
+            <a:avLst/>
+          </a:prstGeom>
+          <a:noFill/>
+        </p:spPr>
+        <p:txBody>
+          <a:bodyPr wrap="square" anchor="t" lIns="0" rIns="0" tIns="0" bIns="0">
+            <a:spAutoFit/>
+          </a:bodyPr>
+          <a:lstStyle/>
+          <a:p>
             <a:pPr algn="l">
               <a:lnSpc>
-                <a:spcPct val="110000"/>
+                <a:spcPct val="114000"/>
               </a:lnSpc>
-              <a:spcAft>
-                <a:spcPts val="600"/>
-              </a:spcAft>
             </a:pPr>
             <a:r>
-              <a:rPr sz="2400" b="1">
-                <a:solidFill>
-                  <a:srgbClr val="FFFFFF"/>
-                </a:solidFill>
-                <a:latin typeface="微软雅黑"/>
-              </a:rPr>
-              <a:t>下次课预告（第8周）</a:t>
-            </a:r>
-          </a:p>
-        </p:txBody>
-      </p:sp>
-      <p:sp>
-        <p:nvSpPr>
-          <p:cNvPr id="5" name="Rectangle 4"/>
+              <a:rPr sz="2200" b="1">
+                <a:solidFill>
+                  <a:srgbClr val="1B2B28"/>
+                </a:solidFill>
+              </a:rPr>
+              <a:t>P5.1/P5.2 · 测试全绿证据＋pytest 全量实跑</a:t>
+            </a:r>
+          </a:p>
+        </p:txBody>
+      </p:sp>
+      <p:sp>
+        <p:nvSpPr>
+          <p:cNvPr id="7" name="Rounded Rectangle 6"/>
           <p:cNvSpPr/>
           <p:nvPr/>
         </p:nvSpPr>
         <p:spPr>
           <a:xfrm>
-            <a:off x="760000" y="1900000"/>
-            <a:ext cx="10900000" cy="1600000"/>
-          </a:xfrm>
-          <a:prstGeom prst="rect">
-            <a:avLst/>
+            <a:off x="475488" y="1389888"/>
+            <a:ext cx="1234440" cy="27432"/>
+          </a:xfrm>
+          <a:prstGeom prst="roundRect">
+            <a:avLst>
+              <a:gd name="adj" fmla="val 50000"/>
+            </a:avLst>
           </a:prstGeom>
           <a:solidFill>
-            <a:srgbClr val="F3F6FD"/>
+            <a:srgbClr val="C9A227"/>
           </a:solidFill>
           <a:ln>
             <a:noFill/>
@@ -4402,20 +4483,22 @@
       </p:sp>
       <p:sp>
         <p:nvSpPr>
-          <p:cNvPr id="6" name="Rectangle 5"/>
+          <p:cNvPr id="8" name="Rounded Rectangle 7"/>
           <p:cNvSpPr/>
           <p:nvPr/>
         </p:nvSpPr>
         <p:spPr>
           <a:xfrm>
-            <a:off x="760000" y="1900000"/>
-            <a:ext cx="150000" cy="1600000"/>
-          </a:xfrm>
-          <a:prstGeom prst="rect">
-            <a:avLst/>
+            <a:off x="475488" y="6419088"/>
+            <a:ext cx="11237976" cy="10972"/>
+          </a:xfrm>
+          <a:prstGeom prst="roundRect">
+            <a:avLst>
+              <a:gd name="adj" fmla="val 50000"/>
+            </a:avLst>
           </a:prstGeom>
           <a:solidFill>
-            <a:srgbClr val="F5670F"/>
+            <a:srgbClr val="E4F1EE"/>
           </a:solidFill>
           <a:ln>
             <a:noFill/>
@@ -4446,14 +4529,14 @@
       </p:sp>
       <p:sp>
         <p:nvSpPr>
-          <p:cNvPr id="7" name="TextBox 6"/>
+          <p:cNvPr id="9" name="TextBox 8"/>
           <p:cNvSpPr txBox="1"/>
           <p:nvPr/>
         </p:nvSpPr>
         <p:spPr>
           <a:xfrm>
-            <a:off x="1020000" y="2050000"/>
-            <a:ext cx="10500000" cy="1400000"/>
+            <a:off x="475488" y="6455664"/>
+            <a:ext cx="7315200" cy="292608"/>
           </a:xfrm>
           <a:prstGeom prst="rect">
             <a:avLst/>
@@ -4461,60 +4544,137 @@
           <a:noFill/>
         </p:spPr>
         <p:txBody>
-          <a:bodyPr wrap="square" anchor="t">
+          <a:bodyPr wrap="square" anchor="t" lIns="0" rIns="0" tIns="0" bIns="0">
             <a:spAutoFit/>
           </a:bodyPr>
           <a:lstStyle/>
           <a:p>
             <a:pPr algn="l">
               <a:lnSpc>
-                <a:spcPct val="110000"/>
+                <a:spcPct val="114000"/>
               </a:lnSpc>
-              <a:spcAft>
-                <a:spcPts val="600"/>
-              </a:spcAft>
             </a:pPr>
             <a:r>
-              <a:rPr sz="1700" b="1">
-                <a:solidFill>
-                  <a:srgbClr val="010328"/>
-                </a:solidFill>
-                <a:latin typeface="微软雅黑"/>
-              </a:rPr>
-              <a:t>主题: 诊断模型训练与F1达标——应用：见工单start</a:t>
-            </a:r>
-          </a:p>
+              <a:rPr sz="900" b="0">
+                <a:solidFill>
+                  <a:srgbClr val="5C6E6A"/>
+                </a:solidFill>
+              </a:rPr>
+              <a:t>两江智造集团 · Python程序设计（项目实战）</a:t>
+            </a:r>
+          </a:p>
+        </p:txBody>
+      </p:sp>
+      <p:sp>
+        <p:nvSpPr>
+          <p:cNvPr id="10" name="TextBox 9"/>
+          <p:cNvSpPr txBox="1"/>
+          <p:nvPr/>
+        </p:nvSpPr>
+        <p:spPr>
+          <a:xfrm>
+            <a:off x="10597896" y="6537960"/>
+            <a:ext cx="996696" cy="301752"/>
+          </a:xfrm>
+          <a:prstGeom prst="rect">
+            <a:avLst/>
+          </a:prstGeom>
+          <a:noFill/>
+        </p:spPr>
+        <p:txBody>
+          <a:bodyPr wrap="square" anchor="t" lIns="0" rIns="0" tIns="0" bIns="0">
+            <a:spAutoFit/>
+          </a:bodyPr>
+          <a:lstStyle/>
+          <a:p>
+            <a:pPr algn="r">
+              <a:lnSpc>
+                <a:spcPct val="114000"/>
+              </a:lnSpc>
+            </a:pPr>
+            <a:r>
+              <a:rPr sz="1000" b="0">
+                <a:solidFill>
+                  <a:srgbClr val="8A97B5"/>
+                </a:solidFill>
+              </a:rPr>
+              <a:t>10 / 13</a:t>
+            </a:r>
+          </a:p>
+        </p:txBody>
+      </p:sp>
+      <p:sp>
+        <p:nvSpPr>
+          <p:cNvPr id="11" name="TextBox 10"/>
+          <p:cNvSpPr txBox="1"/>
+          <p:nvPr/>
+        </p:nvSpPr>
+        <p:spPr>
+          <a:xfrm>
+            <a:off x="475488" y="1517904"/>
+            <a:ext cx="11237976" cy="237744"/>
+          </a:xfrm>
+          <a:prstGeom prst="rect">
+            <a:avLst/>
+          </a:prstGeom>
+          <a:noFill/>
+        </p:spPr>
+        <p:txBody>
+          <a:bodyPr wrap="square" anchor="t" lIns="0" rIns="0" tIns="0" bIns="0">
+            <a:spAutoFit/>
+          </a:bodyPr>
+          <a:lstStyle/>
           <a:p>
             <a:pPr algn="l">
               <a:lnSpc>
-                <a:spcPct val="110000"/>
+                <a:spcPct val="114000"/>
               </a:lnSpc>
-              <a:spcAft>
-                <a:spcPts val="600"/>
-              </a:spcAft>
             </a:pPr>
             <a:r>
-              <a:rPr sz="1300" b="0">
-                <a:solidFill>
-                  <a:srgbClr val="44546A"/>
-                </a:solidFill>
-                <a:latin typeface="微软雅黑"/>
-              </a:rPr>
-              <a:t>预习快问: 过拟合的信号是什么？怎么防？</a:t>
-            </a:r>
-          </a:p>
-        </p:txBody>
-      </p:sp>
-      <p:sp>
-        <p:nvSpPr>
-          <p:cNvPr id="8" name="TextBox 7"/>
+              <a:rPr sz="1000" b="0">
+                <a:solidFill>
+                  <a:srgbClr val="5C6E6A"/>
+                </a:solidFill>
+              </a:rPr>
+              <a:t>pytest 全量实跑：本机真实运行输出，非示例、非节选</a:t>
+            </a:r>
+          </a:p>
+        </p:txBody>
+      </p:sp>
+      <p:pic>
+        <p:nvPicPr>
+          <p:cNvPr id="12" name="Picture 11" descr="p55_warehouse_orm_pytest.png"/>
+          <p:cNvPicPr>
+            <a:picLocks noChangeAspect="1"/>
+          </p:cNvPicPr>
+          <p:nvPr/>
+        </p:nvPicPr>
+        <p:blipFill>
+          <a:blip r:embed="rId2"/>
+          <a:stretch>
+            <a:fillRect/>
+          </a:stretch>
+        </p:blipFill>
+        <p:spPr>
+          <a:xfrm>
+            <a:off x="475488" y="2490034"/>
+            <a:ext cx="11237976" cy="1539603"/>
+          </a:xfrm>
+          <a:prstGeom prst="rect">
+            <a:avLst/>
+          </a:prstGeom>
+        </p:spPr>
+      </p:pic>
+      <p:sp>
+        <p:nvSpPr>
+          <p:cNvPr id="13" name="TextBox 12"/>
           <p:cNvSpPr txBox="1"/>
           <p:nvPr/>
         </p:nvSpPr>
         <p:spPr>
           <a:xfrm>
-            <a:off x="760000" y="3900000"/>
-            <a:ext cx="10900000" cy="900000"/>
+            <a:off x="475488" y="4066213"/>
+            <a:ext cx="11237976" cy="256032"/>
           </a:xfrm>
           <a:prstGeom prst="rect">
             <a:avLst/>
@@ -4522,46 +4682,183 @@
           <a:noFill/>
         </p:spPr>
         <p:txBody>
-          <a:bodyPr wrap="square" anchor="t">
+          <a:bodyPr wrap="square" anchor="t" lIns="0" rIns="0" tIns="0" bIns="0">
             <a:spAutoFit/>
           </a:bodyPr>
           <a:lstStyle/>
           <a:p>
             <a:pPr algn="l">
               <a:lnSpc>
-                <a:spcPct val="110000"/>
+                <a:spcPct val="114000"/>
               </a:lnSpc>
-              <a:spcAft>
-                <a:spcPts val="600"/>
-              </a:spcAft>
             </a:pPr>
             <a:r>
-              <a:rPr sz="1400" b="1">
-                <a:solidFill>
-                  <a:srgbClr val="0545E8"/>
-                </a:solidFill>
-                <a:latin typeface="微软雅黑"/>
-              </a:rPr>
-              <a:t>课前完成：导学单 + 预习自测 + starter环境自检</a:t>
-            </a:r>
-          </a:p>
+              <a:rPr sz="850" b="0">
+                <a:solidFill>
+                  <a:srgbClr val="5C6E6A"/>
+                </a:solidFill>
+              </a:rPr>
+              <a:t>▲ pytest：58 passed in 4.54s（本机实跑，非示例）</a:t>
+            </a:r>
+          </a:p>
+        </p:txBody>
+      </p:sp>
+      <p:sp>
+        <p:nvSpPr>
+          <p:cNvPr id="14" name="Rounded Rectangle 13"/>
+          <p:cNvSpPr/>
+          <p:nvPr/>
+        </p:nvSpPr>
+        <p:spPr>
+          <a:xfrm>
+            <a:off x="475488" y="4431973"/>
+            <a:ext cx="11237976" cy="822960"/>
+          </a:xfrm>
+          <a:prstGeom prst="roundRect">
+            <a:avLst>
+              <a:gd name="adj" fmla="val 5000"/>
+            </a:avLst>
+          </a:prstGeom>
+          <a:solidFill>
+            <a:srgbClr val="E4F1EE"/>
+          </a:solidFill>
+          <a:ln>
+            <a:noFill/>
+          </a:ln>
+          <a:effectLst/>
+        </p:spPr>
+        <p:style>
+          <a:lnRef idx="1">
+            <a:schemeClr val="accent1"/>
+          </a:lnRef>
+          <a:fillRef idx="3">
+            <a:schemeClr val="accent1"/>
+          </a:fillRef>
+          <a:effectRef idx="2">
+            <a:schemeClr val="accent1"/>
+          </a:effectRef>
+          <a:fontRef idx="minor">
+            <a:schemeClr val="lt1"/>
+          </a:fontRef>
+        </p:style>
+        <p:txBody>
+          <a:bodyPr rtlCol="0" anchor="ctr"/>
+          <a:lstStyle/>
+          <a:p>
+            <a:pPr algn="ctr"/>
+          </a:p>
+        </p:txBody>
+      </p:sp>
+      <p:sp>
+        <p:nvSpPr>
+          <p:cNvPr id="15" name="Rounded Rectangle 14"/>
+          <p:cNvSpPr/>
+          <p:nvPr/>
+        </p:nvSpPr>
+        <p:spPr>
+          <a:xfrm>
+            <a:off x="475488" y="4431973"/>
+            <a:ext cx="54864" cy="822960"/>
+          </a:xfrm>
+          <a:prstGeom prst="roundRect">
+            <a:avLst>
+              <a:gd name="adj" fmla="val 50000"/>
+            </a:avLst>
+          </a:prstGeom>
+          <a:solidFill>
+            <a:srgbClr val="C9A227"/>
+          </a:solidFill>
+          <a:ln>
+            <a:noFill/>
+          </a:ln>
+          <a:effectLst/>
+        </p:spPr>
+        <p:style>
+          <a:lnRef idx="1">
+            <a:schemeClr val="accent1"/>
+          </a:lnRef>
+          <a:fillRef idx="3">
+            <a:schemeClr val="accent1"/>
+          </a:fillRef>
+          <a:effectRef idx="2">
+            <a:schemeClr val="accent1"/>
+          </a:effectRef>
+          <a:fontRef idx="minor">
+            <a:schemeClr val="lt1"/>
+          </a:fontRef>
+        </p:style>
+        <p:txBody>
+          <a:bodyPr rtlCol="0" anchor="ctr"/>
+          <a:lstStyle/>
+          <a:p>
+            <a:pPr algn="ctr"/>
+          </a:p>
+        </p:txBody>
+      </p:sp>
+      <p:sp>
+        <p:nvSpPr>
+          <p:cNvPr id="16" name="TextBox 15"/>
+          <p:cNvSpPr txBox="1"/>
+          <p:nvPr/>
+        </p:nvSpPr>
+        <p:spPr>
+          <a:xfrm>
+            <a:off x="676656" y="4514269"/>
+            <a:ext cx="10908792" cy="658368"/>
+          </a:xfrm>
+          <a:prstGeom prst="rect">
+            <a:avLst/>
+          </a:prstGeom>
+          <a:noFill/>
+        </p:spPr>
+        <p:txBody>
+          <a:bodyPr wrap="square" anchor="t" lIns="0" rIns="0" tIns="0" bIns="0">
+            <a:spAutoFit/>
+          </a:bodyPr>
+          <a:lstStyle/>
           <a:p>
             <a:pPr algn="l">
               <a:lnSpc>
-                <a:spcPct val="110000"/>
+                <a:spcPct val="126000"/>
               </a:lnSpc>
-              <a:spcAft>
-                <a:spcPts val="600"/>
-              </a:spcAft>
             </a:pPr>
             <a:r>
-              <a:rPr sz="1250" b="0">
-                <a:solidFill>
-                  <a:srgbClr val="44546A"/>
-                </a:solidFill>
-                <a:latin typeface="微软雅黑"/>
-              </a:rPr>
-              <a:t>带着问题来上课——Predict先于Run</a:t>
+              <a:rPr sz="850" b="0">
+                <a:solidFill>
+                  <a:srgbClr val="1B2B28"/>
+                </a:solidFill>
+              </a:rPr>
+              <a:t>本项目四档只有一套阶梯口径（课堂 D/C/B/A 即工单及格/良好/优秀/超优），逐字实测见上一页截图；本页补的是测试全绿证据。</a:t>
+            </a:r>
+          </a:p>
+          <a:p>
+            <a:pPr algn="l">
+              <a:lnSpc>
+                <a:spcPct val="126000"/>
+              </a:lnSpc>
+            </a:pPr>
+            <a:r>
+              <a:rPr sz="850" b="0">
+                <a:solidFill>
+                  <a:srgbClr val="1B2B28"/>
+                </a:solidFill>
+              </a:rPr>
+              <a:t>复现：cd 工程化项目/p55_warehouse_orm &amp;&amp; python -m pytest -q -o addopts=''</a:t>
+            </a:r>
+          </a:p>
+          <a:p>
+            <a:pPr algn="l">
+              <a:lnSpc>
+                <a:spcPct val="126000"/>
+              </a:lnSpc>
+            </a:pPr>
+            <a:r>
+              <a:rPr sz="850" b="0">
+                <a:solidFill>
+                  <a:srgbClr val="1B2B28"/>
+                </a:solidFill>
+              </a:rPr>
+              <a:t>工单提交：截图需含终端标题栏的文件名与完整输出，退出码 0 才算全绿。</a:t>
             </a:r>
           </a:p>
         </p:txBody>
@@ -4586,22 +4883,20 @@
       <p:grpSpPr/>
       <p:sp>
         <p:nvSpPr>
-          <p:cNvPr id="2" name="Rounded Rectangle 1"/>
+          <p:cNvPr id="2" name="Rectangle 1"/>
           <p:cNvSpPr/>
           <p:nvPr/>
         </p:nvSpPr>
         <p:spPr>
           <a:xfrm>
             <a:off x="0" y="0"/>
-            <a:ext cx="12191695" cy="64008"/>
-          </a:xfrm>
-          <a:prstGeom prst="roundRect">
-            <a:avLst>
-              <a:gd name="adj" fmla="val 50000"/>
-            </a:avLst>
+            <a:ext cx="12192000" cy="1150000"/>
+          </a:xfrm>
+          <a:prstGeom prst="rect">
+            <a:avLst/>
           </a:prstGeom>
           <a:solidFill>
-            <a:srgbClr val="0B5E54"/>
+            <a:srgbClr val="010328"/>
           </a:solidFill>
           <a:ln>
             <a:noFill/>
@@ -4632,60 +4927,20 @@
       </p:sp>
       <p:sp>
         <p:nvSpPr>
-          <p:cNvPr id="3" name="TextBox 2"/>
-          <p:cNvSpPr txBox="1"/>
-          <p:nvPr/>
-        </p:nvSpPr>
-        <p:spPr>
-          <a:xfrm>
-            <a:off x="475488" y="146304"/>
-            <a:ext cx="8229600" cy="292608"/>
-          </a:xfrm>
-          <a:prstGeom prst="rect">
-            <a:avLst/>
-          </a:prstGeom>
-          <a:noFill/>
-        </p:spPr>
-        <p:txBody>
-          <a:bodyPr wrap="square" anchor="t" lIns="0" rIns="0" tIns="0" bIns="0">
-            <a:spAutoFit/>
-          </a:bodyPr>
-          <a:lstStyle/>
-          <a:p>
-            <a:pPr algn="l">
-              <a:lnSpc>
-                <a:spcPct val="114000"/>
-              </a:lnSpc>
-            </a:pPr>
-            <a:r>
-              <a:rPr sz="1100" b="1">
-                <a:solidFill>
-                  <a:srgbClr val="0B5E54"/>
-                </a:solidFill>
-              </a:rPr>
-              <a:t>工单实战 · 本次实跑结果</a:t>
-            </a:r>
-          </a:p>
-        </p:txBody>
-      </p:sp>
-      <p:sp>
-        <p:nvSpPr>
-          <p:cNvPr id="4" name="Rounded Rectangle 3"/>
+          <p:cNvPr id="3" name="Rectangle 2"/>
           <p:cNvSpPr/>
           <p:nvPr/>
         </p:nvSpPr>
         <p:spPr>
           <a:xfrm>
-            <a:off x="475488" y="475488"/>
-            <a:ext cx="1881187" cy="310896"/>
-          </a:xfrm>
-          <a:prstGeom prst="roundRect">
-            <a:avLst>
-              <a:gd name="adj" fmla="val 50000"/>
-            </a:avLst>
+            <a:off x="0" y="1150000"/>
+            <a:ext cx="2600000" cy="70000"/>
+          </a:xfrm>
+          <a:prstGeom prst="rect">
+            <a:avLst/>
           </a:prstGeom>
           <a:solidFill>
-            <a:srgbClr val="C9A227"/>
+            <a:srgbClr val="F5670F"/>
           </a:solidFill>
           <a:ln>
             <a:noFill/>
@@ -4716,14 +4971,14 @@
       </p:sp>
       <p:sp>
         <p:nvSpPr>
-          <p:cNvPr id="5" name="TextBox 4"/>
+          <p:cNvPr id="4" name="TextBox 3"/>
           <p:cNvSpPr txBox="1"/>
           <p:nvPr/>
         </p:nvSpPr>
         <p:spPr>
           <a:xfrm>
-            <a:off x="475488" y="475488"/>
-            <a:ext cx="1881187" cy="310896"/>
+            <a:off x="700000" y="300000"/>
+            <a:ext cx="10792000" cy="700000"/>
           </a:xfrm>
           <a:prstGeom prst="rect">
             <a:avLst/>
@@ -4731,83 +4986,47 @@
           <a:noFill/>
         </p:spPr>
         <p:txBody>
-          <a:bodyPr wrap="square" anchor="ctr" lIns="0" rIns="0" tIns="0" bIns="0">
+          <a:bodyPr wrap="square" anchor="t">
             <a:spAutoFit/>
           </a:bodyPr>
           <a:lstStyle/>
           <a:p>
-            <a:pPr algn="ctr">
-              <a:lnSpc>
-                <a:spcPct val="114000"/>
-              </a:lnSpc>
-            </a:pPr>
-            <a:r>
-              <a:rPr sz="1050" b="1">
-                <a:solidFill>
-                  <a:srgbClr val="FFFFFF"/>
-                </a:solidFill>
-              </a:rPr>
-              <a:t>REAL RUN · 四档逐字实测</a:t>
-            </a:r>
-          </a:p>
-        </p:txBody>
-      </p:sp>
-      <p:sp>
-        <p:nvSpPr>
-          <p:cNvPr id="6" name="TextBox 5"/>
-          <p:cNvSpPr txBox="1"/>
-          <p:nvPr/>
-        </p:nvSpPr>
-        <p:spPr>
-          <a:xfrm>
-            <a:off x="475488" y="859536"/>
-            <a:ext cx="11237976" cy="502920"/>
-          </a:xfrm>
-          <a:prstGeom prst="rect">
-            <a:avLst/>
-          </a:prstGeom>
-          <a:noFill/>
-        </p:spPr>
-        <p:txBody>
-          <a:bodyPr wrap="square" anchor="t" lIns="0" rIns="0" tIns="0" bIns="0">
-            <a:spAutoFit/>
-          </a:bodyPr>
-          <a:lstStyle/>
-          <a:p>
             <a:pPr algn="l">
               <a:lnSpc>
-                <a:spcPct val="114000"/>
+                <a:spcPct val="110000"/>
               </a:lnSpc>
+              <a:spcAft>
+                <a:spcPts val="600"/>
+              </a:spcAft>
             </a:pPr>
             <a:r>
-              <a:rPr sz="2200" b="1">
-                <a:solidFill>
-                  <a:srgbClr val="1B2B28"/>
-                </a:solidFill>
-              </a:rPr>
-              <a:t>P5.1/P5.2 p55_warehouse_orm：本次 D/C/B/A 四档实测</a:t>
-            </a:r>
-          </a:p>
-        </p:txBody>
-      </p:sp>
-      <p:sp>
-        <p:nvSpPr>
-          <p:cNvPr id="7" name="Rounded Rectangle 6"/>
+              <a:rPr sz="2400" b="1">
+                <a:solidFill>
+                  <a:srgbClr val="FFFFFF"/>
+                </a:solidFill>
+                <a:latin typeface="微软雅黑"/>
+              </a:rPr>
+              <a:t>总结评价与课后任务</a:t>
+            </a:r>
+          </a:p>
+        </p:txBody>
+      </p:sp>
+      <p:sp>
+        <p:nvSpPr>
+          <p:cNvPr id="5" name="Rectangle 4"/>
           <p:cNvSpPr/>
           <p:nvPr/>
         </p:nvSpPr>
         <p:spPr>
           <a:xfrm>
-            <a:off x="475488" y="1389888"/>
-            <a:ext cx="1234440" cy="27432"/>
-          </a:xfrm>
-          <a:prstGeom prst="roundRect">
-            <a:avLst>
-              <a:gd name="adj" fmla="val 50000"/>
-            </a:avLst>
+            <a:off x="800000" y="1950000"/>
+            <a:ext cx="10600000" cy="1500000"/>
+          </a:xfrm>
+          <a:prstGeom prst="rect">
+            <a:avLst/>
           </a:prstGeom>
           <a:solidFill>
-            <a:srgbClr val="C9A227"/>
+            <a:srgbClr val="F3F6FD"/>
           </a:solidFill>
           <a:ln>
             <a:noFill/>
@@ -4838,22 +5057,285 @@
       </p:sp>
       <p:sp>
         <p:nvSpPr>
-          <p:cNvPr id="8" name="Rounded Rectangle 7"/>
+          <p:cNvPr id="6" name="TextBox 5"/>
+          <p:cNvSpPr txBox="1"/>
+          <p:nvPr/>
+        </p:nvSpPr>
+        <p:spPr>
+          <a:xfrm>
+            <a:off x="1000000" y="2050000"/>
+            <a:ext cx="10300000" cy="1400000"/>
+          </a:xfrm>
+          <a:prstGeom prst="rect">
+            <a:avLst/>
+          </a:prstGeom>
+          <a:noFill/>
+        </p:spPr>
+        <p:txBody>
+          <a:bodyPr wrap="square" anchor="t">
+            <a:spAutoFit/>
+          </a:bodyPr>
+          <a:lstStyle/>
+          <a:p>
+            <a:pPr algn="l">
+              <a:lnSpc>
+                <a:spcPct val="110000"/>
+              </a:lnSpc>
+              <a:spcAft>
+                <a:spcPts val="600"/>
+              </a:spcAft>
+            </a:pPr>
+            <a:r>
+              <a:rPr sz="1500" b="1">
+                <a:solidFill>
+                  <a:srgbClr val="0545E8"/>
+                </a:solidFill>
+                <a:latin typeface="微软雅黑"/>
+              </a:rPr>
+              <a:t>评价（10分钟）：</a:t>
+            </a:r>
+          </a:p>
+          <a:p>
+            <a:pPr algn="l">
+              <a:lnSpc>
+                <a:spcPct val="110000"/>
+              </a:lnSpc>
+              <a:spcAft>
+                <a:spcPts val="600"/>
+              </a:spcAft>
+            </a:pPr>
+            <a:r>
+              <a:rPr sz="1400" b="0">
+                <a:solidFill>
+                  <a:srgbClr val="010328"/>
+                </a:solidFill>
+                <a:latin typeface="微软雅黑"/>
+              </a:rPr>
+              <a:t>按D/C/B/A量表当堂评分；工单24小时内反馈评语与改进建议。</a:t>
+            </a:r>
+          </a:p>
+        </p:txBody>
+      </p:sp>
+      <p:sp>
+        <p:nvSpPr>
+          <p:cNvPr id="7" name="TextBox 6"/>
+          <p:cNvSpPr txBox="1"/>
+          <p:nvPr/>
+        </p:nvSpPr>
+        <p:spPr>
+          <a:xfrm>
+            <a:off x="850000" y="3700000"/>
+            <a:ext cx="10600000" cy="700000"/>
+          </a:xfrm>
+          <a:prstGeom prst="rect">
+            <a:avLst/>
+          </a:prstGeom>
+          <a:noFill/>
+        </p:spPr>
+        <p:txBody>
+          <a:bodyPr wrap="square" anchor="t">
+            <a:spAutoFit/>
+          </a:bodyPr>
+          <a:lstStyle/>
+          <a:p>
+            <a:pPr algn="l">
+              <a:lnSpc>
+                <a:spcPct val="120000"/>
+              </a:lnSpc>
+              <a:spcAft>
+                <a:spcPts val="600"/>
+              </a:spcAft>
+            </a:pPr>
+            <a:r>
+              <a:rPr sz="1400" b="1">
+                <a:solidFill>
+                  <a:srgbClr val="F5670F"/>
+                </a:solidFill>
+                <a:latin typeface="微软雅黑"/>
+              </a:rPr>
+              <a:t>1. </a:t>
+            </a:r>
+            <a:r>
+              <a:rPr sz="1400" b="0">
+                <a:solidFill>
+                  <a:srgbClr val="010328"/>
+                </a:solidFill>
+                <a:latin typeface="微软雅黑"/>
+              </a:rPr>
+              <a:t>1. 完成工单P5《产线数据仓库》：及格标准4表设计合理+ORM入库+基础统计；优秀标准含索引优化+批量写入+复杂查询；</a:t>
+            </a:r>
+          </a:p>
+        </p:txBody>
+      </p:sp>
+      <p:sp>
+        <p:nvSpPr>
+          <p:cNvPr id="8" name="TextBox 7"/>
+          <p:cNvSpPr txBox="1"/>
+          <p:nvPr/>
+        </p:nvSpPr>
+        <p:spPr>
+          <a:xfrm>
+            <a:off x="850000" y="4420000"/>
+            <a:ext cx="10600000" cy="700000"/>
+          </a:xfrm>
+          <a:prstGeom prst="rect">
+            <a:avLst/>
+          </a:prstGeom>
+          <a:noFill/>
+        </p:spPr>
+        <p:txBody>
+          <a:bodyPr wrap="square" anchor="t">
+            <a:spAutoFit/>
+          </a:bodyPr>
+          <a:lstStyle/>
+          <a:p>
+            <a:pPr algn="l">
+              <a:lnSpc>
+                <a:spcPct val="120000"/>
+              </a:lnSpc>
+              <a:spcAft>
+                <a:spcPts val="600"/>
+              </a:spcAft>
+            </a:pPr>
+            <a:r>
+              <a:rPr sz="1400" b="1">
+                <a:solidFill>
+                  <a:srgbClr val="F5670F"/>
+                </a:solidFill>
+                <a:latin typeface="微软雅黑"/>
+              </a:rPr>
+              <a:t>2. </a:t>
+            </a:r>
+            <a:r>
+              <a:rPr sz="1400" b="0">
+                <a:solidFill>
+                  <a:srgbClr val="010328"/>
+                </a:solidFill>
+                <a:latin typeface="微软雅黑"/>
+              </a:rPr>
+              <a:t>2. 完成ER图与数据字典文档；</a:t>
+            </a:r>
+          </a:p>
+        </p:txBody>
+      </p:sp>
+      <p:sp>
+        <p:nvSpPr>
+          <p:cNvPr id="9" name="TextBox 8"/>
+          <p:cNvSpPr txBox="1"/>
+          <p:nvPr/>
+        </p:nvSpPr>
+        <p:spPr>
+          <a:xfrm>
+            <a:off x="850000" y="5140000"/>
+            <a:ext cx="10600000" cy="700000"/>
+          </a:xfrm>
+          <a:prstGeom prst="rect">
+            <a:avLst/>
+          </a:prstGeom>
+          <a:noFill/>
+        </p:spPr>
+        <p:txBody>
+          <a:bodyPr wrap="square" anchor="t">
+            <a:spAutoFit/>
+          </a:bodyPr>
+          <a:lstStyle/>
+          <a:p>
+            <a:pPr algn="l">
+              <a:lnSpc>
+                <a:spcPct val="120000"/>
+              </a:lnSpc>
+              <a:spcAft>
+                <a:spcPts val="600"/>
+              </a:spcAft>
+            </a:pPr>
+            <a:r>
+              <a:rPr sz="1400" b="1">
+                <a:solidFill>
+                  <a:srgbClr val="F5670F"/>
+                </a:solidFill>
+                <a:latin typeface="微软雅黑"/>
+              </a:rPr>
+              <a:t>3. </a:t>
+            </a:r>
+            <a:r>
+              <a:rPr sz="1400" b="0">
+                <a:solidFill>
+                  <a:srgbClr val="010328"/>
+                </a:solidFill>
+                <a:latin typeface="微软雅黑"/>
+              </a:rPr>
+              <a:t>3. 预习机器学习基本流程（训练/验证/预测）。</a:t>
+            </a:r>
+          </a:p>
+        </p:txBody>
+      </p:sp>
+      <p:sp>
+        <p:nvSpPr>
+          <p:cNvPr id="10" name="TextBox 9"/>
+          <p:cNvSpPr txBox="1"/>
+          <p:nvPr/>
+        </p:nvSpPr>
+        <p:spPr>
+          <a:xfrm>
+            <a:off x="850000" y="5960000"/>
+            <a:ext cx="10600000" cy="500000"/>
+          </a:xfrm>
+          <a:prstGeom prst="rect">
+            <a:avLst/>
+          </a:prstGeom>
+          <a:noFill/>
+        </p:spPr>
+        <p:txBody>
+          <a:bodyPr wrap="square" anchor="t">
+            <a:spAutoFit/>
+          </a:bodyPr>
+          <a:lstStyle/>
+          <a:p>
+            <a:pPr algn="l">
+              <a:lnSpc>
+                <a:spcPct val="110000"/>
+              </a:lnSpc>
+              <a:spcAft>
+                <a:spcPts val="600"/>
+              </a:spcAft>
+            </a:pPr>
+            <a:r>
+              <a:rPr sz="1300" b="1">
+                <a:solidFill>
+                  <a:srgbClr val="0475B6"/>
+                </a:solidFill>
+                <a:latin typeface="微软雅黑"/>
+              </a:rPr>
+              <a:t>下次课预告：</a:t>
+            </a:r>
+            <a:r>
+              <a:rPr sz="1300" b="0">
+                <a:solidFill>
+                  <a:srgbClr val="44546A"/>
+                </a:solidFill>
+                <a:latin typeface="微软雅黑"/>
+              </a:rPr>
+              <a:t>见下次课工单任务书</a:t>
+            </a:r>
+          </a:p>
+        </p:txBody>
+      </p:sp>
+      <p:sp>
+        <p:nvSpPr>
+          <p:cNvPr id="11" name="Rectangle 10"/>
           <p:cNvSpPr/>
           <p:nvPr/>
         </p:nvSpPr>
         <p:spPr>
           <a:xfrm>
-            <a:off x="475488" y="6419088"/>
-            <a:ext cx="11237976" cy="10972"/>
-          </a:xfrm>
-          <a:prstGeom prst="roundRect">
-            <a:avLst>
-              <a:gd name="adj" fmla="val 50000"/>
-            </a:avLst>
+            <a:off x="500000" y="6500000"/>
+            <a:ext cx="11100000" cy="20000"/>
+          </a:xfrm>
+          <a:prstGeom prst="rect">
+            <a:avLst/>
           </a:prstGeom>
           <a:solidFill>
-            <a:srgbClr val="E4F1EE"/>
+            <a:srgbClr val="C9D4EE"/>
           </a:solidFill>
           <a:ln>
             <a:noFill/>
@@ -4884,14 +5366,14 @@
       </p:sp>
       <p:sp>
         <p:nvSpPr>
-          <p:cNvPr id="9" name="TextBox 8"/>
+          <p:cNvPr id="12" name="TextBox 11"/>
           <p:cNvSpPr txBox="1"/>
           <p:nvPr/>
         </p:nvSpPr>
         <p:spPr>
           <a:xfrm>
-            <a:off x="475488" y="6455664"/>
-            <a:ext cx="7315200" cy="292608"/>
+            <a:off x="500000" y="6540000"/>
+            <a:ext cx="7000000" cy="300000"/>
           </a:xfrm>
           <a:prstGeom prst="rect">
             <a:avLst/>
@@ -4899,21 +5381,25 @@
           <a:noFill/>
         </p:spPr>
         <p:txBody>
-          <a:bodyPr wrap="square" anchor="t" lIns="0" rIns="0" tIns="0" bIns="0">
+          <a:bodyPr wrap="square" anchor="t">
             <a:spAutoFit/>
           </a:bodyPr>
           <a:lstStyle/>
           <a:p>
             <a:pPr algn="l">
               <a:lnSpc>
-                <a:spcPct val="114000"/>
+                <a:spcPct val="110000"/>
               </a:lnSpc>
+              <a:spcAft>
+                <a:spcPts val="600"/>
+              </a:spcAft>
             </a:pPr>
             <a:r>
-              <a:rPr sz="900" b="0">
-                <a:solidFill>
-                  <a:srgbClr val="5C6E6A"/>
-                </a:solidFill>
+              <a:rPr sz="1000" b="0">
+                <a:solidFill>
+                  <a:srgbClr val="8A97B5"/>
+                </a:solidFill>
+                <a:latin typeface="微软雅黑"/>
               </a:rPr>
               <a:t>两江智造集团 · Python程序设计（项目实战）</a:t>
             </a:r>
@@ -4922,14 +5408,14 @@
       </p:sp>
       <p:sp>
         <p:nvSpPr>
-          <p:cNvPr id="10" name="TextBox 9"/>
+          <p:cNvPr id="13" name="TextBox 12"/>
           <p:cNvSpPr txBox="1"/>
           <p:nvPr/>
         </p:nvSpPr>
         <p:spPr>
           <a:xfrm>
-            <a:off x="10597896" y="6537960"/>
-            <a:ext cx="996696" cy="301752"/>
+            <a:off x="10600000" y="6540000"/>
+            <a:ext cx="1000000" cy="300000"/>
           </a:xfrm>
           <a:prstGeom prst="rect">
             <a:avLst/>
@@ -4937,1599 +5423,27 @@
           <a:noFill/>
         </p:spPr>
         <p:txBody>
-          <a:bodyPr wrap="square" anchor="t" lIns="0" rIns="0" tIns="0" bIns="0">
+          <a:bodyPr wrap="square" anchor="t">
             <a:spAutoFit/>
           </a:bodyPr>
           <a:lstStyle/>
           <a:p>
             <a:pPr algn="r">
               <a:lnSpc>
-                <a:spcPct val="114000"/>
+                <a:spcPct val="110000"/>
               </a:lnSpc>
+              <a:spcAft>
+                <a:spcPts val="600"/>
+              </a:spcAft>
             </a:pPr>
             <a:r>
               <a:rPr sz="1000" b="0">
                 <a:solidFill>
                   <a:srgbClr val="8A97B5"/>
                 </a:solidFill>
-              </a:rPr>
-              <a:t>8 / 13</a:t>
-            </a:r>
-          </a:p>
-        </p:txBody>
-      </p:sp>
-      <p:sp>
-        <p:nvSpPr>
-          <p:cNvPr id="11" name="Rounded Rectangle 10"/>
-          <p:cNvSpPr/>
-          <p:nvPr/>
-        </p:nvSpPr>
-        <p:spPr>
-          <a:xfrm>
-            <a:off x="475488" y="1554480"/>
-            <a:ext cx="11237976" cy="755913"/>
-          </a:xfrm>
-          <a:prstGeom prst="roundRect">
-            <a:avLst>
-              <a:gd name="adj" fmla="val 6000"/>
-            </a:avLst>
-          </a:prstGeom>
-          <a:solidFill>
-            <a:srgbClr val="FFFFFF"/>
-          </a:solidFill>
-          <a:ln w="9525">
-            <a:solidFill>
-              <a:srgbClr val="E4F1EE"/>
-            </a:solidFill>
-          </a:ln>
-          <a:effectLst/>
-        </p:spPr>
-        <p:style>
-          <a:lnRef idx="1">
-            <a:schemeClr val="accent1"/>
-          </a:lnRef>
-          <a:fillRef idx="3">
-            <a:schemeClr val="accent1"/>
-          </a:fillRef>
-          <a:effectRef idx="2">
-            <a:schemeClr val="accent1"/>
-          </a:effectRef>
-          <a:fontRef idx="minor">
-            <a:schemeClr val="lt1"/>
-          </a:fontRef>
-        </p:style>
-        <p:txBody>
-          <a:bodyPr rtlCol="0" anchor="ctr"/>
-          <a:lstStyle/>
-          <a:p>
-            <a:pPr algn="ctr"/>
-          </a:p>
-        </p:txBody>
-      </p:sp>
-      <p:sp>
-        <p:nvSpPr>
-          <p:cNvPr id="12" name="Rounded Rectangle 11"/>
-          <p:cNvSpPr/>
-          <p:nvPr/>
-        </p:nvSpPr>
-        <p:spPr>
-          <a:xfrm>
-            <a:off x="475488" y="1554480"/>
-            <a:ext cx="54864" cy="755913"/>
-          </a:xfrm>
-          <a:prstGeom prst="roundRect">
-            <a:avLst>
-              <a:gd name="adj" fmla="val 50000"/>
-            </a:avLst>
-          </a:prstGeom>
-          <a:solidFill>
-            <a:srgbClr val="5C6E6A"/>
-          </a:solidFill>
-          <a:ln>
-            <a:noFill/>
-          </a:ln>
-          <a:effectLst/>
-        </p:spPr>
-        <p:style>
-          <a:lnRef idx="1">
-            <a:schemeClr val="accent1"/>
-          </a:lnRef>
-          <a:fillRef idx="3">
-            <a:schemeClr val="accent1"/>
-          </a:fillRef>
-          <a:effectRef idx="2">
-            <a:schemeClr val="accent1"/>
-          </a:effectRef>
-          <a:fontRef idx="minor">
-            <a:schemeClr val="lt1"/>
-          </a:fontRef>
-        </p:style>
-        <p:txBody>
-          <a:bodyPr rtlCol="0" anchor="ctr"/>
-          <a:lstStyle/>
-          <a:p>
-            <a:pPr algn="ctr"/>
-          </a:p>
-        </p:txBody>
-      </p:sp>
-      <p:sp>
-        <p:nvSpPr>
-          <p:cNvPr id="13" name="Rounded Rectangle 12"/>
-          <p:cNvSpPr/>
-          <p:nvPr/>
-        </p:nvSpPr>
-        <p:spPr>
-          <a:xfrm>
-            <a:off x="621792" y="1636776"/>
-            <a:ext cx="237744" cy="237744"/>
-          </a:xfrm>
-          <a:prstGeom prst="roundRect">
-            <a:avLst>
-              <a:gd name="adj" fmla="val 28000"/>
-            </a:avLst>
-          </a:prstGeom>
-          <a:solidFill>
-            <a:srgbClr val="5C6E6A"/>
-          </a:solidFill>
-          <a:ln>
-            <a:noFill/>
-          </a:ln>
-          <a:effectLst/>
-        </p:spPr>
-        <p:style>
-          <a:lnRef idx="1">
-            <a:schemeClr val="accent1"/>
-          </a:lnRef>
-          <a:fillRef idx="3">
-            <a:schemeClr val="accent1"/>
-          </a:fillRef>
-          <a:effectRef idx="2">
-            <a:schemeClr val="accent1"/>
-          </a:effectRef>
-          <a:fontRef idx="minor">
-            <a:schemeClr val="lt1"/>
-          </a:fontRef>
-        </p:style>
-        <p:txBody>
-          <a:bodyPr rtlCol="0" anchor="ctr"/>
-          <a:lstStyle/>
-          <a:p>
-            <a:pPr algn="ctr"/>
-          </a:p>
-        </p:txBody>
-      </p:sp>
-      <p:sp>
-        <p:nvSpPr>
-          <p:cNvPr id="14" name="TextBox 13"/>
-          <p:cNvSpPr txBox="1"/>
-          <p:nvPr/>
-        </p:nvSpPr>
-        <p:spPr>
-          <a:xfrm>
-            <a:off x="621792" y="1636776"/>
-            <a:ext cx="237744" cy="237744"/>
-          </a:xfrm>
-          <a:prstGeom prst="rect">
-            <a:avLst/>
-          </a:prstGeom>
-          <a:noFill/>
-        </p:spPr>
-        <p:txBody>
-          <a:bodyPr wrap="square" anchor="ctr" lIns="0" rIns="0" tIns="0" bIns="0">
-            <a:spAutoFit/>
-          </a:bodyPr>
-          <a:lstStyle/>
-          <a:p>
-            <a:pPr algn="ctr">
-              <a:lnSpc>
-                <a:spcPct val="114000"/>
-              </a:lnSpc>
-            </a:pPr>
-            <a:r>
-              <a:rPr sz="1000" b="1">
-                <a:solidFill>
-                  <a:srgbClr val="FFFFFF"/>
-                </a:solidFill>
-              </a:rPr>
-              <a:t>D</a:t>
-            </a:r>
-          </a:p>
-        </p:txBody>
-      </p:sp>
-      <p:sp>
-        <p:nvSpPr>
-          <p:cNvPr id="15" name="TextBox 14"/>
-          <p:cNvSpPr txBox="1"/>
-          <p:nvPr/>
-        </p:nvSpPr>
-        <p:spPr>
-          <a:xfrm>
-            <a:off x="932688" y="1618488"/>
-            <a:ext cx="8778240" cy="274320"/>
-          </a:xfrm>
-          <a:prstGeom prst="rect">
-            <a:avLst/>
-          </a:prstGeom>
-          <a:noFill/>
-        </p:spPr>
-        <p:txBody>
-          <a:bodyPr wrap="square" anchor="ctr" lIns="0" rIns="0" tIns="0" bIns="0">
-            <a:spAutoFit/>
-          </a:bodyPr>
-          <a:lstStyle/>
-          <a:p>
-            <a:pPr algn="l">
-              <a:lnSpc>
-                <a:spcPct val="114000"/>
-              </a:lnSpc>
-            </a:pPr>
-            <a:r>
-              <a:rPr sz="1050" b="1">
-                <a:solidFill>
-                  <a:srgbClr val="1B2B28"/>
-                </a:solidFill>
-              </a:rPr>
-              <a:t>及格</a:t>
-            </a:r>
-            <a:r>
-              <a:rPr sz="850" b="0">
-                <a:solidFill>
-                  <a:srgbClr val="5C6E6A"/>
-                </a:solidFill>
-              </a:rPr>
-              <a:t>   验收口径：</a:t>
-            </a:r>
-            <a:r>
-              <a:rPr sz="850" b="0">
-                <a:solidFill>
-                  <a:srgbClr val="5C6E6A"/>
-                </a:solidFill>
-              </a:rPr>
-              <a:t>4表设计合理；ORM入库成功；2条统计查询可用</a:t>
-            </a:r>
-          </a:p>
-        </p:txBody>
-      </p:sp>
-      <p:sp>
-        <p:nvSpPr>
-          <p:cNvPr id="16" name="Rounded Rectangle 15"/>
-          <p:cNvSpPr/>
-          <p:nvPr/>
-        </p:nvSpPr>
-        <p:spPr>
-          <a:xfrm>
-            <a:off x="11131803" y="1645920"/>
-            <a:ext cx="453644" cy="237744"/>
-          </a:xfrm>
-          <a:prstGeom prst="roundRect">
-            <a:avLst>
-              <a:gd name="adj" fmla="val 50000"/>
-            </a:avLst>
-          </a:prstGeom>
-          <a:solidFill>
-            <a:srgbClr val="0B5E54"/>
-          </a:solidFill>
-          <a:ln>
-            <a:noFill/>
-          </a:ln>
-          <a:effectLst/>
-        </p:spPr>
-        <p:style>
-          <a:lnRef idx="1">
-            <a:schemeClr val="accent1"/>
-          </a:lnRef>
-          <a:fillRef idx="3">
-            <a:schemeClr val="accent1"/>
-          </a:fillRef>
-          <a:effectRef idx="2">
-            <a:schemeClr val="accent1"/>
-          </a:effectRef>
-          <a:fontRef idx="minor">
-            <a:schemeClr val="lt1"/>
-          </a:fontRef>
-        </p:style>
-        <p:txBody>
-          <a:bodyPr rtlCol="0" anchor="ctr"/>
-          <a:lstStyle/>
-          <a:p>
-            <a:pPr algn="ctr"/>
-          </a:p>
-        </p:txBody>
-      </p:sp>
-      <p:sp>
-        <p:nvSpPr>
-          <p:cNvPr id="17" name="TextBox 16"/>
-          <p:cNvSpPr txBox="1"/>
-          <p:nvPr/>
-        </p:nvSpPr>
-        <p:spPr>
-          <a:xfrm>
-            <a:off x="11131803" y="1645920"/>
-            <a:ext cx="453644" cy="237744"/>
-          </a:xfrm>
-          <a:prstGeom prst="rect">
-            <a:avLst/>
-          </a:prstGeom>
-          <a:noFill/>
-        </p:spPr>
-        <p:txBody>
-          <a:bodyPr wrap="square" anchor="ctr" lIns="0" rIns="0" tIns="0" bIns="0">
-            <a:spAutoFit/>
-          </a:bodyPr>
-          <a:lstStyle/>
-          <a:p>
-            <a:pPr algn="ctr">
-              <a:lnSpc>
-                <a:spcPct val="114000"/>
-              </a:lnSpc>
-            </a:pPr>
-            <a:r>
-              <a:rPr sz="850" b="1">
-                <a:solidFill>
-                  <a:srgbClr val="FFFFFF"/>
-                </a:solidFill>
-              </a:rPr>
-              <a:t>达标</a:t>
-            </a:r>
-          </a:p>
-        </p:txBody>
-      </p:sp>
-      <p:sp>
-        <p:nvSpPr>
-          <p:cNvPr id="18" name="TextBox 17"/>
-          <p:cNvSpPr txBox="1"/>
-          <p:nvPr/>
-        </p:nvSpPr>
-        <p:spPr>
-          <a:xfrm>
-            <a:off x="932688" y="1901952"/>
-            <a:ext cx="10671047" cy="353577"/>
-          </a:xfrm>
-          <a:prstGeom prst="rect">
-            <a:avLst/>
-          </a:prstGeom>
-          <a:noFill/>
-        </p:spPr>
-        <p:txBody>
-          <a:bodyPr wrap="square" anchor="t" lIns="0" rIns="0" tIns="0" bIns="0">
-            <a:spAutoFit/>
-          </a:bodyPr>
-          <a:lstStyle/>
-          <a:p>
-            <a:pPr algn="l">
-              <a:lnSpc>
-                <a:spcPct val="114000"/>
-              </a:lnSpc>
-            </a:pPr>
-            <a:r>
-              <a:rPr sz="950" b="0">
-                <a:solidFill>
-                  <a:srgbClr val="1B2B28"/>
-                </a:solidFill>
-              </a:rPr>
-              <a:t>建表 4/4 张（缺:无）｜records 入库 1436 行（种子 500＋P4缓冲 936，预期 1436，相符=是）｜统计查询可用 3/3 条（T4a 3 行、T4b 3 行、T4c 12 行；门槛 ≥2 条）</a:t>
-            </a:r>
-          </a:p>
-        </p:txBody>
-      </p:sp>
-      <p:sp>
-        <p:nvSpPr>
-          <p:cNvPr id="19" name="Rounded Rectangle 18"/>
-          <p:cNvSpPr/>
-          <p:nvPr/>
-        </p:nvSpPr>
-        <p:spPr>
-          <a:xfrm>
-            <a:off x="475488" y="2374401"/>
-            <a:ext cx="11237976" cy="970276"/>
-          </a:xfrm>
-          <a:prstGeom prst="roundRect">
-            <a:avLst>
-              <a:gd name="adj" fmla="val 6000"/>
-            </a:avLst>
-          </a:prstGeom>
-          <a:solidFill>
-            <a:srgbClr val="FFFFFF"/>
-          </a:solidFill>
-          <a:ln w="9525">
-            <a:solidFill>
-              <a:srgbClr val="E4F1EE"/>
-            </a:solidFill>
-          </a:ln>
-          <a:effectLst/>
-        </p:spPr>
-        <p:style>
-          <a:lnRef idx="1">
-            <a:schemeClr val="accent1"/>
-          </a:lnRef>
-          <a:fillRef idx="3">
-            <a:schemeClr val="accent1"/>
-          </a:fillRef>
-          <a:effectRef idx="2">
-            <a:schemeClr val="accent1"/>
-          </a:effectRef>
-          <a:fontRef idx="minor">
-            <a:schemeClr val="lt1"/>
-          </a:fontRef>
-        </p:style>
-        <p:txBody>
-          <a:bodyPr rtlCol="0" anchor="ctr"/>
-          <a:lstStyle/>
-          <a:p>
-            <a:pPr algn="ctr"/>
-          </a:p>
-        </p:txBody>
-      </p:sp>
-      <p:sp>
-        <p:nvSpPr>
-          <p:cNvPr id="20" name="Rounded Rectangle 19"/>
-          <p:cNvSpPr/>
-          <p:nvPr/>
-        </p:nvSpPr>
-        <p:spPr>
-          <a:xfrm>
-            <a:off x="475488" y="2374401"/>
-            <a:ext cx="54864" cy="970276"/>
-          </a:xfrm>
-          <a:prstGeom prst="roundRect">
-            <a:avLst>
-              <a:gd name="adj" fmla="val 50000"/>
-            </a:avLst>
-          </a:prstGeom>
-          <a:solidFill>
-            <a:srgbClr val="157A6D"/>
-          </a:solidFill>
-          <a:ln>
-            <a:noFill/>
-          </a:ln>
-          <a:effectLst/>
-        </p:spPr>
-        <p:style>
-          <a:lnRef idx="1">
-            <a:schemeClr val="accent1"/>
-          </a:lnRef>
-          <a:fillRef idx="3">
-            <a:schemeClr val="accent1"/>
-          </a:fillRef>
-          <a:effectRef idx="2">
-            <a:schemeClr val="accent1"/>
-          </a:effectRef>
-          <a:fontRef idx="minor">
-            <a:schemeClr val="lt1"/>
-          </a:fontRef>
-        </p:style>
-        <p:txBody>
-          <a:bodyPr rtlCol="0" anchor="ctr"/>
-          <a:lstStyle/>
-          <a:p>
-            <a:pPr algn="ctr"/>
-          </a:p>
-        </p:txBody>
-      </p:sp>
-      <p:sp>
-        <p:nvSpPr>
-          <p:cNvPr id="21" name="Rounded Rectangle 20"/>
-          <p:cNvSpPr/>
-          <p:nvPr/>
-        </p:nvSpPr>
-        <p:spPr>
-          <a:xfrm>
-            <a:off x="621792" y="2456697"/>
-            <a:ext cx="237744" cy="237744"/>
-          </a:xfrm>
-          <a:prstGeom prst="roundRect">
-            <a:avLst>
-              <a:gd name="adj" fmla="val 28000"/>
-            </a:avLst>
-          </a:prstGeom>
-          <a:solidFill>
-            <a:srgbClr val="157A6D"/>
-          </a:solidFill>
-          <a:ln>
-            <a:noFill/>
-          </a:ln>
-          <a:effectLst/>
-        </p:spPr>
-        <p:style>
-          <a:lnRef idx="1">
-            <a:schemeClr val="accent1"/>
-          </a:lnRef>
-          <a:fillRef idx="3">
-            <a:schemeClr val="accent1"/>
-          </a:fillRef>
-          <a:effectRef idx="2">
-            <a:schemeClr val="accent1"/>
-          </a:effectRef>
-          <a:fontRef idx="minor">
-            <a:schemeClr val="lt1"/>
-          </a:fontRef>
-        </p:style>
-        <p:txBody>
-          <a:bodyPr rtlCol="0" anchor="ctr"/>
-          <a:lstStyle/>
-          <a:p>
-            <a:pPr algn="ctr"/>
-          </a:p>
-        </p:txBody>
-      </p:sp>
-      <p:sp>
-        <p:nvSpPr>
-          <p:cNvPr id="22" name="TextBox 21"/>
-          <p:cNvSpPr txBox="1"/>
-          <p:nvPr/>
-        </p:nvSpPr>
-        <p:spPr>
-          <a:xfrm>
-            <a:off x="621792" y="2456697"/>
-            <a:ext cx="237744" cy="237744"/>
-          </a:xfrm>
-          <a:prstGeom prst="rect">
-            <a:avLst/>
-          </a:prstGeom>
-          <a:noFill/>
-        </p:spPr>
-        <p:txBody>
-          <a:bodyPr wrap="square" anchor="ctr" lIns="0" rIns="0" tIns="0" bIns="0">
-            <a:spAutoFit/>
-          </a:bodyPr>
-          <a:lstStyle/>
-          <a:p>
-            <a:pPr algn="ctr">
-              <a:lnSpc>
-                <a:spcPct val="114000"/>
-              </a:lnSpc>
-            </a:pPr>
-            <a:r>
-              <a:rPr sz="1000" b="1">
-                <a:solidFill>
-                  <a:srgbClr val="FFFFFF"/>
-                </a:solidFill>
-              </a:rPr>
-              <a:t>C</a:t>
-            </a:r>
-          </a:p>
-        </p:txBody>
-      </p:sp>
-      <p:sp>
-        <p:nvSpPr>
-          <p:cNvPr id="23" name="TextBox 22"/>
-          <p:cNvSpPr txBox="1"/>
-          <p:nvPr/>
-        </p:nvSpPr>
-        <p:spPr>
-          <a:xfrm>
-            <a:off x="932688" y="2438409"/>
-            <a:ext cx="8778240" cy="274320"/>
-          </a:xfrm>
-          <a:prstGeom prst="rect">
-            <a:avLst/>
-          </a:prstGeom>
-          <a:noFill/>
-        </p:spPr>
-        <p:txBody>
-          <a:bodyPr wrap="square" anchor="ctr" lIns="0" rIns="0" tIns="0" bIns="0">
-            <a:spAutoFit/>
-          </a:bodyPr>
-          <a:lstStyle/>
-          <a:p>
-            <a:pPr algn="l">
-              <a:lnSpc>
-                <a:spcPct val="114000"/>
-              </a:lnSpc>
-            </a:pPr>
-            <a:r>
-              <a:rPr sz="1050" b="1">
-                <a:solidFill>
-                  <a:srgbClr val="1B2B28"/>
-                </a:solidFill>
-              </a:rPr>
-              <a:t>良好</a:t>
-            </a:r>
-            <a:r>
-              <a:rPr sz="850" b="0">
-                <a:solidFill>
-                  <a:srgbClr val="5C6E6A"/>
-                </a:solidFill>
-              </a:rPr>
-              <a:t>   验收口径：</a:t>
-            </a:r>
-            <a:r>
-              <a:rPr sz="850" b="0">
-                <a:solidFill>
-                  <a:srgbClr val="5C6E6A"/>
-                </a:solidFill>
-              </a:rPr>
-              <a:t>数据字典完整；批量事务；溯源查询正确</a:t>
-            </a:r>
-          </a:p>
-        </p:txBody>
-      </p:sp>
-      <p:sp>
-        <p:nvSpPr>
-          <p:cNvPr id="24" name="Rounded Rectangle 23"/>
-          <p:cNvSpPr/>
-          <p:nvPr/>
-        </p:nvSpPr>
-        <p:spPr>
-          <a:xfrm>
-            <a:off x="11131803" y="2465841"/>
-            <a:ext cx="453644" cy="237744"/>
-          </a:xfrm>
-          <a:prstGeom prst="roundRect">
-            <a:avLst>
-              <a:gd name="adj" fmla="val 50000"/>
-            </a:avLst>
-          </a:prstGeom>
-          <a:solidFill>
-            <a:srgbClr val="0B5E54"/>
-          </a:solidFill>
-          <a:ln>
-            <a:noFill/>
-          </a:ln>
-          <a:effectLst/>
-        </p:spPr>
-        <p:style>
-          <a:lnRef idx="1">
-            <a:schemeClr val="accent1"/>
-          </a:lnRef>
-          <a:fillRef idx="3">
-            <a:schemeClr val="accent1"/>
-          </a:fillRef>
-          <a:effectRef idx="2">
-            <a:schemeClr val="accent1"/>
-          </a:effectRef>
-          <a:fontRef idx="minor">
-            <a:schemeClr val="lt1"/>
-          </a:fontRef>
-        </p:style>
-        <p:txBody>
-          <a:bodyPr rtlCol="0" anchor="ctr"/>
-          <a:lstStyle/>
-          <a:p>
-            <a:pPr algn="ctr"/>
-          </a:p>
-        </p:txBody>
-      </p:sp>
-      <p:sp>
-        <p:nvSpPr>
-          <p:cNvPr id="25" name="TextBox 24"/>
-          <p:cNvSpPr txBox="1"/>
-          <p:nvPr/>
-        </p:nvSpPr>
-        <p:spPr>
-          <a:xfrm>
-            <a:off x="11131803" y="2465841"/>
-            <a:ext cx="453644" cy="237744"/>
-          </a:xfrm>
-          <a:prstGeom prst="rect">
-            <a:avLst/>
-          </a:prstGeom>
-          <a:noFill/>
-        </p:spPr>
-        <p:txBody>
-          <a:bodyPr wrap="square" anchor="ctr" lIns="0" rIns="0" tIns="0" bIns="0">
-            <a:spAutoFit/>
-          </a:bodyPr>
-          <a:lstStyle/>
-          <a:p>
-            <a:pPr algn="ctr">
-              <a:lnSpc>
-                <a:spcPct val="114000"/>
-              </a:lnSpc>
-            </a:pPr>
-            <a:r>
-              <a:rPr sz="850" b="1">
-                <a:solidFill>
-                  <a:srgbClr val="FFFFFF"/>
-                </a:solidFill>
-              </a:rPr>
-              <a:t>达标</a:t>
-            </a:r>
-          </a:p>
-        </p:txBody>
-      </p:sp>
-      <p:sp>
-        <p:nvSpPr>
-          <p:cNvPr id="26" name="TextBox 25"/>
-          <p:cNvSpPr txBox="1"/>
-          <p:nvPr/>
-        </p:nvSpPr>
-        <p:spPr>
-          <a:xfrm>
-            <a:off x="932688" y="2721873"/>
-            <a:ext cx="10671047" cy="567940"/>
-          </a:xfrm>
-          <a:prstGeom prst="rect">
-            <a:avLst/>
-          </a:prstGeom>
-          <a:noFill/>
-        </p:spPr>
-        <p:txBody>
-          <a:bodyPr wrap="square" anchor="t" lIns="0" rIns="0" tIns="0" bIns="0">
-            <a:spAutoFit/>
-          </a:bodyPr>
-          <a:lstStyle/>
-          <a:p>
-            <a:pPr algn="l">
-              <a:lnSpc>
-                <a:spcPct val="114000"/>
-              </a:lnSpc>
-            </a:pPr>
-            <a:r>
-              <a:rPr sz="950" b="0">
-                <a:solidFill>
-                  <a:srgbClr val="1B2B28"/>
-                </a:solidFill>
-              </a:rPr>
-              <a:t>数据字典 18/18 列有成文含义（未登记:无）｜批量事务 bulk_save_objects 分批提交 15 次（种子 5＋缓冲 10，每批≤100 条）｜溯源 alarms→devices→points→records 四表 JOIN 命中 57/57 条告警、外键孤儿行 0（100.0%）</a:t>
-            </a:r>
-          </a:p>
-        </p:txBody>
-      </p:sp>
-      <p:sp>
-        <p:nvSpPr>
-          <p:cNvPr id="27" name="Rounded Rectangle 26"/>
-          <p:cNvSpPr/>
-          <p:nvPr/>
-        </p:nvSpPr>
-        <p:spPr>
-          <a:xfrm>
-            <a:off x="475488" y="3408686"/>
-            <a:ext cx="11237976" cy="970276"/>
-          </a:xfrm>
-          <a:prstGeom prst="roundRect">
-            <a:avLst>
-              <a:gd name="adj" fmla="val 6000"/>
-            </a:avLst>
-          </a:prstGeom>
-          <a:solidFill>
-            <a:srgbClr val="FFFFFF"/>
-          </a:solidFill>
-          <a:ln w="9525">
-            <a:solidFill>
-              <a:srgbClr val="E4F1EE"/>
-            </a:solidFill>
-          </a:ln>
-          <a:effectLst/>
-        </p:spPr>
-        <p:style>
-          <a:lnRef idx="1">
-            <a:schemeClr val="accent1"/>
-          </a:lnRef>
-          <a:fillRef idx="3">
-            <a:schemeClr val="accent1"/>
-          </a:fillRef>
-          <a:effectRef idx="2">
-            <a:schemeClr val="accent1"/>
-          </a:effectRef>
-          <a:fontRef idx="minor">
-            <a:schemeClr val="lt1"/>
-          </a:fontRef>
-        </p:style>
-        <p:txBody>
-          <a:bodyPr rtlCol="0" anchor="ctr"/>
-          <a:lstStyle/>
-          <a:p>
-            <a:pPr algn="ctr"/>
-          </a:p>
-        </p:txBody>
-      </p:sp>
-      <p:sp>
-        <p:nvSpPr>
-          <p:cNvPr id="28" name="Rounded Rectangle 27"/>
-          <p:cNvSpPr/>
-          <p:nvPr/>
-        </p:nvSpPr>
-        <p:spPr>
-          <a:xfrm>
-            <a:off x="475488" y="3408686"/>
-            <a:ext cx="54864" cy="970276"/>
-          </a:xfrm>
-          <a:prstGeom prst="roundRect">
-            <a:avLst>
-              <a:gd name="adj" fmla="val 50000"/>
-            </a:avLst>
-          </a:prstGeom>
-          <a:solidFill>
-            <a:srgbClr val="0B5E54"/>
-          </a:solidFill>
-          <a:ln>
-            <a:noFill/>
-          </a:ln>
-          <a:effectLst/>
-        </p:spPr>
-        <p:style>
-          <a:lnRef idx="1">
-            <a:schemeClr val="accent1"/>
-          </a:lnRef>
-          <a:fillRef idx="3">
-            <a:schemeClr val="accent1"/>
-          </a:fillRef>
-          <a:effectRef idx="2">
-            <a:schemeClr val="accent1"/>
-          </a:effectRef>
-          <a:fontRef idx="minor">
-            <a:schemeClr val="lt1"/>
-          </a:fontRef>
-        </p:style>
-        <p:txBody>
-          <a:bodyPr rtlCol="0" anchor="ctr"/>
-          <a:lstStyle/>
-          <a:p>
-            <a:pPr algn="ctr"/>
-          </a:p>
-        </p:txBody>
-      </p:sp>
-      <p:sp>
-        <p:nvSpPr>
-          <p:cNvPr id="29" name="Rounded Rectangle 28"/>
-          <p:cNvSpPr/>
-          <p:nvPr/>
-        </p:nvSpPr>
-        <p:spPr>
-          <a:xfrm>
-            <a:off x="621792" y="3490982"/>
-            <a:ext cx="237744" cy="237744"/>
-          </a:xfrm>
-          <a:prstGeom prst="roundRect">
-            <a:avLst>
-              <a:gd name="adj" fmla="val 28000"/>
-            </a:avLst>
-          </a:prstGeom>
-          <a:solidFill>
-            <a:srgbClr val="0B5E54"/>
-          </a:solidFill>
-          <a:ln>
-            <a:noFill/>
-          </a:ln>
-          <a:effectLst/>
-        </p:spPr>
-        <p:style>
-          <a:lnRef idx="1">
-            <a:schemeClr val="accent1"/>
-          </a:lnRef>
-          <a:fillRef idx="3">
-            <a:schemeClr val="accent1"/>
-          </a:fillRef>
-          <a:effectRef idx="2">
-            <a:schemeClr val="accent1"/>
-          </a:effectRef>
-          <a:fontRef idx="minor">
-            <a:schemeClr val="lt1"/>
-          </a:fontRef>
-        </p:style>
-        <p:txBody>
-          <a:bodyPr rtlCol="0" anchor="ctr"/>
-          <a:lstStyle/>
-          <a:p>
-            <a:pPr algn="ctr"/>
-          </a:p>
-        </p:txBody>
-      </p:sp>
-      <p:sp>
-        <p:nvSpPr>
-          <p:cNvPr id="30" name="TextBox 29"/>
-          <p:cNvSpPr txBox="1"/>
-          <p:nvPr/>
-        </p:nvSpPr>
-        <p:spPr>
-          <a:xfrm>
-            <a:off x="621792" y="3490982"/>
-            <a:ext cx="237744" cy="237744"/>
-          </a:xfrm>
-          <a:prstGeom prst="rect">
-            <a:avLst/>
-          </a:prstGeom>
-          <a:noFill/>
-        </p:spPr>
-        <p:txBody>
-          <a:bodyPr wrap="square" anchor="ctr" lIns="0" rIns="0" tIns="0" bIns="0">
-            <a:spAutoFit/>
-          </a:bodyPr>
-          <a:lstStyle/>
-          <a:p>
-            <a:pPr algn="ctr">
-              <a:lnSpc>
-                <a:spcPct val="114000"/>
-              </a:lnSpc>
-            </a:pPr>
-            <a:r>
-              <a:rPr sz="1000" b="1">
-                <a:solidFill>
-                  <a:srgbClr val="FFFFFF"/>
-                </a:solidFill>
-              </a:rPr>
-              <a:t>B</a:t>
-            </a:r>
-          </a:p>
-        </p:txBody>
-      </p:sp>
-      <p:sp>
-        <p:nvSpPr>
-          <p:cNvPr id="31" name="TextBox 30"/>
-          <p:cNvSpPr txBox="1"/>
-          <p:nvPr/>
-        </p:nvSpPr>
-        <p:spPr>
-          <a:xfrm>
-            <a:off x="932688" y="3472694"/>
-            <a:ext cx="8778240" cy="274320"/>
-          </a:xfrm>
-          <a:prstGeom prst="rect">
-            <a:avLst/>
-          </a:prstGeom>
-          <a:noFill/>
-        </p:spPr>
-        <p:txBody>
-          <a:bodyPr wrap="square" anchor="ctr" lIns="0" rIns="0" tIns="0" bIns="0">
-            <a:spAutoFit/>
-          </a:bodyPr>
-          <a:lstStyle/>
-          <a:p>
-            <a:pPr algn="l">
-              <a:lnSpc>
-                <a:spcPct val="114000"/>
-              </a:lnSpc>
-            </a:pPr>
-            <a:r>
-              <a:rPr sz="1050" b="1">
-                <a:solidFill>
-                  <a:srgbClr val="1B2B28"/>
-                </a:solidFill>
-              </a:rPr>
-              <a:t>优秀</a:t>
-            </a:r>
-            <a:r>
-              <a:rPr sz="850" b="0">
-                <a:solidFill>
-                  <a:srgbClr val="5C6E6A"/>
-                </a:solidFill>
-              </a:rPr>
-              <a:t>   验收口径：</a:t>
-            </a:r>
-            <a:r>
-              <a:rPr sz="850" b="0">
-                <a:solidFill>
-                  <a:srgbClr val="5C6E6A"/>
-                </a:solidFill>
-              </a:rPr>
-              <a:t>索引优化有EXPLAIN证据；N+1问题已规避</a:t>
-            </a:r>
-          </a:p>
-        </p:txBody>
-      </p:sp>
-      <p:sp>
-        <p:nvSpPr>
-          <p:cNvPr id="32" name="Rounded Rectangle 31"/>
-          <p:cNvSpPr/>
-          <p:nvPr/>
-        </p:nvSpPr>
-        <p:spPr>
-          <a:xfrm>
-            <a:off x="11131803" y="3500126"/>
-            <a:ext cx="453644" cy="237744"/>
-          </a:xfrm>
-          <a:prstGeom prst="roundRect">
-            <a:avLst>
-              <a:gd name="adj" fmla="val 50000"/>
-            </a:avLst>
-          </a:prstGeom>
-          <a:solidFill>
-            <a:srgbClr val="0B5E54"/>
-          </a:solidFill>
-          <a:ln>
-            <a:noFill/>
-          </a:ln>
-          <a:effectLst/>
-        </p:spPr>
-        <p:style>
-          <a:lnRef idx="1">
-            <a:schemeClr val="accent1"/>
-          </a:lnRef>
-          <a:fillRef idx="3">
-            <a:schemeClr val="accent1"/>
-          </a:fillRef>
-          <a:effectRef idx="2">
-            <a:schemeClr val="accent1"/>
-          </a:effectRef>
-          <a:fontRef idx="minor">
-            <a:schemeClr val="lt1"/>
-          </a:fontRef>
-        </p:style>
-        <p:txBody>
-          <a:bodyPr rtlCol="0" anchor="ctr"/>
-          <a:lstStyle/>
-          <a:p>
-            <a:pPr algn="ctr"/>
-          </a:p>
-        </p:txBody>
-      </p:sp>
-      <p:sp>
-        <p:nvSpPr>
-          <p:cNvPr id="33" name="TextBox 32"/>
-          <p:cNvSpPr txBox="1"/>
-          <p:nvPr/>
-        </p:nvSpPr>
-        <p:spPr>
-          <a:xfrm>
-            <a:off x="11131803" y="3500126"/>
-            <a:ext cx="453644" cy="237744"/>
-          </a:xfrm>
-          <a:prstGeom prst="rect">
-            <a:avLst/>
-          </a:prstGeom>
-          <a:noFill/>
-        </p:spPr>
-        <p:txBody>
-          <a:bodyPr wrap="square" anchor="ctr" lIns="0" rIns="0" tIns="0" bIns="0">
-            <a:spAutoFit/>
-          </a:bodyPr>
-          <a:lstStyle/>
-          <a:p>
-            <a:pPr algn="ctr">
-              <a:lnSpc>
-                <a:spcPct val="114000"/>
-              </a:lnSpc>
-            </a:pPr>
-            <a:r>
-              <a:rPr sz="850" b="1">
-                <a:solidFill>
-                  <a:srgbClr val="FFFFFF"/>
-                </a:solidFill>
-              </a:rPr>
-              <a:t>达标</a:t>
-            </a:r>
-          </a:p>
-        </p:txBody>
-      </p:sp>
-      <p:sp>
-        <p:nvSpPr>
-          <p:cNvPr id="34" name="TextBox 33"/>
-          <p:cNvSpPr txBox="1"/>
-          <p:nvPr/>
-        </p:nvSpPr>
-        <p:spPr>
-          <a:xfrm>
-            <a:off x="932688" y="3756158"/>
-            <a:ext cx="10671047" cy="567940"/>
-          </a:xfrm>
-          <a:prstGeom prst="rect">
-            <a:avLst/>
-          </a:prstGeom>
-          <a:noFill/>
-        </p:spPr>
-        <p:txBody>
-          <a:bodyPr wrap="square" anchor="t" lIns="0" rIns="0" tIns="0" bIns="0">
-            <a:spAutoFit/>
-          </a:bodyPr>
-          <a:lstStyle/>
-          <a:p>
-            <a:pPr algn="l">
-              <a:lnSpc>
-                <a:spcPct val="114000"/>
-              </a:lnSpc>
-            </a:pPr>
-            <a:r>
-              <a:rPr sz="950" b="0">
-                <a:solidFill>
-                  <a:srgbClr val="1B2B28"/>
-                </a:solidFill>
-              </a:rPr>
-              <a:t>bench_records 20000 行区间查询命中 240 行，建索引前全表 SCAN=是 → 建索引后 SEARCH USING INDEX=是（计划行见本报告「B层·索引优化」段，墙钟毫秒只写 runtime/bench.json 不入 output/）｜N+1 实测：懒加载 4 条 SELECT vs joinedload 1 条（3 台设备）</a:t>
-            </a:r>
-          </a:p>
-        </p:txBody>
-      </p:sp>
-      <p:sp>
-        <p:nvSpPr>
-          <p:cNvPr id="35" name="Rounded Rectangle 34"/>
-          <p:cNvSpPr/>
-          <p:nvPr/>
-        </p:nvSpPr>
-        <p:spPr>
-          <a:xfrm>
-            <a:off x="475488" y="4442971"/>
-            <a:ext cx="11237976" cy="970276"/>
-          </a:xfrm>
-          <a:prstGeom prst="roundRect">
-            <a:avLst>
-              <a:gd name="adj" fmla="val 6000"/>
-            </a:avLst>
-          </a:prstGeom>
-          <a:solidFill>
-            <a:srgbClr val="FFFFFF"/>
-          </a:solidFill>
-          <a:ln w="9525">
-            <a:solidFill>
-              <a:srgbClr val="E4F1EE"/>
-            </a:solidFill>
-          </a:ln>
-          <a:effectLst/>
-        </p:spPr>
-        <p:style>
-          <a:lnRef idx="1">
-            <a:schemeClr val="accent1"/>
-          </a:lnRef>
-          <a:fillRef idx="3">
-            <a:schemeClr val="accent1"/>
-          </a:fillRef>
-          <a:effectRef idx="2">
-            <a:schemeClr val="accent1"/>
-          </a:effectRef>
-          <a:fontRef idx="minor">
-            <a:schemeClr val="lt1"/>
-          </a:fontRef>
-        </p:style>
-        <p:txBody>
-          <a:bodyPr rtlCol="0" anchor="ctr"/>
-          <a:lstStyle/>
-          <a:p>
-            <a:pPr algn="ctr"/>
-          </a:p>
-        </p:txBody>
-      </p:sp>
-      <p:sp>
-        <p:nvSpPr>
-          <p:cNvPr id="36" name="Rounded Rectangle 35"/>
-          <p:cNvSpPr/>
-          <p:nvPr/>
-        </p:nvSpPr>
-        <p:spPr>
-          <a:xfrm>
-            <a:off x="475488" y="4442971"/>
-            <a:ext cx="54864" cy="970276"/>
-          </a:xfrm>
-          <a:prstGeom prst="roundRect">
-            <a:avLst>
-              <a:gd name="adj" fmla="val 50000"/>
-            </a:avLst>
-          </a:prstGeom>
-          <a:solidFill>
-            <a:srgbClr val="C9A227"/>
-          </a:solidFill>
-          <a:ln>
-            <a:noFill/>
-          </a:ln>
-          <a:effectLst/>
-        </p:spPr>
-        <p:style>
-          <a:lnRef idx="1">
-            <a:schemeClr val="accent1"/>
-          </a:lnRef>
-          <a:fillRef idx="3">
-            <a:schemeClr val="accent1"/>
-          </a:fillRef>
-          <a:effectRef idx="2">
-            <a:schemeClr val="accent1"/>
-          </a:effectRef>
-          <a:fontRef idx="minor">
-            <a:schemeClr val="lt1"/>
-          </a:fontRef>
-        </p:style>
-        <p:txBody>
-          <a:bodyPr rtlCol="0" anchor="ctr"/>
-          <a:lstStyle/>
-          <a:p>
-            <a:pPr algn="ctr"/>
-          </a:p>
-        </p:txBody>
-      </p:sp>
-      <p:sp>
-        <p:nvSpPr>
-          <p:cNvPr id="37" name="Rounded Rectangle 36"/>
-          <p:cNvSpPr/>
-          <p:nvPr/>
-        </p:nvSpPr>
-        <p:spPr>
-          <a:xfrm>
-            <a:off x="621792" y="4525267"/>
-            <a:ext cx="237744" cy="237744"/>
-          </a:xfrm>
-          <a:prstGeom prst="roundRect">
-            <a:avLst>
-              <a:gd name="adj" fmla="val 28000"/>
-            </a:avLst>
-          </a:prstGeom>
-          <a:solidFill>
-            <a:srgbClr val="C9A227"/>
-          </a:solidFill>
-          <a:ln>
-            <a:noFill/>
-          </a:ln>
-          <a:effectLst/>
-        </p:spPr>
-        <p:style>
-          <a:lnRef idx="1">
-            <a:schemeClr val="accent1"/>
-          </a:lnRef>
-          <a:fillRef idx="3">
-            <a:schemeClr val="accent1"/>
-          </a:fillRef>
-          <a:effectRef idx="2">
-            <a:schemeClr val="accent1"/>
-          </a:effectRef>
-          <a:fontRef idx="minor">
-            <a:schemeClr val="lt1"/>
-          </a:fontRef>
-        </p:style>
-        <p:txBody>
-          <a:bodyPr rtlCol="0" anchor="ctr"/>
-          <a:lstStyle/>
-          <a:p>
-            <a:pPr algn="ctr"/>
-          </a:p>
-        </p:txBody>
-      </p:sp>
-      <p:sp>
-        <p:nvSpPr>
-          <p:cNvPr id="38" name="TextBox 37"/>
-          <p:cNvSpPr txBox="1"/>
-          <p:nvPr/>
-        </p:nvSpPr>
-        <p:spPr>
-          <a:xfrm>
-            <a:off x="621792" y="4525267"/>
-            <a:ext cx="237744" cy="237744"/>
-          </a:xfrm>
-          <a:prstGeom prst="rect">
-            <a:avLst/>
-          </a:prstGeom>
-          <a:noFill/>
-        </p:spPr>
-        <p:txBody>
-          <a:bodyPr wrap="square" anchor="ctr" lIns="0" rIns="0" tIns="0" bIns="0">
-            <a:spAutoFit/>
-          </a:bodyPr>
-          <a:lstStyle/>
-          <a:p>
-            <a:pPr algn="ctr">
-              <a:lnSpc>
-                <a:spcPct val="114000"/>
-              </a:lnSpc>
-            </a:pPr>
-            <a:r>
-              <a:rPr sz="1000" b="1">
-                <a:solidFill>
-                  <a:srgbClr val="FFFFFF"/>
-                </a:solidFill>
-              </a:rPr>
-              <a:t>A</a:t>
-            </a:r>
-          </a:p>
-        </p:txBody>
-      </p:sp>
-      <p:sp>
-        <p:nvSpPr>
-          <p:cNvPr id="39" name="TextBox 38"/>
-          <p:cNvSpPr txBox="1"/>
-          <p:nvPr/>
-        </p:nvSpPr>
-        <p:spPr>
-          <a:xfrm>
-            <a:off x="932688" y="4506979"/>
-            <a:ext cx="8778240" cy="274320"/>
-          </a:xfrm>
-          <a:prstGeom prst="rect">
-            <a:avLst/>
-          </a:prstGeom>
-          <a:noFill/>
-        </p:spPr>
-        <p:txBody>
-          <a:bodyPr wrap="square" anchor="ctr" lIns="0" rIns="0" tIns="0" bIns="0">
-            <a:spAutoFit/>
-          </a:bodyPr>
-          <a:lstStyle/>
-          <a:p>
-            <a:pPr algn="l">
-              <a:lnSpc>
-                <a:spcPct val="114000"/>
-              </a:lnSpc>
-            </a:pPr>
-            <a:r>
-              <a:rPr sz="1050" b="1">
-                <a:solidFill>
-                  <a:srgbClr val="1B2B28"/>
-                </a:solidFill>
-              </a:rPr>
-              <a:t>超优</a:t>
-            </a:r>
-            <a:r>
-              <a:rPr sz="850" b="0">
-                <a:solidFill>
-                  <a:srgbClr val="5C6E6A"/>
-                </a:solidFill>
-              </a:rPr>
-              <a:t>   验收口径：</a:t>
-            </a:r>
-            <a:r>
-              <a:rPr sz="850" b="0">
-                <a:solidFill>
-                  <a:srgbClr val="5C6E6A"/>
-                </a:solidFill>
-              </a:rPr>
-              <a:t>优秀+复杂查询(多表JOIN聚合)+导入P3仪表盘形成闭环演示</a:t>
-            </a:r>
-          </a:p>
-        </p:txBody>
-      </p:sp>
-      <p:sp>
-        <p:nvSpPr>
-          <p:cNvPr id="40" name="Rounded Rectangle 39"/>
-          <p:cNvSpPr/>
-          <p:nvPr/>
-        </p:nvSpPr>
-        <p:spPr>
-          <a:xfrm>
-            <a:off x="11131803" y="4534411"/>
-            <a:ext cx="453644" cy="237744"/>
-          </a:xfrm>
-          <a:prstGeom prst="roundRect">
-            <a:avLst>
-              <a:gd name="adj" fmla="val 50000"/>
-            </a:avLst>
-          </a:prstGeom>
-          <a:solidFill>
-            <a:srgbClr val="0B5E54"/>
-          </a:solidFill>
-          <a:ln>
-            <a:noFill/>
-          </a:ln>
-          <a:effectLst/>
-        </p:spPr>
-        <p:style>
-          <a:lnRef idx="1">
-            <a:schemeClr val="accent1"/>
-          </a:lnRef>
-          <a:fillRef idx="3">
-            <a:schemeClr val="accent1"/>
-          </a:fillRef>
-          <a:effectRef idx="2">
-            <a:schemeClr val="accent1"/>
-          </a:effectRef>
-          <a:fontRef idx="minor">
-            <a:schemeClr val="lt1"/>
-          </a:fontRef>
-        </p:style>
-        <p:txBody>
-          <a:bodyPr rtlCol="0" anchor="ctr"/>
-          <a:lstStyle/>
-          <a:p>
-            <a:pPr algn="ctr"/>
-          </a:p>
-        </p:txBody>
-      </p:sp>
-      <p:sp>
-        <p:nvSpPr>
-          <p:cNvPr id="41" name="TextBox 40"/>
-          <p:cNvSpPr txBox="1"/>
-          <p:nvPr/>
-        </p:nvSpPr>
-        <p:spPr>
-          <a:xfrm>
-            <a:off x="11131803" y="4534411"/>
-            <a:ext cx="453644" cy="237744"/>
-          </a:xfrm>
-          <a:prstGeom prst="rect">
-            <a:avLst/>
-          </a:prstGeom>
-          <a:noFill/>
-        </p:spPr>
-        <p:txBody>
-          <a:bodyPr wrap="square" anchor="ctr" lIns="0" rIns="0" tIns="0" bIns="0">
-            <a:spAutoFit/>
-          </a:bodyPr>
-          <a:lstStyle/>
-          <a:p>
-            <a:pPr algn="ctr">
-              <a:lnSpc>
-                <a:spcPct val="114000"/>
-              </a:lnSpc>
-            </a:pPr>
-            <a:r>
-              <a:rPr sz="850" b="1">
-                <a:solidFill>
-                  <a:srgbClr val="FFFFFF"/>
-                </a:solidFill>
-              </a:rPr>
-              <a:t>达标</a:t>
-            </a:r>
-          </a:p>
-        </p:txBody>
-      </p:sp>
-      <p:sp>
-        <p:nvSpPr>
-          <p:cNvPr id="42" name="TextBox 41"/>
-          <p:cNvSpPr txBox="1"/>
-          <p:nvPr/>
-        </p:nvSpPr>
-        <p:spPr>
-          <a:xfrm>
-            <a:off x="932688" y="4790443"/>
-            <a:ext cx="10671047" cy="567940"/>
-          </a:xfrm>
-          <a:prstGeom prst="rect">
-            <a:avLst/>
-          </a:prstGeom>
-          <a:noFill/>
-        </p:spPr>
-        <p:txBody>
-          <a:bodyPr wrap="square" anchor="t" lIns="0" rIns="0" tIns="0" bIns="0">
-            <a:spAutoFit/>
-          </a:bodyPr>
-          <a:lstStyle/>
-          <a:p>
-            <a:pPr algn="l">
-              <a:lnSpc>
-                <a:spcPct val="114000"/>
-              </a:lnSpc>
-            </a:pPr>
-            <a:r>
-              <a:rPr sz="950" b="0">
-                <a:solidFill>
-                  <a:srgbClr val="1B2B28"/>
-                </a:solidFill>
-              </a:rPr>
-              <a:t>设备×小时四表 JOIN 聚合 36 桶（3 台设备），与逐行手算一致=是；窗口环比 12 桶 ORM=裸SQL 一致｜P3 交接文件 output/p3_dashboard_handoff.csv：36 行×6 列[ts/device_id/line/temp/vib/status]，时间解析失败 0 行、未知设备 0 个、缺列:无</a:t>
-            </a:r>
-          </a:p>
-        </p:txBody>
-      </p:sp>
-      <p:sp>
-        <p:nvSpPr>
-          <p:cNvPr id="43" name="Rounded Rectangle 42"/>
-          <p:cNvSpPr/>
-          <p:nvPr/>
-        </p:nvSpPr>
-        <p:spPr>
-          <a:xfrm>
-            <a:off x="475488" y="5477255"/>
-            <a:ext cx="11237976" cy="941832"/>
-          </a:xfrm>
-          <a:prstGeom prst="roundRect">
-            <a:avLst>
-              <a:gd name="adj" fmla="val 5000"/>
-            </a:avLst>
-          </a:prstGeom>
-          <a:solidFill>
-            <a:srgbClr val="E4F1EE"/>
-          </a:solidFill>
-          <a:ln>
-            <a:noFill/>
-          </a:ln>
-          <a:effectLst/>
-        </p:spPr>
-        <p:style>
-          <a:lnRef idx="1">
-            <a:schemeClr val="accent1"/>
-          </a:lnRef>
-          <a:fillRef idx="3">
-            <a:schemeClr val="accent1"/>
-          </a:fillRef>
-          <a:effectRef idx="2">
-            <a:schemeClr val="accent1"/>
-          </a:effectRef>
-          <a:fontRef idx="minor">
-            <a:schemeClr val="lt1"/>
-          </a:fontRef>
-        </p:style>
-        <p:txBody>
-          <a:bodyPr rtlCol="0" anchor="ctr"/>
-          <a:lstStyle/>
-          <a:p>
-            <a:pPr algn="ctr"/>
-          </a:p>
-        </p:txBody>
-      </p:sp>
-      <p:sp>
-        <p:nvSpPr>
-          <p:cNvPr id="44" name="Rounded Rectangle 43"/>
-          <p:cNvSpPr/>
-          <p:nvPr/>
-        </p:nvSpPr>
-        <p:spPr>
-          <a:xfrm>
-            <a:off x="475488" y="5477255"/>
-            <a:ext cx="54864" cy="941832"/>
-          </a:xfrm>
-          <a:prstGeom prst="roundRect">
-            <a:avLst>
-              <a:gd name="adj" fmla="val 50000"/>
-            </a:avLst>
-          </a:prstGeom>
-          <a:solidFill>
-            <a:srgbClr val="C9A227"/>
-          </a:solidFill>
-          <a:ln>
-            <a:noFill/>
-          </a:ln>
-          <a:effectLst/>
-        </p:spPr>
-        <p:style>
-          <a:lnRef idx="1">
-            <a:schemeClr val="accent1"/>
-          </a:lnRef>
-          <a:fillRef idx="3">
-            <a:schemeClr val="accent1"/>
-          </a:fillRef>
-          <a:effectRef idx="2">
-            <a:schemeClr val="accent1"/>
-          </a:effectRef>
-          <a:fontRef idx="minor">
-            <a:schemeClr val="lt1"/>
-          </a:fontRef>
-        </p:style>
-        <p:txBody>
-          <a:bodyPr rtlCol="0" anchor="ctr"/>
-          <a:lstStyle/>
-          <a:p>
-            <a:pPr algn="ctr"/>
-          </a:p>
-        </p:txBody>
-      </p:sp>
-      <p:sp>
-        <p:nvSpPr>
-          <p:cNvPr id="45" name="TextBox 44"/>
-          <p:cNvSpPr txBox="1"/>
-          <p:nvPr/>
-        </p:nvSpPr>
-        <p:spPr>
-          <a:xfrm>
-            <a:off x="676656" y="5550407"/>
-            <a:ext cx="10908792" cy="795528"/>
-          </a:xfrm>
-          <a:prstGeom prst="rect">
-            <a:avLst/>
-          </a:prstGeom>
-          <a:noFill/>
-        </p:spPr>
-        <p:txBody>
-          <a:bodyPr wrap="square" anchor="t" lIns="0" rIns="0" tIns="0" bIns="0">
-            <a:spAutoFit/>
-          </a:bodyPr>
-          <a:lstStyle/>
-          <a:p>
-            <a:pPr algn="l">
-              <a:lnSpc>
-                <a:spcPct val="124000"/>
-              </a:lnSpc>
-            </a:pPr>
-            <a:r>
-              <a:rPr sz="850" b="0">
-                <a:solidFill>
-                  <a:srgbClr val="1B2B28"/>
-                </a:solidFill>
-              </a:rPr>
-              <a:t>出处：工程化项目/p55_warehouse_orm/output/report.txt 第 139 节「分层达标」——本机 2026-10-28 05:08 实跑落盘，上表数字逐字摘录、未改写。</a:t>
-            </a:r>
-          </a:p>
-          <a:p>
-            <a:pPr algn="l">
-              <a:lnSpc>
-                <a:spcPct val="124000"/>
-              </a:lnSpc>
-            </a:pPr>
-            <a:r>
-              <a:rPr sz="850" b="0">
-                <a:solidFill>
-                  <a:srgbClr val="1B2B28"/>
-                </a:solidFill>
-              </a:rPr>
-              <a:t>复现：cd 工程化项目/p55_warehouse_orm &amp;&amp; python run.py &amp;&amp; python -m pytest -q -o addopts=''</a:t>
-            </a:r>
-          </a:p>
-          <a:p>
-            <a:pPr algn="l">
-              <a:lnSpc>
-                <a:spcPct val="124000"/>
-              </a:lnSpc>
-            </a:pPr>
-            <a:r>
-              <a:rPr sz="850" b="0">
-                <a:solidFill>
-                  <a:srgbClr val="1B2B28"/>
-                </a:solidFill>
-              </a:rPr>
-              <a:t>口径：表中「判定」沿用报告原词——绿=达标/通过，黄=仅本节取证项通过（未取证子项在报告里逐条点名），红=未达标。</a:t>
+                <a:latin typeface="微软雅黑"/>
+              </a:rPr>
+              <a:t>11 / 13</a:t>
             </a:r>
           </a:p>
         </p:txBody>
@@ -6554,22 +5468,20 @@
       <p:grpSpPr/>
       <p:sp>
         <p:nvSpPr>
-          <p:cNvPr id="2" name="Rounded Rectangle 1"/>
+          <p:cNvPr id="2" name="Rectangle 1"/>
           <p:cNvSpPr/>
           <p:nvPr/>
         </p:nvSpPr>
         <p:spPr>
           <a:xfrm>
             <a:off x="0" y="0"/>
-            <a:ext cx="12191695" cy="64008"/>
-          </a:xfrm>
-          <a:prstGeom prst="roundRect">
-            <a:avLst>
-              <a:gd name="adj" fmla="val 50000"/>
-            </a:avLst>
+            <a:ext cx="12192000" cy="6858000"/>
+          </a:xfrm>
+          <a:prstGeom prst="rect">
+            <a:avLst/>
           </a:prstGeom>
           <a:solidFill>
-            <a:srgbClr val="0B5E54"/>
+            <a:srgbClr val="010328"/>
           </a:solidFill>
           <a:ln>
             <a:noFill/>
@@ -6600,60 +5512,20 @@
       </p:sp>
       <p:sp>
         <p:nvSpPr>
-          <p:cNvPr id="3" name="TextBox 2"/>
-          <p:cNvSpPr txBox="1"/>
-          <p:nvPr/>
-        </p:nvSpPr>
-        <p:spPr>
-          <a:xfrm>
-            <a:off x="475488" y="146304"/>
-            <a:ext cx="8229600" cy="292608"/>
-          </a:xfrm>
-          <a:prstGeom prst="rect">
-            <a:avLst/>
-          </a:prstGeom>
-          <a:noFill/>
-        </p:spPr>
-        <p:txBody>
-          <a:bodyPr wrap="square" anchor="t" lIns="0" rIns="0" tIns="0" bIns="0">
-            <a:spAutoFit/>
-          </a:bodyPr>
-          <a:lstStyle/>
-          <a:p>
-            <a:pPr algn="l">
-              <a:lnSpc>
-                <a:spcPct val="114000"/>
-              </a:lnSpc>
-            </a:pPr>
-            <a:r>
-              <a:rPr sz="1100" b="1">
-                <a:solidFill>
-                  <a:srgbClr val="0B5E54"/>
-                </a:solidFill>
-              </a:rPr>
-              <a:t>工单实战 · 运行留证</a:t>
-            </a:r>
-          </a:p>
-        </p:txBody>
-      </p:sp>
-      <p:sp>
-        <p:nvSpPr>
-          <p:cNvPr id="4" name="Rounded Rectangle 3"/>
+          <p:cNvPr id="3" name="Rectangle 2"/>
           <p:cNvSpPr/>
           <p:nvPr/>
         </p:nvSpPr>
         <p:spPr>
           <a:xfrm>
-            <a:off x="475488" y="475488"/>
-            <a:ext cx="2027872" cy="310896"/>
-          </a:xfrm>
-          <a:prstGeom prst="roundRect">
-            <a:avLst>
-              <a:gd name="adj" fmla="val 50000"/>
-            </a:avLst>
+            <a:off x="0" y="2880360"/>
+            <a:ext cx="12192000" cy="50000"/>
+          </a:xfrm>
+          <a:prstGeom prst="rect">
+            <a:avLst/>
           </a:prstGeom>
           <a:solidFill>
-            <a:srgbClr val="C9A227"/>
+            <a:srgbClr val="F5670F"/>
           </a:solidFill>
           <a:ln>
             <a:noFill/>
@@ -6684,14 +5556,56 @@
       </p:sp>
       <p:sp>
         <p:nvSpPr>
+          <p:cNvPr id="4" name="TextBox 3"/>
+          <p:cNvSpPr txBox="1"/>
+          <p:nvPr/>
+        </p:nvSpPr>
+        <p:spPr>
+          <a:xfrm>
+            <a:off x="0" y="1645920"/>
+            <a:ext cx="12192000" cy="1500000"/>
+          </a:xfrm>
+          <a:prstGeom prst="rect">
+            <a:avLst/>
+          </a:prstGeom>
+          <a:noFill/>
+        </p:spPr>
+        <p:txBody>
+          <a:bodyPr wrap="square" anchor="t">
+            <a:spAutoFit/>
+          </a:bodyPr>
+          <a:lstStyle/>
+          <a:p>
+            <a:pPr algn="ctr">
+              <a:lnSpc>
+                <a:spcPct val="110000"/>
+              </a:lnSpc>
+              <a:spcAft>
+                <a:spcPts val="600"/>
+              </a:spcAft>
+            </a:pPr>
+            <a:r>
+              <a:rPr sz="5400" b="1">
+                <a:solidFill>
+                  <a:srgbClr val="FFFFFF"/>
+                </a:solidFill>
+                <a:latin typeface="微软雅黑"/>
+              </a:rPr>
+              <a:t>THANKS</a:t>
+            </a:r>
+          </a:p>
+        </p:txBody>
+      </p:sp>
+      <p:sp>
+        <p:nvSpPr>
           <p:cNvPr id="5" name="TextBox 4"/>
           <p:cNvSpPr txBox="1"/>
           <p:nvPr/>
         </p:nvSpPr>
         <p:spPr>
           <a:xfrm>
-            <a:off x="475488" y="475488"/>
-            <a:ext cx="2027872" cy="310896"/>
+            <a:off x="0" y="3429000"/>
+            <a:ext cx="12192000" cy="800000"/>
           </a:xfrm>
           <a:prstGeom prst="rect">
             <a:avLst/>
@@ -6699,23 +5613,27 @@
           <a:noFill/>
         </p:spPr>
         <p:txBody>
-          <a:bodyPr wrap="square" anchor="ctr" lIns="0" rIns="0" tIns="0" bIns="0">
+          <a:bodyPr wrap="square" anchor="t">
             <a:spAutoFit/>
           </a:bodyPr>
           <a:lstStyle/>
           <a:p>
             <a:pPr algn="ctr">
               <a:lnSpc>
-                <a:spcPct val="114000"/>
+                <a:spcPct val="110000"/>
               </a:lnSpc>
+              <a:spcAft>
+                <a:spcPts val="600"/>
+              </a:spcAft>
             </a:pPr>
             <a:r>
-              <a:rPr sz="1050" b="1">
-                <a:solidFill>
-                  <a:srgbClr val="FFFFFF"/>
-                </a:solidFill>
-              </a:rPr>
-              <a:t>SCREENSHOT · 终端逐字截图</a:t>
+              <a:rPr sz="2200" b="1">
+                <a:solidFill>
+                  <a:srgbClr val="F5670F"/>
+                </a:solidFill>
+                <a:latin typeface="微软雅黑"/>
+              </a:rPr>
+              <a:t>感谢聆听 · 动手实践出真知</a:t>
             </a:r>
           </a:p>
         </p:txBody>
@@ -6728,8 +5646,8 @@
         </p:nvSpPr>
         <p:spPr>
           <a:xfrm>
-            <a:off x="475488" y="859536"/>
-            <a:ext cx="11237976" cy="502920"/>
+            <a:off x="0" y="4526280"/>
+            <a:ext cx="12192000" cy="600000"/>
           </a:xfrm>
           <a:prstGeom prst="rect">
             <a:avLst/>
@@ -6737,45 +5655,47 @@
           <a:noFill/>
         </p:spPr>
         <p:txBody>
-          <a:bodyPr wrap="square" anchor="t" lIns="0" rIns="0" tIns="0" bIns="0">
+          <a:bodyPr wrap="square" anchor="t">
             <a:spAutoFit/>
           </a:bodyPr>
           <a:lstStyle/>
           <a:p>
-            <a:pPr algn="l">
+            <a:pPr algn="ctr">
               <a:lnSpc>
-                <a:spcPct val="114000"/>
+                <a:spcPct val="110000"/>
               </a:lnSpc>
+              <a:spcAft>
+                <a:spcPts val="600"/>
+              </a:spcAft>
             </a:pPr>
             <a:r>
-              <a:rPr sz="2200" b="1">
-                <a:solidFill>
-                  <a:srgbClr val="1B2B28"/>
-                </a:solidFill>
-              </a:rPr>
-              <a:t>P5.1/P5.2 分层达标 · 四档逐字输出截图</a:t>
-            </a:r>
-          </a:p>
-        </p:txBody>
-      </p:sp>
-      <p:sp>
-        <p:nvSpPr>
-          <p:cNvPr id="7" name="Rounded Rectangle 6"/>
+              <a:rPr sz="1400" b="0">
+                <a:solidFill>
+                  <a:srgbClr val="BBC6E6"/>
+                </a:solidFill>
+                <a:latin typeface="微软雅黑"/>
+              </a:rPr>
+              <a:t>以生为本   |   做中学 · 学中做</a:t>
+            </a:r>
+          </a:p>
+        </p:txBody>
+      </p:sp>
+      <p:sp>
+        <p:nvSpPr>
+          <p:cNvPr id="7" name="Rectangle 6"/>
           <p:cNvSpPr/>
           <p:nvPr/>
         </p:nvSpPr>
         <p:spPr>
           <a:xfrm>
-            <a:off x="475488" y="1389888"/>
-            <a:ext cx="1234440" cy="27432"/>
-          </a:xfrm>
-          <a:prstGeom prst="roundRect">
-            <a:avLst>
-              <a:gd name="adj" fmla="val 50000"/>
-            </a:avLst>
+            <a:off x="500000" y="6500000"/>
+            <a:ext cx="11100000" cy="20000"/>
+          </a:xfrm>
+          <a:prstGeom prst="rect">
+            <a:avLst/>
           </a:prstGeom>
           <a:solidFill>
-            <a:srgbClr val="C9A227"/>
+            <a:srgbClr val="C9D4EE"/>
           </a:solidFill>
           <a:ln>
             <a:noFill/>
@@ -6806,47 +5726,43 @@
       </p:sp>
       <p:sp>
         <p:nvSpPr>
-          <p:cNvPr id="8" name="Rounded Rectangle 7"/>
-          <p:cNvSpPr/>
-          <p:nvPr/>
-        </p:nvSpPr>
-        <p:spPr>
-          <a:xfrm>
-            <a:off x="475488" y="6419088"/>
-            <a:ext cx="11237976" cy="10972"/>
-          </a:xfrm>
-          <a:prstGeom prst="roundRect">
-            <a:avLst>
-              <a:gd name="adj" fmla="val 50000"/>
-            </a:avLst>
-          </a:prstGeom>
-          <a:solidFill>
-            <a:srgbClr val="E4F1EE"/>
-          </a:solidFill>
-          <a:ln>
-            <a:noFill/>
-          </a:ln>
-          <a:effectLst/>
-        </p:spPr>
-        <p:style>
-          <a:lnRef idx="1">
-            <a:schemeClr val="accent1"/>
-          </a:lnRef>
-          <a:fillRef idx="3">
-            <a:schemeClr val="accent1"/>
-          </a:fillRef>
-          <a:effectRef idx="2">
-            <a:schemeClr val="accent1"/>
-          </a:effectRef>
-          <a:fontRef idx="minor">
-            <a:schemeClr val="lt1"/>
-          </a:fontRef>
-        </p:style>
-        <p:txBody>
-          <a:bodyPr rtlCol="0" anchor="ctr"/>
-          <a:lstStyle/>
-          <a:p>
-            <a:pPr algn="ctr"/>
+          <p:cNvPr id="8" name="TextBox 7"/>
+          <p:cNvSpPr txBox="1"/>
+          <p:nvPr/>
+        </p:nvSpPr>
+        <p:spPr>
+          <a:xfrm>
+            <a:off x="500000" y="6540000"/>
+            <a:ext cx="7000000" cy="300000"/>
+          </a:xfrm>
+          <a:prstGeom prst="rect">
+            <a:avLst/>
+          </a:prstGeom>
+          <a:noFill/>
+        </p:spPr>
+        <p:txBody>
+          <a:bodyPr wrap="square" anchor="t">
+            <a:spAutoFit/>
+          </a:bodyPr>
+          <a:lstStyle/>
+          <a:p>
+            <a:pPr algn="l">
+              <a:lnSpc>
+                <a:spcPct val="110000"/>
+              </a:lnSpc>
+              <a:spcAft>
+                <a:spcPts val="600"/>
+              </a:spcAft>
+            </a:pPr>
+            <a:r>
+              <a:rPr sz="1000" b="0">
+                <a:solidFill>
+                  <a:srgbClr val="8A97B5"/>
+                </a:solidFill>
+                <a:latin typeface="微软雅黑"/>
+              </a:rPr>
+              <a:t>两江智造集团 · Python程序设计（项目实战）</a:t>
+            </a:r>
           </a:p>
         </p:txBody>
       </p:sp>
@@ -6858,8 +5774,8 @@
         </p:nvSpPr>
         <p:spPr>
           <a:xfrm>
-            <a:off x="475488" y="6455664"/>
-            <a:ext cx="7315200" cy="292608"/>
+            <a:off x="10600000" y="6540000"/>
+            <a:ext cx="1000000" cy="300000"/>
           </a:xfrm>
           <a:prstGeom prst="rect">
             <a:avLst/>
@@ -6867,161 +5783,27 @@
           <a:noFill/>
         </p:spPr>
         <p:txBody>
-          <a:bodyPr wrap="square" anchor="t" lIns="0" rIns="0" tIns="0" bIns="0">
+          <a:bodyPr wrap="square" anchor="ctr">
             <a:spAutoFit/>
           </a:bodyPr>
           <a:lstStyle/>
           <a:p>
-            <a:pPr algn="l">
-              <a:lnSpc>
-                <a:spcPct val="114000"/>
-              </a:lnSpc>
-            </a:pPr>
-            <a:r>
-              <a:rPr sz="900" b="0">
-                <a:solidFill>
-                  <a:srgbClr val="5C6E6A"/>
-                </a:solidFill>
-              </a:rPr>
-              <a:t>两江智造集团 · Python程序设计（项目实战）</a:t>
-            </a:r>
-          </a:p>
-        </p:txBody>
-      </p:sp>
-      <p:sp>
-        <p:nvSpPr>
-          <p:cNvPr id="10" name="TextBox 9"/>
-          <p:cNvSpPr txBox="1"/>
-          <p:nvPr/>
-        </p:nvSpPr>
-        <p:spPr>
-          <a:xfrm>
-            <a:off x="10597896" y="6537960"/>
-            <a:ext cx="996696" cy="301752"/>
-          </a:xfrm>
-          <a:prstGeom prst="rect">
-            <a:avLst/>
-          </a:prstGeom>
-          <a:noFill/>
-        </p:spPr>
-        <p:txBody>
-          <a:bodyPr wrap="square" anchor="t" lIns="0" rIns="0" tIns="0" bIns="0">
-            <a:spAutoFit/>
-          </a:bodyPr>
-          <a:lstStyle/>
-          <a:p>
             <a:pPr algn="r">
               <a:lnSpc>
-                <a:spcPct val="114000"/>
+                <a:spcPct val="110000"/>
               </a:lnSpc>
+              <a:spcAft>
+                <a:spcPts val="600"/>
+              </a:spcAft>
             </a:pPr>
             <a:r>
               <a:rPr sz="1000" b="0">
                 <a:solidFill>
                   <a:srgbClr val="8A97B5"/>
                 </a:solidFill>
-              </a:rPr>
-              <a:t>9 / 13</a:t>
-            </a:r>
-          </a:p>
-        </p:txBody>
-      </p:sp>
-      <p:sp>
-        <p:nvSpPr>
-          <p:cNvPr id="11" name="TextBox 10"/>
-          <p:cNvSpPr txBox="1"/>
-          <p:nvPr/>
-        </p:nvSpPr>
-        <p:spPr>
-          <a:xfrm>
-            <a:off x="475488" y="1517904"/>
-            <a:ext cx="11237976" cy="237744"/>
-          </a:xfrm>
-          <a:prstGeom prst="rect">
-            <a:avLst/>
-          </a:prstGeom>
-          <a:noFill/>
-        </p:spPr>
-        <p:txBody>
-          <a:bodyPr wrap="square" anchor="t" lIns="0" rIns="0" tIns="0" bIns="0">
-            <a:spAutoFit/>
-          </a:bodyPr>
-          <a:lstStyle/>
-          <a:p>
-            <a:pPr algn="l">
-              <a:lnSpc>
-                <a:spcPct val="114000"/>
-              </a:lnSpc>
-            </a:pPr>
-            <a:r>
-              <a:rPr sz="1000" b="0">
-                <a:solidFill>
-                  <a:srgbClr val="5C6E6A"/>
-                </a:solidFill>
-              </a:rPr>
-              <a:t>终端窗口截图：由 report.txt 本节逐字渲染，未手工改写</a:t>
-            </a:r>
-          </a:p>
-        </p:txBody>
-      </p:sp>
-      <p:pic>
-        <p:nvPicPr>
-          <p:cNvPr id="12" name="Picture 11" descr="p55_warehouse_orm_classroom.png"/>
-          <p:cNvPicPr>
-            <a:picLocks noChangeAspect="1"/>
-          </p:cNvPicPr>
-          <p:nvPr/>
-        </p:nvPicPr>
-        <p:blipFill>
-          <a:blip r:embed="rId2"/>
-          <a:stretch>
-            <a:fillRect/>
-          </a:stretch>
-        </p:blipFill>
-        <p:spPr>
-          <a:xfrm>
-            <a:off x="475488" y="1823437"/>
-            <a:ext cx="11237976" cy="3787198"/>
-          </a:xfrm>
-          <a:prstGeom prst="rect">
-            <a:avLst/>
-          </a:prstGeom>
-        </p:spPr>
-      </p:pic>
-      <p:sp>
-        <p:nvSpPr>
-          <p:cNvPr id="13" name="TextBox 12"/>
-          <p:cNvSpPr txBox="1"/>
-          <p:nvPr/>
-        </p:nvSpPr>
-        <p:spPr>
-          <a:xfrm>
-            <a:off x="475488" y="5647210"/>
-            <a:ext cx="11237976" cy="256032"/>
-          </a:xfrm>
-          <a:prstGeom prst="rect">
-            <a:avLst/>
-          </a:prstGeom>
-          <a:noFill/>
-        </p:spPr>
-        <p:txBody>
-          <a:bodyPr wrap="square" anchor="t" lIns="0" rIns="0" tIns="0" bIns="0">
-            <a:spAutoFit/>
-          </a:bodyPr>
-          <a:lstStyle/>
-          <a:p>
-            <a:pPr algn="l">
-              <a:lnSpc>
-                <a:spcPct val="114000"/>
-              </a:lnSpc>
-            </a:pPr>
-            <a:r>
-              <a:rPr sz="850" b="0">
-                <a:solidFill>
-                  <a:srgbClr val="5C6E6A"/>
-                </a:solidFill>
-              </a:rPr>
-              <a:t>▲ p55_warehouse_orm：分层达标 第 139 行起的四档逐字原文（绿=达标/通过，黄=仅本节取证项，橙=未实测项）</a:t>
+                <a:latin typeface="微软雅黑"/>
+              </a:rPr>
+              <a:t>12 / 13</a:t>
             </a:r>
           </a:p>
         </p:txBody>
@@ -7046,22 +5828,20 @@
       <p:grpSpPr/>
       <p:sp>
         <p:nvSpPr>
-          <p:cNvPr id="2" name="Rounded Rectangle 1"/>
+          <p:cNvPr id="2" name="Rectangle 1"/>
           <p:cNvSpPr/>
           <p:nvPr/>
         </p:nvSpPr>
         <p:spPr>
           <a:xfrm>
             <a:off x="0" y="0"/>
-            <a:ext cx="12191695" cy="64008"/>
-          </a:xfrm>
-          <a:prstGeom prst="roundRect">
-            <a:avLst>
-              <a:gd name="adj" fmla="val 50000"/>
-            </a:avLst>
+            <a:ext cx="12192000" cy="1150000"/>
+          </a:xfrm>
+          <a:prstGeom prst="rect">
+            <a:avLst/>
           </a:prstGeom>
           <a:solidFill>
-            <a:srgbClr val="0B5E54"/>
+            <a:srgbClr val="010328"/>
           </a:solidFill>
           <a:ln>
             <a:noFill/>
@@ -7092,60 +5872,20 @@
       </p:sp>
       <p:sp>
         <p:nvSpPr>
-          <p:cNvPr id="3" name="TextBox 2"/>
-          <p:cNvSpPr txBox="1"/>
-          <p:nvPr/>
-        </p:nvSpPr>
-        <p:spPr>
-          <a:xfrm>
-            <a:off x="475488" y="146304"/>
-            <a:ext cx="8229600" cy="292608"/>
-          </a:xfrm>
-          <a:prstGeom prst="rect">
-            <a:avLst/>
-          </a:prstGeom>
-          <a:noFill/>
-        </p:spPr>
-        <p:txBody>
-          <a:bodyPr wrap="square" anchor="t" lIns="0" rIns="0" tIns="0" bIns="0">
-            <a:spAutoFit/>
-          </a:bodyPr>
-          <a:lstStyle/>
-          <a:p>
-            <a:pPr algn="l">
-              <a:lnSpc>
-                <a:spcPct val="114000"/>
-              </a:lnSpc>
-            </a:pPr>
-            <a:r>
-              <a:rPr sz="1100" b="1">
-                <a:solidFill>
-                  <a:srgbClr val="0B5E54"/>
-                </a:solidFill>
-              </a:rPr>
-              <a:t>工单实战 · 运行留证</a:t>
-            </a:r>
-          </a:p>
-        </p:txBody>
-      </p:sp>
-      <p:sp>
-        <p:nvSpPr>
-          <p:cNvPr id="4" name="Rounded Rectangle 3"/>
+          <p:cNvPr id="3" name="Rectangle 2"/>
           <p:cNvSpPr/>
           <p:nvPr/>
         </p:nvSpPr>
         <p:spPr>
           <a:xfrm>
-            <a:off x="475488" y="475488"/>
-            <a:ext cx="2027872" cy="310896"/>
-          </a:xfrm>
-          <a:prstGeom prst="roundRect">
-            <a:avLst>
-              <a:gd name="adj" fmla="val 50000"/>
-            </a:avLst>
+            <a:off x="0" y="1150000"/>
+            <a:ext cx="2600000" cy="70000"/>
+          </a:xfrm>
+          <a:prstGeom prst="rect">
+            <a:avLst/>
           </a:prstGeom>
           <a:solidFill>
-            <a:srgbClr val="C9A227"/>
+            <a:srgbClr val="F5670F"/>
           </a:solidFill>
           <a:ln>
             <a:noFill/>
@@ -7176,14 +5916,14 @@
       </p:sp>
       <p:sp>
         <p:nvSpPr>
-          <p:cNvPr id="5" name="TextBox 4"/>
+          <p:cNvPr id="4" name="TextBox 3"/>
           <p:cNvSpPr txBox="1"/>
           <p:nvPr/>
         </p:nvSpPr>
         <p:spPr>
           <a:xfrm>
-            <a:off x="475488" y="475488"/>
-            <a:ext cx="2027872" cy="310896"/>
+            <a:off x="700000" y="300000"/>
+            <a:ext cx="10792000" cy="700000"/>
           </a:xfrm>
           <a:prstGeom prst="rect">
             <a:avLst/>
@@ -7191,83 +5931,47 @@
           <a:noFill/>
         </p:spPr>
         <p:txBody>
-          <a:bodyPr wrap="square" anchor="ctr" lIns="0" rIns="0" tIns="0" bIns="0">
+          <a:bodyPr wrap="square" anchor="t">
             <a:spAutoFit/>
           </a:bodyPr>
           <a:lstStyle/>
           <a:p>
-            <a:pPr algn="ctr">
-              <a:lnSpc>
-                <a:spcPct val="114000"/>
-              </a:lnSpc>
-            </a:pPr>
-            <a:r>
-              <a:rPr sz="1050" b="1">
-                <a:solidFill>
-                  <a:srgbClr val="FFFFFF"/>
-                </a:solidFill>
-              </a:rPr>
-              <a:t>SCREENSHOT · 终端逐字截图</a:t>
-            </a:r>
-          </a:p>
-        </p:txBody>
-      </p:sp>
-      <p:sp>
-        <p:nvSpPr>
-          <p:cNvPr id="6" name="TextBox 5"/>
-          <p:cNvSpPr txBox="1"/>
-          <p:nvPr/>
-        </p:nvSpPr>
-        <p:spPr>
-          <a:xfrm>
-            <a:off x="475488" y="859536"/>
-            <a:ext cx="11237976" cy="502920"/>
-          </a:xfrm>
-          <a:prstGeom prst="rect">
-            <a:avLst/>
-          </a:prstGeom>
-          <a:noFill/>
-        </p:spPr>
-        <p:txBody>
-          <a:bodyPr wrap="square" anchor="t" lIns="0" rIns="0" tIns="0" bIns="0">
-            <a:spAutoFit/>
-          </a:bodyPr>
-          <a:lstStyle/>
-          <a:p>
             <a:pPr algn="l">
               <a:lnSpc>
-                <a:spcPct val="114000"/>
+                <a:spcPct val="110000"/>
               </a:lnSpc>
+              <a:spcAft>
+                <a:spcPts val="600"/>
+              </a:spcAft>
             </a:pPr>
             <a:r>
-              <a:rPr sz="2200" b="1">
-                <a:solidFill>
-                  <a:srgbClr val="1B2B28"/>
-                </a:solidFill>
-              </a:rPr>
-              <a:t>P5.1/P5.2 · 测试全绿证据＋pytest 全量实跑</a:t>
-            </a:r>
-          </a:p>
-        </p:txBody>
-      </p:sp>
-      <p:sp>
-        <p:nvSpPr>
-          <p:cNvPr id="7" name="Rounded Rectangle 6"/>
+              <a:rPr sz="2400" b="1">
+                <a:solidFill>
+                  <a:srgbClr val="FFFFFF"/>
+                </a:solidFill>
+                <a:latin typeface="微软雅黑"/>
+              </a:rPr>
+              <a:t>下次课预告（第8周）</a:t>
+            </a:r>
+          </a:p>
+        </p:txBody>
+      </p:sp>
+      <p:sp>
+        <p:nvSpPr>
+          <p:cNvPr id="5" name="Rectangle 4"/>
           <p:cNvSpPr/>
           <p:nvPr/>
         </p:nvSpPr>
         <p:spPr>
           <a:xfrm>
-            <a:off x="475488" y="1389888"/>
-            <a:ext cx="1234440" cy="27432"/>
-          </a:xfrm>
-          <a:prstGeom prst="roundRect">
-            <a:avLst>
-              <a:gd name="adj" fmla="val 50000"/>
-            </a:avLst>
+            <a:off x="760000" y="1900000"/>
+            <a:ext cx="10900000" cy="1600000"/>
+          </a:xfrm>
+          <a:prstGeom prst="rect">
+            <a:avLst/>
           </a:prstGeom>
           <a:solidFill>
-            <a:srgbClr val="C9A227"/>
+            <a:srgbClr val="F3F6FD"/>
           </a:solidFill>
           <a:ln>
             <a:noFill/>
@@ -7298,22 +6002,20 @@
       </p:sp>
       <p:sp>
         <p:nvSpPr>
-          <p:cNvPr id="8" name="Rounded Rectangle 7"/>
+          <p:cNvPr id="6" name="Rectangle 5"/>
           <p:cNvSpPr/>
           <p:nvPr/>
         </p:nvSpPr>
         <p:spPr>
           <a:xfrm>
-            <a:off x="475488" y="6419088"/>
-            <a:ext cx="11237976" cy="10972"/>
-          </a:xfrm>
-          <a:prstGeom prst="roundRect">
-            <a:avLst>
-              <a:gd name="adj" fmla="val 50000"/>
-            </a:avLst>
+            <a:off x="760000" y="1900000"/>
+            <a:ext cx="150000" cy="1600000"/>
+          </a:xfrm>
+          <a:prstGeom prst="rect">
+            <a:avLst/>
           </a:prstGeom>
           <a:solidFill>
-            <a:srgbClr val="E4F1EE"/>
+            <a:srgbClr val="F5670F"/>
           </a:solidFill>
           <a:ln>
             <a:noFill/>
@@ -7344,14 +6046,14 @@
       </p:sp>
       <p:sp>
         <p:nvSpPr>
-          <p:cNvPr id="9" name="TextBox 8"/>
+          <p:cNvPr id="7" name="TextBox 6"/>
           <p:cNvSpPr txBox="1"/>
           <p:nvPr/>
         </p:nvSpPr>
         <p:spPr>
           <a:xfrm>
-            <a:off x="475488" y="6455664"/>
-            <a:ext cx="7315200" cy="292608"/>
+            <a:off x="1020000" y="2050000"/>
+            <a:ext cx="10500000" cy="1400000"/>
           </a:xfrm>
           <a:prstGeom prst="rect">
             <a:avLst/>
@@ -7359,37 +6061,60 @@
           <a:noFill/>
         </p:spPr>
         <p:txBody>
-          <a:bodyPr wrap="square" anchor="t" lIns="0" rIns="0" tIns="0" bIns="0">
+          <a:bodyPr wrap="square" anchor="t">
             <a:spAutoFit/>
           </a:bodyPr>
           <a:lstStyle/>
           <a:p>
             <a:pPr algn="l">
               <a:lnSpc>
-                <a:spcPct val="114000"/>
+                <a:spcPct val="110000"/>
               </a:lnSpc>
+              <a:spcAft>
+                <a:spcPts val="600"/>
+              </a:spcAft>
             </a:pPr>
             <a:r>
-              <a:rPr sz="900" b="0">
-                <a:solidFill>
-                  <a:srgbClr val="5C6E6A"/>
-                </a:solidFill>
-              </a:rPr>
-              <a:t>两江智造集团 · Python程序设计（项目实战）</a:t>
-            </a:r>
-          </a:p>
-        </p:txBody>
-      </p:sp>
-      <p:sp>
-        <p:nvSpPr>
-          <p:cNvPr id="10" name="TextBox 9"/>
+              <a:rPr sz="1700" b="1">
+                <a:solidFill>
+                  <a:srgbClr val="010328"/>
+                </a:solidFill>
+                <a:latin typeface="微软雅黑"/>
+              </a:rPr>
+              <a:t>主题: 诊断模型训练与F1达标——应用：见工单start</a:t>
+            </a:r>
+          </a:p>
+          <a:p>
+            <a:pPr algn="l">
+              <a:lnSpc>
+                <a:spcPct val="110000"/>
+              </a:lnSpc>
+              <a:spcAft>
+                <a:spcPts val="600"/>
+              </a:spcAft>
+            </a:pPr>
+            <a:r>
+              <a:rPr sz="1300" b="0">
+                <a:solidFill>
+                  <a:srgbClr val="44546A"/>
+                </a:solidFill>
+                <a:latin typeface="微软雅黑"/>
+              </a:rPr>
+              <a:t>预习快问: 过拟合的信号是什么？怎么防？</a:t>
+            </a:r>
+          </a:p>
+        </p:txBody>
+      </p:sp>
+      <p:sp>
+        <p:nvSpPr>
+          <p:cNvPr id="8" name="TextBox 7"/>
           <p:cNvSpPr txBox="1"/>
           <p:nvPr/>
         </p:nvSpPr>
         <p:spPr>
           <a:xfrm>
-            <a:off x="10597896" y="6537960"/>
-            <a:ext cx="996696" cy="301752"/>
+            <a:off x="760000" y="3900000"/>
+            <a:ext cx="10900000" cy="900000"/>
           </a:xfrm>
           <a:prstGeom prst="rect">
             <a:avLst/>
@@ -7397,37 +6122,78 @@
           <a:noFill/>
         </p:spPr>
         <p:txBody>
-          <a:bodyPr wrap="square" anchor="t" lIns="0" rIns="0" tIns="0" bIns="0">
+          <a:bodyPr wrap="square" anchor="t">
             <a:spAutoFit/>
           </a:bodyPr>
           <a:lstStyle/>
           <a:p>
-            <a:pPr algn="r">
+            <a:pPr algn="l">
               <a:lnSpc>
-                <a:spcPct val="114000"/>
+                <a:spcPct val="110000"/>
               </a:lnSpc>
+              <a:spcAft>
+                <a:spcPts val="600"/>
+              </a:spcAft>
             </a:pPr>
             <a:r>
-              <a:rPr sz="1000" b="0">
-                <a:solidFill>
-                  <a:srgbClr val="8A97B5"/>
-                </a:solidFill>
-              </a:rPr>
-              <a:t>10 / 13</a:t>
-            </a:r>
-          </a:p>
-        </p:txBody>
-      </p:sp>
-      <p:sp>
-        <p:nvSpPr>
-          <p:cNvPr id="11" name="TextBox 10"/>
+              <a:rPr sz="1400" b="1">
+                <a:solidFill>
+                  <a:srgbClr val="0545E8"/>
+                </a:solidFill>
+                <a:latin typeface="微软雅黑"/>
+              </a:rPr>
+              <a:t>课前完成：导学单 + 预习自测 + starter环境自检</a:t>
+            </a:r>
+          </a:p>
+          <a:p>
+            <a:pPr algn="l">
+              <a:lnSpc>
+                <a:spcPct val="110000"/>
+              </a:lnSpc>
+              <a:spcAft>
+                <a:spcPts val="600"/>
+              </a:spcAft>
+            </a:pPr>
+            <a:r>
+              <a:rPr sz="1250" b="0">
+                <a:solidFill>
+                  <a:srgbClr val="44546A"/>
+                </a:solidFill>
+                <a:latin typeface="微软雅黑"/>
+              </a:rPr>
+              <a:t>带着问题来上课——Predict先于Run</a:t>
+            </a:r>
+          </a:p>
+        </p:txBody>
+      </p:sp>
+    </p:spTree>
+  </p:cSld>
+  <p:clrMapOvr>
+    <a:masterClrMapping/>
+  </p:clrMapOvr>
+</p:sld>
+</file>
+
+<file path=ppt/slides/slide14.xml><?xml version="1.0" encoding="utf-8"?>
+<p:sld xmlns:a="http://schemas.openxmlformats.org/drawingml/2006/main" xmlns:p="http://schemas.openxmlformats.org/presentationml/2006/main" xmlns:r="http://schemas.openxmlformats.org/officeDocument/2006/relationships">
+  <p:cSld>
+    <p:spTree>
+      <p:nvGrpSpPr>
+        <p:cNvPr id="1" name=""/>
+        <p:cNvGrpSpPr/>
+        <p:nvPr/>
+      </p:nvGrpSpPr>
+      <p:grpSpPr/>
+      <p:sp>
+        <p:nvSpPr>
+          <p:cNvPr id="2" name="TextBox 1"/>
           <p:cNvSpPr txBox="1"/>
           <p:nvPr/>
         </p:nvSpPr>
         <p:spPr>
           <a:xfrm>
-            <a:off x="475488" y="1517904"/>
-            <a:ext cx="11237976" cy="237744"/>
+            <a:off x="548640" y="320040"/>
+            <a:ext cx="11094720" cy="914400"/>
           </a:xfrm>
           <a:prstGeom prst="rect">
             <a:avLst/>
@@ -7435,61 +6201,28 @@
           <a:noFill/>
         </p:spPr>
         <p:txBody>
-          <a:bodyPr wrap="square" anchor="t" lIns="0" rIns="0" tIns="0" bIns="0">
+          <a:bodyPr wrap="none">
             <a:spAutoFit/>
           </a:bodyPr>
           <a:lstStyle/>
           <a:p>
-            <a:pPr algn="l">
-              <a:lnSpc>
-                <a:spcPct val="114000"/>
-              </a:lnSpc>
-            </a:pPr>
-            <a:r>
-              <a:rPr sz="1000" b="0">
-                <a:solidFill>
-                  <a:srgbClr val="5C6E6A"/>
-                </a:solidFill>
-              </a:rPr>
-              <a:t>pytest 全量实跑：本机真实运行输出，非示例、非节选</a:t>
-            </a:r>
-          </a:p>
-        </p:txBody>
-      </p:sp>
-      <p:pic>
-        <p:nvPicPr>
-          <p:cNvPr id="12" name="Picture 11" descr="p55_warehouse_orm_pytest.png"/>
-          <p:cNvPicPr>
-            <a:picLocks noChangeAspect="1"/>
-          </p:cNvPicPr>
-          <p:nvPr/>
-        </p:nvPicPr>
-        <p:blipFill>
-          <a:blip r:embed="rId2"/>
-          <a:stretch>
-            <a:fillRect/>
-          </a:stretch>
-        </p:blipFill>
-        <p:spPr>
-          <a:xfrm>
-            <a:off x="475488" y="2490034"/>
-            <a:ext cx="11237976" cy="1539603"/>
-          </a:xfrm>
-          <a:prstGeom prst="rect">
-            <a:avLst/>
-          </a:prstGeom>
-        </p:spPr>
-      </p:pic>
-      <p:sp>
-        <p:nvSpPr>
-          <p:cNvPr id="13" name="TextBox 12"/>
+            <a:r>
+              <a:rPr sz="3000" b="1"/>
+              <a:t>安全与合规警示（操作前必读）</a:t>
+            </a:r>
+          </a:p>
+        </p:txBody>
+      </p:sp>
+      <p:sp>
+        <p:nvSpPr>
+          <p:cNvPr id="3" name="TextBox 2"/>
           <p:cNvSpPr txBox="1"/>
           <p:nvPr/>
         </p:nvSpPr>
         <p:spPr>
           <a:xfrm>
-            <a:off x="475488" y="4066213"/>
-            <a:ext cx="11237976" cy="256032"/>
+            <a:off x="731520" y="1371600"/>
+            <a:ext cx="10728960" cy="4663440"/>
           </a:xfrm>
           <a:prstGeom prst="rect">
             <a:avLst/>
@@ -7497,129 +6230,101 @@
           <a:noFill/>
         </p:spPr>
         <p:txBody>
-          <a:bodyPr wrap="square" anchor="t" lIns="0" rIns="0" tIns="0" bIns="0">
+          <a:bodyPr wrap="square">
             <a:spAutoFit/>
           </a:bodyPr>
           <a:lstStyle/>
           <a:p>
-            <a:pPr algn="l">
-              <a:lnSpc>
-                <a:spcPct val="114000"/>
-              </a:lnSpc>
+            <a:pPr>
+              <a:spcAft>
+                <a:spcPts val="1000"/>
+              </a:spcAft>
             </a:pPr>
             <a:r>
-              <a:rPr sz="850" b="0">
-                <a:solidFill>
-                  <a:srgbClr val="5C6E6A"/>
-                </a:solidFill>
-              </a:rPr>
-              <a:t>▲ pytest：58 passed in 4.54s（本机实跑，非示例）</a:t>
-            </a:r>
-          </a:p>
-        </p:txBody>
-      </p:sp>
-      <p:sp>
-        <p:nvSpPr>
-          <p:cNvPr id="14" name="Rounded Rectangle 13"/>
-          <p:cNvSpPr/>
-          <p:nvPr/>
-        </p:nvSpPr>
-        <p:spPr>
-          <a:xfrm>
-            <a:off x="475488" y="4431973"/>
-            <a:ext cx="11237976" cy="822960"/>
-          </a:xfrm>
-          <a:prstGeom prst="roundRect">
-            <a:avLst>
-              <a:gd name="adj" fmla="val 5000"/>
-            </a:avLst>
-          </a:prstGeom>
-          <a:solidFill>
-            <a:srgbClr val="E4F1EE"/>
-          </a:solidFill>
-          <a:ln>
-            <a:noFill/>
-          </a:ln>
-          <a:effectLst/>
-        </p:spPr>
-        <p:style>
-          <a:lnRef idx="1">
-            <a:schemeClr val="accent1"/>
-          </a:lnRef>
-          <a:fillRef idx="3">
-            <a:schemeClr val="accent1"/>
-          </a:fillRef>
-          <a:effectRef idx="2">
-            <a:schemeClr val="accent1"/>
-          </a:effectRef>
-          <a:fontRef idx="minor">
-            <a:schemeClr val="lt1"/>
-          </a:fontRef>
-        </p:style>
-        <p:txBody>
-          <a:bodyPr rtlCol="0" anchor="ctr"/>
-          <a:lstStyle/>
-          <a:p>
-            <a:pPr algn="ctr"/>
-          </a:p>
-        </p:txBody>
-      </p:sp>
-      <p:sp>
-        <p:nvSpPr>
-          <p:cNvPr id="15" name="Rounded Rectangle 14"/>
-          <p:cNvSpPr/>
-          <p:nvPr/>
-        </p:nvSpPr>
-        <p:spPr>
-          <a:xfrm>
-            <a:off x="475488" y="4431973"/>
-            <a:ext cx="54864" cy="822960"/>
-          </a:xfrm>
-          <a:prstGeom prst="roundRect">
-            <a:avLst>
-              <a:gd name="adj" fmla="val 50000"/>
-            </a:avLst>
-          </a:prstGeom>
-          <a:solidFill>
-            <a:srgbClr val="C9A227"/>
-          </a:solidFill>
-          <a:ln>
-            <a:noFill/>
-          </a:ln>
-          <a:effectLst/>
-        </p:spPr>
-        <p:style>
-          <a:lnRef idx="1">
-            <a:schemeClr val="accent1"/>
-          </a:lnRef>
-          <a:fillRef idx="3">
-            <a:schemeClr val="accent1"/>
-          </a:fillRef>
-          <a:effectRef idx="2">
-            <a:schemeClr val="accent1"/>
-          </a:effectRef>
-          <a:fontRef idx="minor">
-            <a:schemeClr val="lt1"/>
-          </a:fontRef>
-        </p:style>
-        <p:txBody>
-          <a:bodyPr rtlCol="0" anchor="ctr"/>
-          <a:lstStyle/>
-          <a:p>
-            <a:pPr algn="ctr"/>
-          </a:p>
-        </p:txBody>
-      </p:sp>
-      <p:sp>
-        <p:nvSpPr>
-          <p:cNvPr id="16" name="TextBox 15"/>
+              <a:rPr sz="1800"/>
+              <a:t>1. 上机前确认本工位电源开关与急停位置，确认设备处于安全状态。</a:t>
+            </a:r>
+          </a:p>
+          <a:p>
+            <a:pPr>
+              <a:spcAft>
+                <a:spcPts val="1000"/>
+              </a:spcAft>
+            </a:pPr>
+            <a:r>
+              <a:rPr sz="1800"/>
+              <a:t>2. 涉及接线的操作一律先断电、后验电、再作业，禁止带电插拔。</a:t>
+            </a:r>
+          </a:p>
+          <a:p>
+            <a:pPr>
+              <a:spcAft>
+                <a:spcPts val="1000"/>
+              </a:spcAft>
+            </a:pPr>
+            <a:r>
+              <a:rPr sz="1800"/>
+              <a:t>3. 身体任何部位不进入设备运动/散热区域，长发束起，不佩戴悬垂饰物。</a:t>
+            </a:r>
+          </a:p>
+          <a:p>
+            <a:pPr>
+              <a:spcAft>
+                <a:spcPts val="1000"/>
+              </a:spcAft>
+            </a:pPr>
+            <a:r>
+              <a:rPr sz="1800"/>
+              <a:t>4. 调试程序前先静态检查、再低速小样本试运行，确认无异常后放大规模。</a:t>
+            </a:r>
+          </a:p>
+          <a:p>
+            <a:pPr>
+              <a:spcAft>
+                <a:spcPts val="1000"/>
+              </a:spcAft>
+            </a:pPr>
+            <a:r>
+              <a:rPr sz="1800"/>
+              <a:t>5. 任何不确定或异常情况，立即停止操作并报告指导教师，不擅自处置。</a:t>
+            </a:r>
+          </a:p>
+          <a:p>
+            <a:r>
+              <a:rPr sz="1400" b="1"/>
+              <a:t>以上任一条违反，本次任务按课程标准「安全规范一票否决」条款记 0 分并中止实训。</a:t>
+            </a:r>
+          </a:p>
+        </p:txBody>
+      </p:sp>
+    </p:spTree>
+  </p:cSld>
+  <p:clrMapOvr>
+    <a:masterClrMapping/>
+  </p:clrMapOvr>
+</p:sld>
+</file>
+
+<file path=ppt/slides/slide15.xml><?xml version="1.0" encoding="utf-8"?>
+<p:sld xmlns:a="http://schemas.openxmlformats.org/drawingml/2006/main" xmlns:p="http://schemas.openxmlformats.org/presentationml/2006/main" xmlns:r="http://schemas.openxmlformats.org/officeDocument/2006/relationships">
+  <p:cSld>
+    <p:spTree>
+      <p:nvGrpSpPr>
+        <p:cNvPr id="1" name=""/>
+        <p:cNvGrpSpPr/>
+        <p:nvPr/>
+      </p:nvGrpSpPr>
+      <p:grpSpPr/>
+      <p:sp>
+        <p:nvSpPr>
+          <p:cNvPr id="2" name="TextBox 1"/>
           <p:cNvSpPr txBox="1"/>
           <p:nvPr/>
         </p:nvSpPr>
         <p:spPr>
           <a:xfrm>
-            <a:off x="676656" y="4514269"/>
-            <a:ext cx="10908792" cy="658368"/>
+            <a:off x="548640" y="320040"/>
+            <a:ext cx="11094720" cy="914400"/>
           </a:xfrm>
           <a:prstGeom prst="rect">
             <a:avLst/>
@@ -7627,53 +6332,195 @@
           <a:noFill/>
         </p:spPr>
         <p:txBody>
-          <a:bodyPr wrap="square" anchor="t" lIns="0" rIns="0" tIns="0" bIns="0">
+          <a:bodyPr wrap="none">
             <a:spAutoFit/>
           </a:bodyPr>
           <a:lstStyle/>
           <a:p>
-            <a:pPr algn="l">
-              <a:lnSpc>
-                <a:spcPct val="126000"/>
-              </a:lnSpc>
+            <a:r>
+              <a:rPr sz="3000" b="1"/>
+              <a:t>本任务六步法导航</a:t>
+            </a:r>
+          </a:p>
+        </p:txBody>
+      </p:sp>
+      <p:sp>
+        <p:nvSpPr>
+          <p:cNvPr id="3" name="TextBox 2"/>
+          <p:cNvSpPr txBox="1"/>
+          <p:nvPr/>
+        </p:nvSpPr>
+        <p:spPr>
+          <a:xfrm>
+            <a:off x="731520" y="1371600"/>
+            <a:ext cx="10728960" cy="4663440"/>
+          </a:xfrm>
+          <a:prstGeom prst="rect">
+            <a:avLst/>
+          </a:prstGeom>
+          <a:noFill/>
+        </p:spPr>
+        <p:txBody>
+          <a:bodyPr wrap="square">
+            <a:spAutoFit/>
+          </a:bodyPr>
+          <a:lstStyle/>
+          <a:p>
+            <a:pPr>
+              <a:spcAft>
+                <a:spcPts val="1000"/>
+              </a:spcAft>
             </a:pPr>
             <a:r>
-              <a:rPr sz="850" b="0">
-                <a:solidFill>
-                  <a:srgbClr val="1B2B28"/>
-                </a:solidFill>
-              </a:rPr>
-              <a:t>本项目四档只有一套阶梯口径（课堂 D/C/B/A 即工单及格/良好/优秀/超优），逐字实测见上一页截图；本页补的是测试全绿证据。</a:t>
-            </a:r>
-          </a:p>
-          <a:p>
-            <a:pPr algn="l">
-              <a:lnSpc>
-                <a:spcPct val="126000"/>
-              </a:lnSpc>
+              <a:rPr sz="1800"/>
+              <a:t>六步法：资讯 → 计划 → 决策 → 实施 → 检查 → 评估</a:t>
+            </a:r>
+          </a:p>
+          <a:p>
+            <a:pPr>
+              <a:spcAft>
+                <a:spcPts val="1000"/>
+              </a:spcAft>
             </a:pPr>
             <a:r>
-              <a:rPr sz="850" b="0">
-                <a:solidFill>
-                  <a:srgbClr val="1B2B28"/>
-                </a:solidFill>
-              </a:rPr>
-              <a:t>复现：cd 工程化项目/p55_warehouse_orm &amp;&amp; python -m pytest -q -o addopts=''</a:t>
-            </a:r>
-          </a:p>
-          <a:p>
-            <a:pPr algn="l">
-              <a:lnSpc>
-                <a:spcPct val="126000"/>
-              </a:lnSpc>
+              <a:rPr sz="1800"/>
+              <a:t>本讲对应工单：《Python程序设计-项目实战》分层任务工单</a:t>
+            </a:r>
+          </a:p>
+          <a:p>
+            <a:pPr>
+              <a:spcAft>
+                <a:spcPts val="1000"/>
+              </a:spcAft>
             </a:pPr>
             <a:r>
-              <a:rPr sz="850" b="0">
-                <a:solidFill>
-                  <a:srgbClr val="1B2B28"/>
-                </a:solidFill>
-              </a:rPr>
-              <a:t>工单提交：截图需含终端标题栏的文件名与完整输出，退出码 0 才算全绿。</a:t>
+              <a:rPr sz="1800"/>
+              <a:t>课堂产出：工单第六节实施记录须当堂填写，含操作前安全打勾与学生本人签字。</a:t>
+            </a:r>
+          </a:p>
+          <a:p>
+            <a:pPr>
+              <a:spcAft>
+                <a:spcPts val="1000"/>
+              </a:spcAft>
+            </a:pPr>
+            <a:r>
+              <a:rPr sz="1800"/>
+              <a:t>课后交付：班组长／操作员／教师三方联签后交回，缺签视为未交付。</a:t>
+            </a:r>
+          </a:p>
+        </p:txBody>
+      </p:sp>
+    </p:spTree>
+  </p:cSld>
+  <p:clrMapOvr>
+    <a:masterClrMapping/>
+  </p:clrMapOvr>
+</p:sld>
+</file>
+
+<file path=ppt/slides/slide16.xml><?xml version="1.0" encoding="utf-8"?>
+<p:sld xmlns:a="http://schemas.openxmlformats.org/drawingml/2006/main" xmlns:p="http://schemas.openxmlformats.org/presentationml/2006/main" xmlns:r="http://schemas.openxmlformats.org/officeDocument/2006/relationships">
+  <p:cSld>
+    <p:spTree>
+      <p:nvGrpSpPr>
+        <p:cNvPr id="1" name=""/>
+        <p:cNvGrpSpPr/>
+        <p:nvPr/>
+      </p:nvGrpSpPr>
+      <p:grpSpPr/>
+      <p:sp>
+        <p:nvSpPr>
+          <p:cNvPr id="2" name="TextBox 1"/>
+          <p:cNvSpPr txBox="1"/>
+          <p:nvPr/>
+        </p:nvSpPr>
+        <p:spPr>
+          <a:xfrm>
+            <a:off x="548640" y="320040"/>
+            <a:ext cx="11094720" cy="914400"/>
+          </a:xfrm>
+          <a:prstGeom prst="rect">
+            <a:avLst/>
+          </a:prstGeom>
+          <a:noFill/>
+        </p:spPr>
+        <p:txBody>
+          <a:bodyPr wrap="none">
+            <a:spAutoFit/>
+          </a:bodyPr>
+          <a:lstStyle/>
+          <a:p>
+            <a:r>
+              <a:rPr sz="3000" b="1"/>
+              <a:t>本讲与岗位任务单的衔接</a:t>
+            </a:r>
+          </a:p>
+        </p:txBody>
+      </p:sp>
+      <p:sp>
+        <p:nvSpPr>
+          <p:cNvPr id="3" name="TextBox 2"/>
+          <p:cNvSpPr txBox="1"/>
+          <p:nvPr/>
+        </p:nvSpPr>
+        <p:spPr>
+          <a:xfrm>
+            <a:off x="731520" y="1371600"/>
+            <a:ext cx="10728960" cy="4663440"/>
+          </a:xfrm>
+          <a:prstGeom prst="rect">
+            <a:avLst/>
+          </a:prstGeom>
+          <a:noFill/>
+        </p:spPr>
+        <p:txBody>
+          <a:bodyPr wrap="square">
+            <a:spAutoFit/>
+          </a:bodyPr>
+          <a:lstStyle/>
+          <a:p>
+            <a:pPr>
+              <a:spcAft>
+                <a:spcPts val="1000"/>
+              </a:spcAft>
+            </a:pPr>
+            <a:r>
+              <a:rPr sz="1800"/>
+              <a:t>本讲在工作过程系统化课程中承担的任务环节：任务实施</a:t>
+            </a:r>
+          </a:p>
+          <a:p>
+            <a:pPr>
+              <a:spcAft>
+                <a:spcPts val="1000"/>
+              </a:spcAft>
+            </a:pPr>
+            <a:r>
+              <a:rPr sz="1800"/>
+              <a:t>考核对齐：过程性成绩取自本讲工单第六节各模块得分合计（满分 100）。</a:t>
+            </a:r>
+          </a:p>
+          <a:p>
+            <a:pPr>
+              <a:spcAft>
+                <a:spcPts val="1000"/>
+              </a:spcAft>
+            </a:pPr>
+            <a:r>
+              <a:rPr sz="1800"/>
+              <a:t>达标线：综合成绩≥60 分，且无安全红线一票否决记录</a:t>
+            </a:r>
+          </a:p>
+          <a:p>
+            <a:pPr>
+              <a:spcAft>
+                <a:spcPts val="1000"/>
+              </a:spcAft>
+            </a:pPr>
+            <a:r>
+              <a:rPr sz="1800"/>
+              <a:t>无效工单判定：未打安全勾、无本人签字、无三方联签。</a:t>
             </a:r>
           </a:p>
         </p:txBody>
@@ -13076,20 +11923,22 @@
       <p:grpSpPr/>
       <p:sp>
         <p:nvSpPr>
-          <p:cNvPr id="2" name="Rectangle 1"/>
+          <p:cNvPr id="2" name="Rounded Rectangle 1"/>
           <p:cNvSpPr/>
           <p:nvPr/>
         </p:nvSpPr>
         <p:spPr>
           <a:xfrm>
             <a:off x="0" y="0"/>
-            <a:ext cx="12192000" cy="1150000"/>
-          </a:xfrm>
-          <a:prstGeom prst="rect">
-            <a:avLst/>
+            <a:ext cx="12191695" cy="64008"/>
+          </a:xfrm>
+          <a:prstGeom prst="roundRect">
+            <a:avLst>
+              <a:gd name="adj" fmla="val 50000"/>
+            </a:avLst>
           </a:prstGeom>
           <a:solidFill>
-            <a:srgbClr val="010328"/>
+            <a:srgbClr val="0B5E54"/>
           </a:solidFill>
           <a:ln>
             <a:noFill/>
@@ -13120,20 +11969,60 @@
       </p:sp>
       <p:sp>
         <p:nvSpPr>
-          <p:cNvPr id="3" name="Rectangle 2"/>
+          <p:cNvPr id="3" name="TextBox 2"/>
+          <p:cNvSpPr txBox="1"/>
+          <p:nvPr/>
+        </p:nvSpPr>
+        <p:spPr>
+          <a:xfrm>
+            <a:off x="475488" y="146304"/>
+            <a:ext cx="8229600" cy="292608"/>
+          </a:xfrm>
+          <a:prstGeom prst="rect">
+            <a:avLst/>
+          </a:prstGeom>
+          <a:noFill/>
+        </p:spPr>
+        <p:txBody>
+          <a:bodyPr wrap="square" anchor="t" lIns="0" rIns="0" tIns="0" bIns="0">
+            <a:spAutoFit/>
+          </a:bodyPr>
+          <a:lstStyle/>
+          <a:p>
+            <a:pPr algn="l">
+              <a:lnSpc>
+                <a:spcPct val="114000"/>
+              </a:lnSpc>
+            </a:pPr>
+            <a:r>
+              <a:rPr sz="1100" b="1">
+                <a:solidFill>
+                  <a:srgbClr val="0B5E54"/>
+                </a:solidFill>
+              </a:rPr>
+              <a:t>工单实战 · 本次实跑结果</a:t>
+            </a:r>
+          </a:p>
+        </p:txBody>
+      </p:sp>
+      <p:sp>
+        <p:nvSpPr>
+          <p:cNvPr id="4" name="Rounded Rectangle 3"/>
           <p:cNvSpPr/>
           <p:nvPr/>
         </p:nvSpPr>
         <p:spPr>
           <a:xfrm>
-            <a:off x="0" y="1150000"/>
-            <a:ext cx="2600000" cy="70000"/>
-          </a:xfrm>
-          <a:prstGeom prst="rect">
-            <a:avLst/>
+            <a:off x="475488" y="475488"/>
+            <a:ext cx="1881187" cy="310896"/>
+          </a:xfrm>
+          <a:prstGeom prst="roundRect">
+            <a:avLst>
+              <a:gd name="adj" fmla="val 50000"/>
+            </a:avLst>
           </a:prstGeom>
           <a:solidFill>
-            <a:srgbClr val="F5670F"/>
+            <a:srgbClr val="C9A227"/>
           </a:solidFill>
           <a:ln>
             <a:noFill/>
@@ -13164,14 +12053,14 @@
       </p:sp>
       <p:sp>
         <p:nvSpPr>
-          <p:cNvPr id="4" name="TextBox 3"/>
+          <p:cNvPr id="5" name="TextBox 4"/>
           <p:cNvSpPr txBox="1"/>
           <p:nvPr/>
         </p:nvSpPr>
         <p:spPr>
           <a:xfrm>
-            <a:off x="700000" y="300000"/>
-            <a:ext cx="10792000" cy="700000"/>
+            <a:off x="475488" y="475488"/>
+            <a:ext cx="1881187" cy="310896"/>
           </a:xfrm>
           <a:prstGeom prst="rect">
             <a:avLst/>
@@ -13179,47 +12068,83 @@
           <a:noFill/>
         </p:spPr>
         <p:txBody>
-          <a:bodyPr wrap="square" anchor="t">
+          <a:bodyPr wrap="square" anchor="ctr" lIns="0" rIns="0" tIns="0" bIns="0">
             <a:spAutoFit/>
           </a:bodyPr>
           <a:lstStyle/>
           <a:p>
+            <a:pPr algn="ctr">
+              <a:lnSpc>
+                <a:spcPct val="114000"/>
+              </a:lnSpc>
+            </a:pPr>
+            <a:r>
+              <a:rPr sz="1050" b="1">
+                <a:solidFill>
+                  <a:srgbClr val="FFFFFF"/>
+                </a:solidFill>
+              </a:rPr>
+              <a:t>REAL RUN · 四档逐字实测</a:t>
+            </a:r>
+          </a:p>
+        </p:txBody>
+      </p:sp>
+      <p:sp>
+        <p:nvSpPr>
+          <p:cNvPr id="6" name="TextBox 5"/>
+          <p:cNvSpPr txBox="1"/>
+          <p:nvPr/>
+        </p:nvSpPr>
+        <p:spPr>
+          <a:xfrm>
+            <a:off x="475488" y="859536"/>
+            <a:ext cx="11237976" cy="502920"/>
+          </a:xfrm>
+          <a:prstGeom prst="rect">
+            <a:avLst/>
+          </a:prstGeom>
+          <a:noFill/>
+        </p:spPr>
+        <p:txBody>
+          <a:bodyPr wrap="square" anchor="t" lIns="0" rIns="0" tIns="0" bIns="0">
+            <a:spAutoFit/>
+          </a:bodyPr>
+          <a:lstStyle/>
+          <a:p>
             <a:pPr algn="l">
               <a:lnSpc>
-                <a:spcPct val="110000"/>
+                <a:spcPct val="114000"/>
               </a:lnSpc>
-              <a:spcAft>
-                <a:spcPts val="600"/>
-              </a:spcAft>
             </a:pPr>
             <a:r>
-              <a:rPr sz="2400" b="1">
-                <a:solidFill>
-                  <a:srgbClr val="FFFFFF"/>
-                </a:solidFill>
-                <a:latin typeface="微软雅黑"/>
-              </a:rPr>
-              <a:t>总结评价与课后任务</a:t>
-            </a:r>
-          </a:p>
-        </p:txBody>
-      </p:sp>
-      <p:sp>
-        <p:nvSpPr>
-          <p:cNvPr id="5" name="Rectangle 4"/>
+              <a:rPr sz="2200" b="1">
+                <a:solidFill>
+                  <a:srgbClr val="1B2B28"/>
+                </a:solidFill>
+              </a:rPr>
+              <a:t>P5.1/P5.2 p55_warehouse_orm：本次 D/C/B/A 四档实测</a:t>
+            </a:r>
+          </a:p>
+        </p:txBody>
+      </p:sp>
+      <p:sp>
+        <p:nvSpPr>
+          <p:cNvPr id="7" name="Rounded Rectangle 6"/>
           <p:cNvSpPr/>
           <p:nvPr/>
         </p:nvSpPr>
         <p:spPr>
           <a:xfrm>
-            <a:off x="800000" y="1950000"/>
-            <a:ext cx="10600000" cy="1500000"/>
-          </a:xfrm>
-          <a:prstGeom prst="rect">
-            <a:avLst/>
+            <a:off x="475488" y="1389888"/>
+            <a:ext cx="1234440" cy="27432"/>
+          </a:xfrm>
+          <a:prstGeom prst="roundRect">
+            <a:avLst>
+              <a:gd name="adj" fmla="val 50000"/>
+            </a:avLst>
           </a:prstGeom>
           <a:solidFill>
-            <a:srgbClr val="F3F6FD"/>
+            <a:srgbClr val="C9A227"/>
           </a:solidFill>
           <a:ln>
             <a:noFill/>
@@ -13250,285 +12175,22 @@
       </p:sp>
       <p:sp>
         <p:nvSpPr>
-          <p:cNvPr id="6" name="TextBox 5"/>
-          <p:cNvSpPr txBox="1"/>
-          <p:nvPr/>
-        </p:nvSpPr>
-        <p:spPr>
-          <a:xfrm>
-            <a:off x="1000000" y="2050000"/>
-            <a:ext cx="10300000" cy="1400000"/>
-          </a:xfrm>
-          <a:prstGeom prst="rect">
-            <a:avLst/>
-          </a:prstGeom>
-          <a:noFill/>
-        </p:spPr>
-        <p:txBody>
-          <a:bodyPr wrap="square" anchor="t">
-            <a:spAutoFit/>
-          </a:bodyPr>
-          <a:lstStyle/>
-          <a:p>
-            <a:pPr algn="l">
-              <a:lnSpc>
-                <a:spcPct val="110000"/>
-              </a:lnSpc>
-              <a:spcAft>
-                <a:spcPts val="600"/>
-              </a:spcAft>
-            </a:pPr>
-            <a:r>
-              <a:rPr sz="1500" b="1">
-                <a:solidFill>
-                  <a:srgbClr val="0545E8"/>
-                </a:solidFill>
-                <a:latin typeface="微软雅黑"/>
-              </a:rPr>
-              <a:t>评价（10分钟）：</a:t>
-            </a:r>
-          </a:p>
-          <a:p>
-            <a:pPr algn="l">
-              <a:lnSpc>
-                <a:spcPct val="110000"/>
-              </a:lnSpc>
-              <a:spcAft>
-                <a:spcPts val="600"/>
-              </a:spcAft>
-            </a:pPr>
-            <a:r>
-              <a:rPr sz="1400" b="0">
-                <a:solidFill>
-                  <a:srgbClr val="010328"/>
-                </a:solidFill>
-                <a:latin typeface="微软雅黑"/>
-              </a:rPr>
-              <a:t>按D/C/B/A量表当堂评分；工单24小时内反馈评语与改进建议。</a:t>
-            </a:r>
-          </a:p>
-        </p:txBody>
-      </p:sp>
-      <p:sp>
-        <p:nvSpPr>
-          <p:cNvPr id="7" name="TextBox 6"/>
-          <p:cNvSpPr txBox="1"/>
-          <p:nvPr/>
-        </p:nvSpPr>
-        <p:spPr>
-          <a:xfrm>
-            <a:off x="850000" y="3700000"/>
-            <a:ext cx="10600000" cy="700000"/>
-          </a:xfrm>
-          <a:prstGeom prst="rect">
-            <a:avLst/>
-          </a:prstGeom>
-          <a:noFill/>
-        </p:spPr>
-        <p:txBody>
-          <a:bodyPr wrap="square" anchor="t">
-            <a:spAutoFit/>
-          </a:bodyPr>
-          <a:lstStyle/>
-          <a:p>
-            <a:pPr algn="l">
-              <a:lnSpc>
-                <a:spcPct val="120000"/>
-              </a:lnSpc>
-              <a:spcAft>
-                <a:spcPts val="600"/>
-              </a:spcAft>
-            </a:pPr>
-            <a:r>
-              <a:rPr sz="1400" b="1">
-                <a:solidFill>
-                  <a:srgbClr val="F5670F"/>
-                </a:solidFill>
-                <a:latin typeface="微软雅黑"/>
-              </a:rPr>
-              <a:t>1. </a:t>
-            </a:r>
-            <a:r>
-              <a:rPr sz="1400" b="0">
-                <a:solidFill>
-                  <a:srgbClr val="010328"/>
-                </a:solidFill>
-                <a:latin typeface="微软雅黑"/>
-              </a:rPr>
-              <a:t>1. 完成工单P5《产线数据仓库》：及格标准4表设计合理+ORM入库+基础统计；优秀标准含索引优化+批量写入+复杂查询；</a:t>
-            </a:r>
-          </a:p>
-        </p:txBody>
-      </p:sp>
-      <p:sp>
-        <p:nvSpPr>
-          <p:cNvPr id="8" name="TextBox 7"/>
-          <p:cNvSpPr txBox="1"/>
-          <p:nvPr/>
-        </p:nvSpPr>
-        <p:spPr>
-          <a:xfrm>
-            <a:off x="850000" y="4420000"/>
-            <a:ext cx="10600000" cy="700000"/>
-          </a:xfrm>
-          <a:prstGeom prst="rect">
-            <a:avLst/>
-          </a:prstGeom>
-          <a:noFill/>
-        </p:spPr>
-        <p:txBody>
-          <a:bodyPr wrap="square" anchor="t">
-            <a:spAutoFit/>
-          </a:bodyPr>
-          <a:lstStyle/>
-          <a:p>
-            <a:pPr algn="l">
-              <a:lnSpc>
-                <a:spcPct val="120000"/>
-              </a:lnSpc>
-              <a:spcAft>
-                <a:spcPts val="600"/>
-              </a:spcAft>
-            </a:pPr>
-            <a:r>
-              <a:rPr sz="1400" b="1">
-                <a:solidFill>
-                  <a:srgbClr val="F5670F"/>
-                </a:solidFill>
-                <a:latin typeface="微软雅黑"/>
-              </a:rPr>
-              <a:t>2. </a:t>
-            </a:r>
-            <a:r>
-              <a:rPr sz="1400" b="0">
-                <a:solidFill>
-                  <a:srgbClr val="010328"/>
-                </a:solidFill>
-                <a:latin typeface="微软雅黑"/>
-              </a:rPr>
-              <a:t>2. 完成ER图与数据字典文档；</a:t>
-            </a:r>
-          </a:p>
-        </p:txBody>
-      </p:sp>
-      <p:sp>
-        <p:nvSpPr>
-          <p:cNvPr id="9" name="TextBox 8"/>
-          <p:cNvSpPr txBox="1"/>
-          <p:nvPr/>
-        </p:nvSpPr>
-        <p:spPr>
-          <a:xfrm>
-            <a:off x="850000" y="5140000"/>
-            <a:ext cx="10600000" cy="700000"/>
-          </a:xfrm>
-          <a:prstGeom prst="rect">
-            <a:avLst/>
-          </a:prstGeom>
-          <a:noFill/>
-        </p:spPr>
-        <p:txBody>
-          <a:bodyPr wrap="square" anchor="t">
-            <a:spAutoFit/>
-          </a:bodyPr>
-          <a:lstStyle/>
-          <a:p>
-            <a:pPr algn="l">
-              <a:lnSpc>
-                <a:spcPct val="120000"/>
-              </a:lnSpc>
-              <a:spcAft>
-                <a:spcPts val="600"/>
-              </a:spcAft>
-            </a:pPr>
-            <a:r>
-              <a:rPr sz="1400" b="1">
-                <a:solidFill>
-                  <a:srgbClr val="F5670F"/>
-                </a:solidFill>
-                <a:latin typeface="微软雅黑"/>
-              </a:rPr>
-              <a:t>3. </a:t>
-            </a:r>
-            <a:r>
-              <a:rPr sz="1400" b="0">
-                <a:solidFill>
-                  <a:srgbClr val="010328"/>
-                </a:solidFill>
-                <a:latin typeface="微软雅黑"/>
-              </a:rPr>
-              <a:t>3. 预习机器学习基本流程（训练/验证/预测）。</a:t>
-            </a:r>
-          </a:p>
-        </p:txBody>
-      </p:sp>
-      <p:sp>
-        <p:nvSpPr>
-          <p:cNvPr id="10" name="TextBox 9"/>
-          <p:cNvSpPr txBox="1"/>
-          <p:nvPr/>
-        </p:nvSpPr>
-        <p:spPr>
-          <a:xfrm>
-            <a:off x="850000" y="5960000"/>
-            <a:ext cx="10600000" cy="500000"/>
-          </a:xfrm>
-          <a:prstGeom prst="rect">
-            <a:avLst/>
-          </a:prstGeom>
-          <a:noFill/>
-        </p:spPr>
-        <p:txBody>
-          <a:bodyPr wrap="square" anchor="t">
-            <a:spAutoFit/>
-          </a:bodyPr>
-          <a:lstStyle/>
-          <a:p>
-            <a:pPr algn="l">
-              <a:lnSpc>
-                <a:spcPct val="110000"/>
-              </a:lnSpc>
-              <a:spcAft>
-                <a:spcPts val="600"/>
-              </a:spcAft>
-            </a:pPr>
-            <a:r>
-              <a:rPr sz="1300" b="1">
-                <a:solidFill>
-                  <a:srgbClr val="0475B6"/>
-                </a:solidFill>
-                <a:latin typeface="微软雅黑"/>
-              </a:rPr>
-              <a:t>下次课预告：</a:t>
-            </a:r>
-            <a:r>
-              <a:rPr sz="1300" b="0">
-                <a:solidFill>
-                  <a:srgbClr val="44546A"/>
-                </a:solidFill>
-                <a:latin typeface="微软雅黑"/>
-              </a:rPr>
-              <a:t>见下次课工单任务书</a:t>
-            </a:r>
-          </a:p>
-        </p:txBody>
-      </p:sp>
-      <p:sp>
-        <p:nvSpPr>
-          <p:cNvPr id="11" name="Rectangle 10"/>
+          <p:cNvPr id="8" name="Rounded Rectangle 7"/>
           <p:cNvSpPr/>
           <p:nvPr/>
         </p:nvSpPr>
         <p:spPr>
           <a:xfrm>
-            <a:off x="500000" y="6500000"/>
-            <a:ext cx="11100000" cy="20000"/>
-          </a:xfrm>
-          <a:prstGeom prst="rect">
-            <a:avLst/>
+            <a:off x="475488" y="6419088"/>
+            <a:ext cx="11237976" cy="10972"/>
+          </a:xfrm>
+          <a:prstGeom prst="roundRect">
+            <a:avLst>
+              <a:gd name="adj" fmla="val 50000"/>
+            </a:avLst>
           </a:prstGeom>
           <a:solidFill>
-            <a:srgbClr val="C9D4EE"/>
+            <a:srgbClr val="E4F1EE"/>
           </a:solidFill>
           <a:ln>
             <a:noFill/>
@@ -13559,14 +12221,14 @@
       </p:sp>
       <p:sp>
         <p:nvSpPr>
-          <p:cNvPr id="12" name="TextBox 11"/>
+          <p:cNvPr id="9" name="TextBox 8"/>
           <p:cNvSpPr txBox="1"/>
           <p:nvPr/>
         </p:nvSpPr>
         <p:spPr>
           <a:xfrm>
-            <a:off x="500000" y="6540000"/>
-            <a:ext cx="7000000" cy="300000"/>
+            <a:off x="475488" y="6455664"/>
+            <a:ext cx="7315200" cy="292608"/>
           </a:xfrm>
           <a:prstGeom prst="rect">
             <a:avLst/>
@@ -13574,25 +12236,21 @@
           <a:noFill/>
         </p:spPr>
         <p:txBody>
-          <a:bodyPr wrap="square" anchor="t">
+          <a:bodyPr wrap="square" anchor="t" lIns="0" rIns="0" tIns="0" bIns="0">
             <a:spAutoFit/>
           </a:bodyPr>
           <a:lstStyle/>
           <a:p>
             <a:pPr algn="l">
               <a:lnSpc>
-                <a:spcPct val="110000"/>
+                <a:spcPct val="114000"/>
               </a:lnSpc>
-              <a:spcAft>
-                <a:spcPts val="600"/>
-              </a:spcAft>
             </a:pPr>
             <a:r>
-              <a:rPr sz="1000" b="0">
-                <a:solidFill>
-                  <a:srgbClr val="8A97B5"/>
-                </a:solidFill>
-                <a:latin typeface="微软雅黑"/>
+              <a:rPr sz="900" b="0">
+                <a:solidFill>
+                  <a:srgbClr val="5C6E6A"/>
+                </a:solidFill>
               </a:rPr>
               <a:t>两江智造集团 · Python程序设计（项目实战）</a:t>
             </a:r>
@@ -13601,14 +12259,14 @@
       </p:sp>
       <p:sp>
         <p:nvSpPr>
-          <p:cNvPr id="13" name="TextBox 12"/>
+          <p:cNvPr id="10" name="TextBox 9"/>
           <p:cNvSpPr txBox="1"/>
           <p:nvPr/>
         </p:nvSpPr>
         <p:spPr>
           <a:xfrm>
-            <a:off x="10600000" y="6540000"/>
-            <a:ext cx="1000000" cy="300000"/>
+            <a:off x="10597896" y="6537960"/>
+            <a:ext cx="996696" cy="301752"/>
           </a:xfrm>
           <a:prstGeom prst="rect">
             <a:avLst/>
@@ -13616,27 +12274,1599 @@
           <a:noFill/>
         </p:spPr>
         <p:txBody>
-          <a:bodyPr wrap="square" anchor="t">
+          <a:bodyPr wrap="square" anchor="t" lIns="0" rIns="0" tIns="0" bIns="0">
             <a:spAutoFit/>
           </a:bodyPr>
           <a:lstStyle/>
           <a:p>
             <a:pPr algn="r">
               <a:lnSpc>
-                <a:spcPct val="110000"/>
+                <a:spcPct val="114000"/>
               </a:lnSpc>
-              <a:spcAft>
-                <a:spcPts val="600"/>
-              </a:spcAft>
             </a:pPr>
             <a:r>
               <a:rPr sz="1000" b="0">
                 <a:solidFill>
                   <a:srgbClr val="8A97B5"/>
                 </a:solidFill>
-                <a:latin typeface="微软雅黑"/>
-              </a:rPr>
-              <a:t>11 / 13</a:t>
+              </a:rPr>
+              <a:t>8 / 13</a:t>
+            </a:r>
+          </a:p>
+        </p:txBody>
+      </p:sp>
+      <p:sp>
+        <p:nvSpPr>
+          <p:cNvPr id="11" name="Rounded Rectangle 10"/>
+          <p:cNvSpPr/>
+          <p:nvPr/>
+        </p:nvSpPr>
+        <p:spPr>
+          <a:xfrm>
+            <a:off x="475488" y="1554480"/>
+            <a:ext cx="11237976" cy="755913"/>
+          </a:xfrm>
+          <a:prstGeom prst="roundRect">
+            <a:avLst>
+              <a:gd name="adj" fmla="val 6000"/>
+            </a:avLst>
+          </a:prstGeom>
+          <a:solidFill>
+            <a:srgbClr val="FFFFFF"/>
+          </a:solidFill>
+          <a:ln w="9525">
+            <a:solidFill>
+              <a:srgbClr val="E4F1EE"/>
+            </a:solidFill>
+          </a:ln>
+          <a:effectLst/>
+        </p:spPr>
+        <p:style>
+          <a:lnRef idx="1">
+            <a:schemeClr val="accent1"/>
+          </a:lnRef>
+          <a:fillRef idx="3">
+            <a:schemeClr val="accent1"/>
+          </a:fillRef>
+          <a:effectRef idx="2">
+            <a:schemeClr val="accent1"/>
+          </a:effectRef>
+          <a:fontRef idx="minor">
+            <a:schemeClr val="lt1"/>
+          </a:fontRef>
+        </p:style>
+        <p:txBody>
+          <a:bodyPr rtlCol="0" anchor="ctr"/>
+          <a:lstStyle/>
+          <a:p>
+            <a:pPr algn="ctr"/>
+          </a:p>
+        </p:txBody>
+      </p:sp>
+      <p:sp>
+        <p:nvSpPr>
+          <p:cNvPr id="12" name="Rounded Rectangle 11"/>
+          <p:cNvSpPr/>
+          <p:nvPr/>
+        </p:nvSpPr>
+        <p:spPr>
+          <a:xfrm>
+            <a:off x="475488" y="1554480"/>
+            <a:ext cx="54864" cy="755913"/>
+          </a:xfrm>
+          <a:prstGeom prst="roundRect">
+            <a:avLst>
+              <a:gd name="adj" fmla="val 50000"/>
+            </a:avLst>
+          </a:prstGeom>
+          <a:solidFill>
+            <a:srgbClr val="5C6E6A"/>
+          </a:solidFill>
+          <a:ln>
+            <a:noFill/>
+          </a:ln>
+          <a:effectLst/>
+        </p:spPr>
+        <p:style>
+          <a:lnRef idx="1">
+            <a:schemeClr val="accent1"/>
+          </a:lnRef>
+          <a:fillRef idx="3">
+            <a:schemeClr val="accent1"/>
+          </a:fillRef>
+          <a:effectRef idx="2">
+            <a:schemeClr val="accent1"/>
+          </a:effectRef>
+          <a:fontRef idx="minor">
+            <a:schemeClr val="lt1"/>
+          </a:fontRef>
+        </p:style>
+        <p:txBody>
+          <a:bodyPr rtlCol="0" anchor="ctr"/>
+          <a:lstStyle/>
+          <a:p>
+            <a:pPr algn="ctr"/>
+          </a:p>
+        </p:txBody>
+      </p:sp>
+      <p:sp>
+        <p:nvSpPr>
+          <p:cNvPr id="13" name="Rounded Rectangle 12"/>
+          <p:cNvSpPr/>
+          <p:nvPr/>
+        </p:nvSpPr>
+        <p:spPr>
+          <a:xfrm>
+            <a:off x="621792" y="1636776"/>
+            <a:ext cx="237744" cy="237744"/>
+          </a:xfrm>
+          <a:prstGeom prst="roundRect">
+            <a:avLst>
+              <a:gd name="adj" fmla="val 28000"/>
+            </a:avLst>
+          </a:prstGeom>
+          <a:solidFill>
+            <a:srgbClr val="5C6E6A"/>
+          </a:solidFill>
+          <a:ln>
+            <a:noFill/>
+          </a:ln>
+          <a:effectLst/>
+        </p:spPr>
+        <p:style>
+          <a:lnRef idx="1">
+            <a:schemeClr val="accent1"/>
+          </a:lnRef>
+          <a:fillRef idx="3">
+            <a:schemeClr val="accent1"/>
+          </a:fillRef>
+          <a:effectRef idx="2">
+            <a:schemeClr val="accent1"/>
+          </a:effectRef>
+          <a:fontRef idx="minor">
+            <a:schemeClr val="lt1"/>
+          </a:fontRef>
+        </p:style>
+        <p:txBody>
+          <a:bodyPr rtlCol="0" anchor="ctr"/>
+          <a:lstStyle/>
+          <a:p>
+            <a:pPr algn="ctr"/>
+          </a:p>
+        </p:txBody>
+      </p:sp>
+      <p:sp>
+        <p:nvSpPr>
+          <p:cNvPr id="14" name="TextBox 13"/>
+          <p:cNvSpPr txBox="1"/>
+          <p:nvPr/>
+        </p:nvSpPr>
+        <p:spPr>
+          <a:xfrm>
+            <a:off x="621792" y="1636776"/>
+            <a:ext cx="237744" cy="237744"/>
+          </a:xfrm>
+          <a:prstGeom prst="rect">
+            <a:avLst/>
+          </a:prstGeom>
+          <a:noFill/>
+        </p:spPr>
+        <p:txBody>
+          <a:bodyPr wrap="square" anchor="ctr" lIns="0" rIns="0" tIns="0" bIns="0">
+            <a:spAutoFit/>
+          </a:bodyPr>
+          <a:lstStyle/>
+          <a:p>
+            <a:pPr algn="ctr">
+              <a:lnSpc>
+                <a:spcPct val="114000"/>
+              </a:lnSpc>
+            </a:pPr>
+            <a:r>
+              <a:rPr sz="1000" b="1">
+                <a:solidFill>
+                  <a:srgbClr val="FFFFFF"/>
+                </a:solidFill>
+              </a:rPr>
+              <a:t>D</a:t>
+            </a:r>
+          </a:p>
+        </p:txBody>
+      </p:sp>
+      <p:sp>
+        <p:nvSpPr>
+          <p:cNvPr id="15" name="TextBox 14"/>
+          <p:cNvSpPr txBox="1"/>
+          <p:nvPr/>
+        </p:nvSpPr>
+        <p:spPr>
+          <a:xfrm>
+            <a:off x="932688" y="1618488"/>
+            <a:ext cx="8778240" cy="274320"/>
+          </a:xfrm>
+          <a:prstGeom prst="rect">
+            <a:avLst/>
+          </a:prstGeom>
+          <a:noFill/>
+        </p:spPr>
+        <p:txBody>
+          <a:bodyPr wrap="square" anchor="ctr" lIns="0" rIns="0" tIns="0" bIns="0">
+            <a:spAutoFit/>
+          </a:bodyPr>
+          <a:lstStyle/>
+          <a:p>
+            <a:pPr algn="l">
+              <a:lnSpc>
+                <a:spcPct val="114000"/>
+              </a:lnSpc>
+            </a:pPr>
+            <a:r>
+              <a:rPr sz="1050" b="1">
+                <a:solidFill>
+                  <a:srgbClr val="1B2B28"/>
+                </a:solidFill>
+              </a:rPr>
+              <a:t>及格</a:t>
+            </a:r>
+            <a:r>
+              <a:rPr sz="850" b="0">
+                <a:solidFill>
+                  <a:srgbClr val="5C6E6A"/>
+                </a:solidFill>
+              </a:rPr>
+              <a:t>   验收口径：</a:t>
+            </a:r>
+            <a:r>
+              <a:rPr sz="850" b="0">
+                <a:solidFill>
+                  <a:srgbClr val="5C6E6A"/>
+                </a:solidFill>
+              </a:rPr>
+              <a:t>4表设计合理；ORM入库成功；2条统计查询可用</a:t>
+            </a:r>
+          </a:p>
+        </p:txBody>
+      </p:sp>
+      <p:sp>
+        <p:nvSpPr>
+          <p:cNvPr id="16" name="Rounded Rectangle 15"/>
+          <p:cNvSpPr/>
+          <p:nvPr/>
+        </p:nvSpPr>
+        <p:spPr>
+          <a:xfrm>
+            <a:off x="11131803" y="1645920"/>
+            <a:ext cx="453644" cy="237744"/>
+          </a:xfrm>
+          <a:prstGeom prst="roundRect">
+            <a:avLst>
+              <a:gd name="adj" fmla="val 50000"/>
+            </a:avLst>
+          </a:prstGeom>
+          <a:solidFill>
+            <a:srgbClr val="0B5E54"/>
+          </a:solidFill>
+          <a:ln>
+            <a:noFill/>
+          </a:ln>
+          <a:effectLst/>
+        </p:spPr>
+        <p:style>
+          <a:lnRef idx="1">
+            <a:schemeClr val="accent1"/>
+          </a:lnRef>
+          <a:fillRef idx="3">
+            <a:schemeClr val="accent1"/>
+          </a:fillRef>
+          <a:effectRef idx="2">
+            <a:schemeClr val="accent1"/>
+          </a:effectRef>
+          <a:fontRef idx="minor">
+            <a:schemeClr val="lt1"/>
+          </a:fontRef>
+        </p:style>
+        <p:txBody>
+          <a:bodyPr rtlCol="0" anchor="ctr"/>
+          <a:lstStyle/>
+          <a:p>
+            <a:pPr algn="ctr"/>
+          </a:p>
+        </p:txBody>
+      </p:sp>
+      <p:sp>
+        <p:nvSpPr>
+          <p:cNvPr id="17" name="TextBox 16"/>
+          <p:cNvSpPr txBox="1"/>
+          <p:nvPr/>
+        </p:nvSpPr>
+        <p:spPr>
+          <a:xfrm>
+            <a:off x="11131803" y="1645920"/>
+            <a:ext cx="453644" cy="237744"/>
+          </a:xfrm>
+          <a:prstGeom prst="rect">
+            <a:avLst/>
+          </a:prstGeom>
+          <a:noFill/>
+        </p:spPr>
+        <p:txBody>
+          <a:bodyPr wrap="square" anchor="ctr" lIns="0" rIns="0" tIns="0" bIns="0">
+            <a:spAutoFit/>
+          </a:bodyPr>
+          <a:lstStyle/>
+          <a:p>
+            <a:pPr algn="ctr">
+              <a:lnSpc>
+                <a:spcPct val="114000"/>
+              </a:lnSpc>
+            </a:pPr>
+            <a:r>
+              <a:rPr sz="850" b="1">
+                <a:solidFill>
+                  <a:srgbClr val="FFFFFF"/>
+                </a:solidFill>
+              </a:rPr>
+              <a:t>达标</a:t>
+            </a:r>
+          </a:p>
+        </p:txBody>
+      </p:sp>
+      <p:sp>
+        <p:nvSpPr>
+          <p:cNvPr id="18" name="TextBox 17"/>
+          <p:cNvSpPr txBox="1"/>
+          <p:nvPr/>
+        </p:nvSpPr>
+        <p:spPr>
+          <a:xfrm>
+            <a:off x="932688" y="1901952"/>
+            <a:ext cx="10671047" cy="353577"/>
+          </a:xfrm>
+          <a:prstGeom prst="rect">
+            <a:avLst/>
+          </a:prstGeom>
+          <a:noFill/>
+        </p:spPr>
+        <p:txBody>
+          <a:bodyPr wrap="square" anchor="t" lIns="0" rIns="0" tIns="0" bIns="0">
+            <a:spAutoFit/>
+          </a:bodyPr>
+          <a:lstStyle/>
+          <a:p>
+            <a:pPr algn="l">
+              <a:lnSpc>
+                <a:spcPct val="114000"/>
+              </a:lnSpc>
+            </a:pPr>
+            <a:r>
+              <a:rPr sz="950" b="0">
+                <a:solidFill>
+                  <a:srgbClr val="1B2B28"/>
+                </a:solidFill>
+              </a:rPr>
+              <a:t>建表 4/4 张（缺:无）｜records 入库 1436 行（种子 500＋P4缓冲 936，预期 1436，相符=是）｜统计查询可用 3/3 条（T4a 3 行、T4b 3 行、T4c 12 行；门槛 ≥2 条）</a:t>
+            </a:r>
+          </a:p>
+        </p:txBody>
+      </p:sp>
+      <p:sp>
+        <p:nvSpPr>
+          <p:cNvPr id="19" name="Rounded Rectangle 18"/>
+          <p:cNvSpPr/>
+          <p:nvPr/>
+        </p:nvSpPr>
+        <p:spPr>
+          <a:xfrm>
+            <a:off x="475488" y="2374401"/>
+            <a:ext cx="11237976" cy="970276"/>
+          </a:xfrm>
+          <a:prstGeom prst="roundRect">
+            <a:avLst>
+              <a:gd name="adj" fmla="val 6000"/>
+            </a:avLst>
+          </a:prstGeom>
+          <a:solidFill>
+            <a:srgbClr val="FFFFFF"/>
+          </a:solidFill>
+          <a:ln w="9525">
+            <a:solidFill>
+              <a:srgbClr val="E4F1EE"/>
+            </a:solidFill>
+          </a:ln>
+          <a:effectLst/>
+        </p:spPr>
+        <p:style>
+          <a:lnRef idx="1">
+            <a:schemeClr val="accent1"/>
+          </a:lnRef>
+          <a:fillRef idx="3">
+            <a:schemeClr val="accent1"/>
+          </a:fillRef>
+          <a:effectRef idx="2">
+            <a:schemeClr val="accent1"/>
+          </a:effectRef>
+          <a:fontRef idx="minor">
+            <a:schemeClr val="lt1"/>
+          </a:fontRef>
+        </p:style>
+        <p:txBody>
+          <a:bodyPr rtlCol="0" anchor="ctr"/>
+          <a:lstStyle/>
+          <a:p>
+            <a:pPr algn="ctr"/>
+          </a:p>
+        </p:txBody>
+      </p:sp>
+      <p:sp>
+        <p:nvSpPr>
+          <p:cNvPr id="20" name="Rounded Rectangle 19"/>
+          <p:cNvSpPr/>
+          <p:nvPr/>
+        </p:nvSpPr>
+        <p:spPr>
+          <a:xfrm>
+            <a:off x="475488" y="2374401"/>
+            <a:ext cx="54864" cy="970276"/>
+          </a:xfrm>
+          <a:prstGeom prst="roundRect">
+            <a:avLst>
+              <a:gd name="adj" fmla="val 50000"/>
+            </a:avLst>
+          </a:prstGeom>
+          <a:solidFill>
+            <a:srgbClr val="157A6D"/>
+          </a:solidFill>
+          <a:ln>
+            <a:noFill/>
+          </a:ln>
+          <a:effectLst/>
+        </p:spPr>
+        <p:style>
+          <a:lnRef idx="1">
+            <a:schemeClr val="accent1"/>
+          </a:lnRef>
+          <a:fillRef idx="3">
+            <a:schemeClr val="accent1"/>
+          </a:fillRef>
+          <a:effectRef idx="2">
+            <a:schemeClr val="accent1"/>
+          </a:effectRef>
+          <a:fontRef idx="minor">
+            <a:schemeClr val="lt1"/>
+          </a:fontRef>
+        </p:style>
+        <p:txBody>
+          <a:bodyPr rtlCol="0" anchor="ctr"/>
+          <a:lstStyle/>
+          <a:p>
+            <a:pPr algn="ctr"/>
+          </a:p>
+        </p:txBody>
+      </p:sp>
+      <p:sp>
+        <p:nvSpPr>
+          <p:cNvPr id="21" name="Rounded Rectangle 20"/>
+          <p:cNvSpPr/>
+          <p:nvPr/>
+        </p:nvSpPr>
+        <p:spPr>
+          <a:xfrm>
+            <a:off x="621792" y="2456697"/>
+            <a:ext cx="237744" cy="237744"/>
+          </a:xfrm>
+          <a:prstGeom prst="roundRect">
+            <a:avLst>
+              <a:gd name="adj" fmla="val 28000"/>
+            </a:avLst>
+          </a:prstGeom>
+          <a:solidFill>
+            <a:srgbClr val="157A6D"/>
+          </a:solidFill>
+          <a:ln>
+            <a:noFill/>
+          </a:ln>
+          <a:effectLst/>
+        </p:spPr>
+        <p:style>
+          <a:lnRef idx="1">
+            <a:schemeClr val="accent1"/>
+          </a:lnRef>
+          <a:fillRef idx="3">
+            <a:schemeClr val="accent1"/>
+          </a:fillRef>
+          <a:effectRef idx="2">
+            <a:schemeClr val="accent1"/>
+          </a:effectRef>
+          <a:fontRef idx="minor">
+            <a:schemeClr val="lt1"/>
+          </a:fontRef>
+        </p:style>
+        <p:txBody>
+          <a:bodyPr rtlCol="0" anchor="ctr"/>
+          <a:lstStyle/>
+          <a:p>
+            <a:pPr algn="ctr"/>
+          </a:p>
+        </p:txBody>
+      </p:sp>
+      <p:sp>
+        <p:nvSpPr>
+          <p:cNvPr id="22" name="TextBox 21"/>
+          <p:cNvSpPr txBox="1"/>
+          <p:nvPr/>
+        </p:nvSpPr>
+        <p:spPr>
+          <a:xfrm>
+            <a:off x="621792" y="2456697"/>
+            <a:ext cx="237744" cy="237744"/>
+          </a:xfrm>
+          <a:prstGeom prst="rect">
+            <a:avLst/>
+          </a:prstGeom>
+          <a:noFill/>
+        </p:spPr>
+        <p:txBody>
+          <a:bodyPr wrap="square" anchor="ctr" lIns="0" rIns="0" tIns="0" bIns="0">
+            <a:spAutoFit/>
+          </a:bodyPr>
+          <a:lstStyle/>
+          <a:p>
+            <a:pPr algn="ctr">
+              <a:lnSpc>
+                <a:spcPct val="114000"/>
+              </a:lnSpc>
+            </a:pPr>
+            <a:r>
+              <a:rPr sz="1000" b="1">
+                <a:solidFill>
+                  <a:srgbClr val="FFFFFF"/>
+                </a:solidFill>
+              </a:rPr>
+              <a:t>C</a:t>
+            </a:r>
+          </a:p>
+        </p:txBody>
+      </p:sp>
+      <p:sp>
+        <p:nvSpPr>
+          <p:cNvPr id="23" name="TextBox 22"/>
+          <p:cNvSpPr txBox="1"/>
+          <p:nvPr/>
+        </p:nvSpPr>
+        <p:spPr>
+          <a:xfrm>
+            <a:off x="932688" y="2438409"/>
+            <a:ext cx="8778240" cy="274320"/>
+          </a:xfrm>
+          <a:prstGeom prst="rect">
+            <a:avLst/>
+          </a:prstGeom>
+          <a:noFill/>
+        </p:spPr>
+        <p:txBody>
+          <a:bodyPr wrap="square" anchor="ctr" lIns="0" rIns="0" tIns="0" bIns="0">
+            <a:spAutoFit/>
+          </a:bodyPr>
+          <a:lstStyle/>
+          <a:p>
+            <a:pPr algn="l">
+              <a:lnSpc>
+                <a:spcPct val="114000"/>
+              </a:lnSpc>
+            </a:pPr>
+            <a:r>
+              <a:rPr sz="1050" b="1">
+                <a:solidFill>
+                  <a:srgbClr val="1B2B28"/>
+                </a:solidFill>
+              </a:rPr>
+              <a:t>良好</a:t>
+            </a:r>
+            <a:r>
+              <a:rPr sz="850" b="0">
+                <a:solidFill>
+                  <a:srgbClr val="5C6E6A"/>
+                </a:solidFill>
+              </a:rPr>
+              <a:t>   验收口径：</a:t>
+            </a:r>
+            <a:r>
+              <a:rPr sz="850" b="0">
+                <a:solidFill>
+                  <a:srgbClr val="5C6E6A"/>
+                </a:solidFill>
+              </a:rPr>
+              <a:t>数据字典完整；批量事务；溯源查询正确</a:t>
+            </a:r>
+          </a:p>
+        </p:txBody>
+      </p:sp>
+      <p:sp>
+        <p:nvSpPr>
+          <p:cNvPr id="24" name="Rounded Rectangle 23"/>
+          <p:cNvSpPr/>
+          <p:nvPr/>
+        </p:nvSpPr>
+        <p:spPr>
+          <a:xfrm>
+            <a:off x="11131803" y="2465841"/>
+            <a:ext cx="453644" cy="237744"/>
+          </a:xfrm>
+          <a:prstGeom prst="roundRect">
+            <a:avLst>
+              <a:gd name="adj" fmla="val 50000"/>
+            </a:avLst>
+          </a:prstGeom>
+          <a:solidFill>
+            <a:srgbClr val="0B5E54"/>
+          </a:solidFill>
+          <a:ln>
+            <a:noFill/>
+          </a:ln>
+          <a:effectLst/>
+        </p:spPr>
+        <p:style>
+          <a:lnRef idx="1">
+            <a:schemeClr val="accent1"/>
+          </a:lnRef>
+          <a:fillRef idx="3">
+            <a:schemeClr val="accent1"/>
+          </a:fillRef>
+          <a:effectRef idx="2">
+            <a:schemeClr val="accent1"/>
+          </a:effectRef>
+          <a:fontRef idx="minor">
+            <a:schemeClr val="lt1"/>
+          </a:fontRef>
+        </p:style>
+        <p:txBody>
+          <a:bodyPr rtlCol="0" anchor="ctr"/>
+          <a:lstStyle/>
+          <a:p>
+            <a:pPr algn="ctr"/>
+          </a:p>
+        </p:txBody>
+      </p:sp>
+      <p:sp>
+        <p:nvSpPr>
+          <p:cNvPr id="25" name="TextBox 24"/>
+          <p:cNvSpPr txBox="1"/>
+          <p:nvPr/>
+        </p:nvSpPr>
+        <p:spPr>
+          <a:xfrm>
+            <a:off x="11131803" y="2465841"/>
+            <a:ext cx="453644" cy="237744"/>
+          </a:xfrm>
+          <a:prstGeom prst="rect">
+            <a:avLst/>
+          </a:prstGeom>
+          <a:noFill/>
+        </p:spPr>
+        <p:txBody>
+          <a:bodyPr wrap="square" anchor="ctr" lIns="0" rIns="0" tIns="0" bIns="0">
+            <a:spAutoFit/>
+          </a:bodyPr>
+          <a:lstStyle/>
+          <a:p>
+            <a:pPr algn="ctr">
+              <a:lnSpc>
+                <a:spcPct val="114000"/>
+              </a:lnSpc>
+            </a:pPr>
+            <a:r>
+              <a:rPr sz="850" b="1">
+                <a:solidFill>
+                  <a:srgbClr val="FFFFFF"/>
+                </a:solidFill>
+              </a:rPr>
+              <a:t>达标</a:t>
+            </a:r>
+          </a:p>
+        </p:txBody>
+      </p:sp>
+      <p:sp>
+        <p:nvSpPr>
+          <p:cNvPr id="26" name="TextBox 25"/>
+          <p:cNvSpPr txBox="1"/>
+          <p:nvPr/>
+        </p:nvSpPr>
+        <p:spPr>
+          <a:xfrm>
+            <a:off x="932688" y="2721873"/>
+            <a:ext cx="10671047" cy="567940"/>
+          </a:xfrm>
+          <a:prstGeom prst="rect">
+            <a:avLst/>
+          </a:prstGeom>
+          <a:noFill/>
+        </p:spPr>
+        <p:txBody>
+          <a:bodyPr wrap="square" anchor="t" lIns="0" rIns="0" tIns="0" bIns="0">
+            <a:spAutoFit/>
+          </a:bodyPr>
+          <a:lstStyle/>
+          <a:p>
+            <a:pPr algn="l">
+              <a:lnSpc>
+                <a:spcPct val="114000"/>
+              </a:lnSpc>
+            </a:pPr>
+            <a:r>
+              <a:rPr sz="950" b="0">
+                <a:solidFill>
+                  <a:srgbClr val="1B2B28"/>
+                </a:solidFill>
+              </a:rPr>
+              <a:t>数据字典 18/18 列有成文含义（未登记:无）｜批量事务 bulk_save_objects 分批提交 15 次（种子 5＋缓冲 10，每批≤100 条）｜溯源 alarms→devices→points→records 四表 JOIN 命中 57/57 条告警、外键孤儿行 0（100.0%）</a:t>
+            </a:r>
+          </a:p>
+        </p:txBody>
+      </p:sp>
+      <p:sp>
+        <p:nvSpPr>
+          <p:cNvPr id="27" name="Rounded Rectangle 26"/>
+          <p:cNvSpPr/>
+          <p:nvPr/>
+        </p:nvSpPr>
+        <p:spPr>
+          <a:xfrm>
+            <a:off x="475488" y="3408686"/>
+            <a:ext cx="11237976" cy="970276"/>
+          </a:xfrm>
+          <a:prstGeom prst="roundRect">
+            <a:avLst>
+              <a:gd name="adj" fmla="val 6000"/>
+            </a:avLst>
+          </a:prstGeom>
+          <a:solidFill>
+            <a:srgbClr val="FFFFFF"/>
+          </a:solidFill>
+          <a:ln w="9525">
+            <a:solidFill>
+              <a:srgbClr val="E4F1EE"/>
+            </a:solidFill>
+          </a:ln>
+          <a:effectLst/>
+        </p:spPr>
+        <p:style>
+          <a:lnRef idx="1">
+            <a:schemeClr val="accent1"/>
+          </a:lnRef>
+          <a:fillRef idx="3">
+            <a:schemeClr val="accent1"/>
+          </a:fillRef>
+          <a:effectRef idx="2">
+            <a:schemeClr val="accent1"/>
+          </a:effectRef>
+          <a:fontRef idx="minor">
+            <a:schemeClr val="lt1"/>
+          </a:fontRef>
+        </p:style>
+        <p:txBody>
+          <a:bodyPr rtlCol="0" anchor="ctr"/>
+          <a:lstStyle/>
+          <a:p>
+            <a:pPr algn="ctr"/>
+          </a:p>
+        </p:txBody>
+      </p:sp>
+      <p:sp>
+        <p:nvSpPr>
+          <p:cNvPr id="28" name="Rounded Rectangle 27"/>
+          <p:cNvSpPr/>
+          <p:nvPr/>
+        </p:nvSpPr>
+        <p:spPr>
+          <a:xfrm>
+            <a:off x="475488" y="3408686"/>
+            <a:ext cx="54864" cy="970276"/>
+          </a:xfrm>
+          <a:prstGeom prst="roundRect">
+            <a:avLst>
+              <a:gd name="adj" fmla="val 50000"/>
+            </a:avLst>
+          </a:prstGeom>
+          <a:solidFill>
+            <a:srgbClr val="0B5E54"/>
+          </a:solidFill>
+          <a:ln>
+            <a:noFill/>
+          </a:ln>
+          <a:effectLst/>
+        </p:spPr>
+        <p:style>
+          <a:lnRef idx="1">
+            <a:schemeClr val="accent1"/>
+          </a:lnRef>
+          <a:fillRef idx="3">
+            <a:schemeClr val="accent1"/>
+          </a:fillRef>
+          <a:effectRef idx="2">
+            <a:schemeClr val="accent1"/>
+          </a:effectRef>
+          <a:fontRef idx="minor">
+            <a:schemeClr val="lt1"/>
+          </a:fontRef>
+        </p:style>
+        <p:txBody>
+          <a:bodyPr rtlCol="0" anchor="ctr"/>
+          <a:lstStyle/>
+          <a:p>
+            <a:pPr algn="ctr"/>
+          </a:p>
+        </p:txBody>
+      </p:sp>
+      <p:sp>
+        <p:nvSpPr>
+          <p:cNvPr id="29" name="Rounded Rectangle 28"/>
+          <p:cNvSpPr/>
+          <p:nvPr/>
+        </p:nvSpPr>
+        <p:spPr>
+          <a:xfrm>
+            <a:off x="621792" y="3490982"/>
+            <a:ext cx="237744" cy="237744"/>
+          </a:xfrm>
+          <a:prstGeom prst="roundRect">
+            <a:avLst>
+              <a:gd name="adj" fmla="val 28000"/>
+            </a:avLst>
+          </a:prstGeom>
+          <a:solidFill>
+            <a:srgbClr val="0B5E54"/>
+          </a:solidFill>
+          <a:ln>
+            <a:noFill/>
+          </a:ln>
+          <a:effectLst/>
+        </p:spPr>
+        <p:style>
+          <a:lnRef idx="1">
+            <a:schemeClr val="accent1"/>
+          </a:lnRef>
+          <a:fillRef idx="3">
+            <a:schemeClr val="accent1"/>
+          </a:fillRef>
+          <a:effectRef idx="2">
+            <a:schemeClr val="accent1"/>
+          </a:effectRef>
+          <a:fontRef idx="minor">
+            <a:schemeClr val="lt1"/>
+          </a:fontRef>
+        </p:style>
+        <p:txBody>
+          <a:bodyPr rtlCol="0" anchor="ctr"/>
+          <a:lstStyle/>
+          <a:p>
+            <a:pPr algn="ctr"/>
+          </a:p>
+        </p:txBody>
+      </p:sp>
+      <p:sp>
+        <p:nvSpPr>
+          <p:cNvPr id="30" name="TextBox 29"/>
+          <p:cNvSpPr txBox="1"/>
+          <p:nvPr/>
+        </p:nvSpPr>
+        <p:spPr>
+          <a:xfrm>
+            <a:off x="621792" y="3490982"/>
+            <a:ext cx="237744" cy="237744"/>
+          </a:xfrm>
+          <a:prstGeom prst="rect">
+            <a:avLst/>
+          </a:prstGeom>
+          <a:noFill/>
+        </p:spPr>
+        <p:txBody>
+          <a:bodyPr wrap="square" anchor="ctr" lIns="0" rIns="0" tIns="0" bIns="0">
+            <a:spAutoFit/>
+          </a:bodyPr>
+          <a:lstStyle/>
+          <a:p>
+            <a:pPr algn="ctr">
+              <a:lnSpc>
+                <a:spcPct val="114000"/>
+              </a:lnSpc>
+            </a:pPr>
+            <a:r>
+              <a:rPr sz="1000" b="1">
+                <a:solidFill>
+                  <a:srgbClr val="FFFFFF"/>
+                </a:solidFill>
+              </a:rPr>
+              <a:t>B</a:t>
+            </a:r>
+          </a:p>
+        </p:txBody>
+      </p:sp>
+      <p:sp>
+        <p:nvSpPr>
+          <p:cNvPr id="31" name="TextBox 30"/>
+          <p:cNvSpPr txBox="1"/>
+          <p:nvPr/>
+        </p:nvSpPr>
+        <p:spPr>
+          <a:xfrm>
+            <a:off x="932688" y="3472694"/>
+            <a:ext cx="8778240" cy="274320"/>
+          </a:xfrm>
+          <a:prstGeom prst="rect">
+            <a:avLst/>
+          </a:prstGeom>
+          <a:noFill/>
+        </p:spPr>
+        <p:txBody>
+          <a:bodyPr wrap="square" anchor="ctr" lIns="0" rIns="0" tIns="0" bIns="0">
+            <a:spAutoFit/>
+          </a:bodyPr>
+          <a:lstStyle/>
+          <a:p>
+            <a:pPr algn="l">
+              <a:lnSpc>
+                <a:spcPct val="114000"/>
+              </a:lnSpc>
+            </a:pPr>
+            <a:r>
+              <a:rPr sz="1050" b="1">
+                <a:solidFill>
+                  <a:srgbClr val="1B2B28"/>
+                </a:solidFill>
+              </a:rPr>
+              <a:t>优秀</a:t>
+            </a:r>
+            <a:r>
+              <a:rPr sz="850" b="0">
+                <a:solidFill>
+                  <a:srgbClr val="5C6E6A"/>
+                </a:solidFill>
+              </a:rPr>
+              <a:t>   验收口径：</a:t>
+            </a:r>
+            <a:r>
+              <a:rPr sz="850" b="0">
+                <a:solidFill>
+                  <a:srgbClr val="5C6E6A"/>
+                </a:solidFill>
+              </a:rPr>
+              <a:t>索引优化有EXPLAIN证据；N+1问题已规避</a:t>
+            </a:r>
+          </a:p>
+        </p:txBody>
+      </p:sp>
+      <p:sp>
+        <p:nvSpPr>
+          <p:cNvPr id="32" name="Rounded Rectangle 31"/>
+          <p:cNvSpPr/>
+          <p:nvPr/>
+        </p:nvSpPr>
+        <p:spPr>
+          <a:xfrm>
+            <a:off x="11131803" y="3500126"/>
+            <a:ext cx="453644" cy="237744"/>
+          </a:xfrm>
+          <a:prstGeom prst="roundRect">
+            <a:avLst>
+              <a:gd name="adj" fmla="val 50000"/>
+            </a:avLst>
+          </a:prstGeom>
+          <a:solidFill>
+            <a:srgbClr val="0B5E54"/>
+          </a:solidFill>
+          <a:ln>
+            <a:noFill/>
+          </a:ln>
+          <a:effectLst/>
+        </p:spPr>
+        <p:style>
+          <a:lnRef idx="1">
+            <a:schemeClr val="accent1"/>
+          </a:lnRef>
+          <a:fillRef idx="3">
+            <a:schemeClr val="accent1"/>
+          </a:fillRef>
+          <a:effectRef idx="2">
+            <a:schemeClr val="accent1"/>
+          </a:effectRef>
+          <a:fontRef idx="minor">
+            <a:schemeClr val="lt1"/>
+          </a:fontRef>
+        </p:style>
+        <p:txBody>
+          <a:bodyPr rtlCol="0" anchor="ctr"/>
+          <a:lstStyle/>
+          <a:p>
+            <a:pPr algn="ctr"/>
+          </a:p>
+        </p:txBody>
+      </p:sp>
+      <p:sp>
+        <p:nvSpPr>
+          <p:cNvPr id="33" name="TextBox 32"/>
+          <p:cNvSpPr txBox="1"/>
+          <p:nvPr/>
+        </p:nvSpPr>
+        <p:spPr>
+          <a:xfrm>
+            <a:off x="11131803" y="3500126"/>
+            <a:ext cx="453644" cy="237744"/>
+          </a:xfrm>
+          <a:prstGeom prst="rect">
+            <a:avLst/>
+          </a:prstGeom>
+          <a:noFill/>
+        </p:spPr>
+        <p:txBody>
+          <a:bodyPr wrap="square" anchor="ctr" lIns="0" rIns="0" tIns="0" bIns="0">
+            <a:spAutoFit/>
+          </a:bodyPr>
+          <a:lstStyle/>
+          <a:p>
+            <a:pPr algn="ctr">
+              <a:lnSpc>
+                <a:spcPct val="114000"/>
+              </a:lnSpc>
+            </a:pPr>
+            <a:r>
+              <a:rPr sz="850" b="1">
+                <a:solidFill>
+                  <a:srgbClr val="FFFFFF"/>
+                </a:solidFill>
+              </a:rPr>
+              <a:t>达标</a:t>
+            </a:r>
+          </a:p>
+        </p:txBody>
+      </p:sp>
+      <p:sp>
+        <p:nvSpPr>
+          <p:cNvPr id="34" name="TextBox 33"/>
+          <p:cNvSpPr txBox="1"/>
+          <p:nvPr/>
+        </p:nvSpPr>
+        <p:spPr>
+          <a:xfrm>
+            <a:off x="932688" y="3756158"/>
+            <a:ext cx="10671047" cy="567940"/>
+          </a:xfrm>
+          <a:prstGeom prst="rect">
+            <a:avLst/>
+          </a:prstGeom>
+          <a:noFill/>
+        </p:spPr>
+        <p:txBody>
+          <a:bodyPr wrap="square" anchor="t" lIns="0" rIns="0" tIns="0" bIns="0">
+            <a:spAutoFit/>
+          </a:bodyPr>
+          <a:lstStyle/>
+          <a:p>
+            <a:pPr algn="l">
+              <a:lnSpc>
+                <a:spcPct val="114000"/>
+              </a:lnSpc>
+            </a:pPr>
+            <a:r>
+              <a:rPr sz="950" b="0">
+                <a:solidFill>
+                  <a:srgbClr val="1B2B28"/>
+                </a:solidFill>
+              </a:rPr>
+              <a:t>bench_records 20000 行区间查询命中 240 行，建索引前全表 SCAN=是 → 建索引后 SEARCH USING INDEX=是（计划行见本报告「B层·索引优化」段，墙钟毫秒只写 runtime/bench.json 不入 output/）｜N+1 实测：懒加载 4 条 SELECT vs joinedload 1 条（3 台设备）</a:t>
+            </a:r>
+          </a:p>
+        </p:txBody>
+      </p:sp>
+      <p:sp>
+        <p:nvSpPr>
+          <p:cNvPr id="35" name="Rounded Rectangle 34"/>
+          <p:cNvSpPr/>
+          <p:nvPr/>
+        </p:nvSpPr>
+        <p:spPr>
+          <a:xfrm>
+            <a:off x="475488" y="4442971"/>
+            <a:ext cx="11237976" cy="970276"/>
+          </a:xfrm>
+          <a:prstGeom prst="roundRect">
+            <a:avLst>
+              <a:gd name="adj" fmla="val 6000"/>
+            </a:avLst>
+          </a:prstGeom>
+          <a:solidFill>
+            <a:srgbClr val="FFFFFF"/>
+          </a:solidFill>
+          <a:ln w="9525">
+            <a:solidFill>
+              <a:srgbClr val="E4F1EE"/>
+            </a:solidFill>
+          </a:ln>
+          <a:effectLst/>
+        </p:spPr>
+        <p:style>
+          <a:lnRef idx="1">
+            <a:schemeClr val="accent1"/>
+          </a:lnRef>
+          <a:fillRef idx="3">
+            <a:schemeClr val="accent1"/>
+          </a:fillRef>
+          <a:effectRef idx="2">
+            <a:schemeClr val="accent1"/>
+          </a:effectRef>
+          <a:fontRef idx="minor">
+            <a:schemeClr val="lt1"/>
+          </a:fontRef>
+        </p:style>
+        <p:txBody>
+          <a:bodyPr rtlCol="0" anchor="ctr"/>
+          <a:lstStyle/>
+          <a:p>
+            <a:pPr algn="ctr"/>
+          </a:p>
+        </p:txBody>
+      </p:sp>
+      <p:sp>
+        <p:nvSpPr>
+          <p:cNvPr id="36" name="Rounded Rectangle 35"/>
+          <p:cNvSpPr/>
+          <p:nvPr/>
+        </p:nvSpPr>
+        <p:spPr>
+          <a:xfrm>
+            <a:off x="475488" y="4442971"/>
+            <a:ext cx="54864" cy="970276"/>
+          </a:xfrm>
+          <a:prstGeom prst="roundRect">
+            <a:avLst>
+              <a:gd name="adj" fmla="val 50000"/>
+            </a:avLst>
+          </a:prstGeom>
+          <a:solidFill>
+            <a:srgbClr val="C9A227"/>
+          </a:solidFill>
+          <a:ln>
+            <a:noFill/>
+          </a:ln>
+          <a:effectLst/>
+        </p:spPr>
+        <p:style>
+          <a:lnRef idx="1">
+            <a:schemeClr val="accent1"/>
+          </a:lnRef>
+          <a:fillRef idx="3">
+            <a:schemeClr val="accent1"/>
+          </a:fillRef>
+          <a:effectRef idx="2">
+            <a:schemeClr val="accent1"/>
+          </a:effectRef>
+          <a:fontRef idx="minor">
+            <a:schemeClr val="lt1"/>
+          </a:fontRef>
+        </p:style>
+        <p:txBody>
+          <a:bodyPr rtlCol="0" anchor="ctr"/>
+          <a:lstStyle/>
+          <a:p>
+            <a:pPr algn="ctr"/>
+          </a:p>
+        </p:txBody>
+      </p:sp>
+      <p:sp>
+        <p:nvSpPr>
+          <p:cNvPr id="37" name="Rounded Rectangle 36"/>
+          <p:cNvSpPr/>
+          <p:nvPr/>
+        </p:nvSpPr>
+        <p:spPr>
+          <a:xfrm>
+            <a:off x="621792" y="4525267"/>
+            <a:ext cx="237744" cy="237744"/>
+          </a:xfrm>
+          <a:prstGeom prst="roundRect">
+            <a:avLst>
+              <a:gd name="adj" fmla="val 28000"/>
+            </a:avLst>
+          </a:prstGeom>
+          <a:solidFill>
+            <a:srgbClr val="C9A227"/>
+          </a:solidFill>
+          <a:ln>
+            <a:noFill/>
+          </a:ln>
+          <a:effectLst/>
+        </p:spPr>
+        <p:style>
+          <a:lnRef idx="1">
+            <a:schemeClr val="accent1"/>
+          </a:lnRef>
+          <a:fillRef idx="3">
+            <a:schemeClr val="accent1"/>
+          </a:fillRef>
+          <a:effectRef idx="2">
+            <a:schemeClr val="accent1"/>
+          </a:effectRef>
+          <a:fontRef idx="minor">
+            <a:schemeClr val="lt1"/>
+          </a:fontRef>
+        </p:style>
+        <p:txBody>
+          <a:bodyPr rtlCol="0" anchor="ctr"/>
+          <a:lstStyle/>
+          <a:p>
+            <a:pPr algn="ctr"/>
+          </a:p>
+        </p:txBody>
+      </p:sp>
+      <p:sp>
+        <p:nvSpPr>
+          <p:cNvPr id="38" name="TextBox 37"/>
+          <p:cNvSpPr txBox="1"/>
+          <p:nvPr/>
+        </p:nvSpPr>
+        <p:spPr>
+          <a:xfrm>
+            <a:off x="621792" y="4525267"/>
+            <a:ext cx="237744" cy="237744"/>
+          </a:xfrm>
+          <a:prstGeom prst="rect">
+            <a:avLst/>
+          </a:prstGeom>
+          <a:noFill/>
+        </p:spPr>
+        <p:txBody>
+          <a:bodyPr wrap="square" anchor="ctr" lIns="0" rIns="0" tIns="0" bIns="0">
+            <a:spAutoFit/>
+          </a:bodyPr>
+          <a:lstStyle/>
+          <a:p>
+            <a:pPr algn="ctr">
+              <a:lnSpc>
+                <a:spcPct val="114000"/>
+              </a:lnSpc>
+            </a:pPr>
+            <a:r>
+              <a:rPr sz="1000" b="1">
+                <a:solidFill>
+                  <a:srgbClr val="FFFFFF"/>
+                </a:solidFill>
+              </a:rPr>
+              <a:t>A</a:t>
+            </a:r>
+          </a:p>
+        </p:txBody>
+      </p:sp>
+      <p:sp>
+        <p:nvSpPr>
+          <p:cNvPr id="39" name="TextBox 38"/>
+          <p:cNvSpPr txBox="1"/>
+          <p:nvPr/>
+        </p:nvSpPr>
+        <p:spPr>
+          <a:xfrm>
+            <a:off x="932688" y="4506979"/>
+            <a:ext cx="8778240" cy="274320"/>
+          </a:xfrm>
+          <a:prstGeom prst="rect">
+            <a:avLst/>
+          </a:prstGeom>
+          <a:noFill/>
+        </p:spPr>
+        <p:txBody>
+          <a:bodyPr wrap="square" anchor="ctr" lIns="0" rIns="0" tIns="0" bIns="0">
+            <a:spAutoFit/>
+          </a:bodyPr>
+          <a:lstStyle/>
+          <a:p>
+            <a:pPr algn="l">
+              <a:lnSpc>
+                <a:spcPct val="114000"/>
+              </a:lnSpc>
+            </a:pPr>
+            <a:r>
+              <a:rPr sz="1050" b="1">
+                <a:solidFill>
+                  <a:srgbClr val="1B2B28"/>
+                </a:solidFill>
+              </a:rPr>
+              <a:t>超优</a:t>
+            </a:r>
+            <a:r>
+              <a:rPr sz="850" b="0">
+                <a:solidFill>
+                  <a:srgbClr val="5C6E6A"/>
+                </a:solidFill>
+              </a:rPr>
+              <a:t>   验收口径：</a:t>
+            </a:r>
+            <a:r>
+              <a:rPr sz="850" b="0">
+                <a:solidFill>
+                  <a:srgbClr val="5C6E6A"/>
+                </a:solidFill>
+              </a:rPr>
+              <a:t>优秀+复杂查询(多表JOIN聚合)+导入P3仪表盘形成闭环演示</a:t>
+            </a:r>
+          </a:p>
+        </p:txBody>
+      </p:sp>
+      <p:sp>
+        <p:nvSpPr>
+          <p:cNvPr id="40" name="Rounded Rectangle 39"/>
+          <p:cNvSpPr/>
+          <p:nvPr/>
+        </p:nvSpPr>
+        <p:spPr>
+          <a:xfrm>
+            <a:off x="11131803" y="4534411"/>
+            <a:ext cx="453644" cy="237744"/>
+          </a:xfrm>
+          <a:prstGeom prst="roundRect">
+            <a:avLst>
+              <a:gd name="adj" fmla="val 50000"/>
+            </a:avLst>
+          </a:prstGeom>
+          <a:solidFill>
+            <a:srgbClr val="0B5E54"/>
+          </a:solidFill>
+          <a:ln>
+            <a:noFill/>
+          </a:ln>
+          <a:effectLst/>
+        </p:spPr>
+        <p:style>
+          <a:lnRef idx="1">
+            <a:schemeClr val="accent1"/>
+          </a:lnRef>
+          <a:fillRef idx="3">
+            <a:schemeClr val="accent1"/>
+          </a:fillRef>
+          <a:effectRef idx="2">
+            <a:schemeClr val="accent1"/>
+          </a:effectRef>
+          <a:fontRef idx="minor">
+            <a:schemeClr val="lt1"/>
+          </a:fontRef>
+        </p:style>
+        <p:txBody>
+          <a:bodyPr rtlCol="0" anchor="ctr"/>
+          <a:lstStyle/>
+          <a:p>
+            <a:pPr algn="ctr"/>
+          </a:p>
+        </p:txBody>
+      </p:sp>
+      <p:sp>
+        <p:nvSpPr>
+          <p:cNvPr id="41" name="TextBox 40"/>
+          <p:cNvSpPr txBox="1"/>
+          <p:nvPr/>
+        </p:nvSpPr>
+        <p:spPr>
+          <a:xfrm>
+            <a:off x="11131803" y="4534411"/>
+            <a:ext cx="453644" cy="237744"/>
+          </a:xfrm>
+          <a:prstGeom prst="rect">
+            <a:avLst/>
+          </a:prstGeom>
+          <a:noFill/>
+        </p:spPr>
+        <p:txBody>
+          <a:bodyPr wrap="square" anchor="ctr" lIns="0" rIns="0" tIns="0" bIns="0">
+            <a:spAutoFit/>
+          </a:bodyPr>
+          <a:lstStyle/>
+          <a:p>
+            <a:pPr algn="ctr">
+              <a:lnSpc>
+                <a:spcPct val="114000"/>
+              </a:lnSpc>
+            </a:pPr>
+            <a:r>
+              <a:rPr sz="850" b="1">
+                <a:solidFill>
+                  <a:srgbClr val="FFFFFF"/>
+                </a:solidFill>
+              </a:rPr>
+              <a:t>达标</a:t>
+            </a:r>
+          </a:p>
+        </p:txBody>
+      </p:sp>
+      <p:sp>
+        <p:nvSpPr>
+          <p:cNvPr id="42" name="TextBox 41"/>
+          <p:cNvSpPr txBox="1"/>
+          <p:nvPr/>
+        </p:nvSpPr>
+        <p:spPr>
+          <a:xfrm>
+            <a:off x="932688" y="4790443"/>
+            <a:ext cx="10671047" cy="567940"/>
+          </a:xfrm>
+          <a:prstGeom prst="rect">
+            <a:avLst/>
+          </a:prstGeom>
+          <a:noFill/>
+        </p:spPr>
+        <p:txBody>
+          <a:bodyPr wrap="square" anchor="t" lIns="0" rIns="0" tIns="0" bIns="0">
+            <a:spAutoFit/>
+          </a:bodyPr>
+          <a:lstStyle/>
+          <a:p>
+            <a:pPr algn="l">
+              <a:lnSpc>
+                <a:spcPct val="114000"/>
+              </a:lnSpc>
+            </a:pPr>
+            <a:r>
+              <a:rPr sz="950" b="0">
+                <a:solidFill>
+                  <a:srgbClr val="1B2B28"/>
+                </a:solidFill>
+              </a:rPr>
+              <a:t>设备×小时四表 JOIN 聚合 36 桶（3 台设备），与逐行手算一致=是；窗口环比 12 桶 ORM=裸SQL 一致｜P3 交接文件 output/p3_dashboard_handoff.csv：36 行×6 列[ts/device_id/line/temp/vib/status]，时间解析失败 0 行、未知设备 0 个、缺列:无</a:t>
+            </a:r>
+          </a:p>
+        </p:txBody>
+      </p:sp>
+      <p:sp>
+        <p:nvSpPr>
+          <p:cNvPr id="43" name="Rounded Rectangle 42"/>
+          <p:cNvSpPr/>
+          <p:nvPr/>
+        </p:nvSpPr>
+        <p:spPr>
+          <a:xfrm>
+            <a:off x="475488" y="5477255"/>
+            <a:ext cx="11237976" cy="941832"/>
+          </a:xfrm>
+          <a:prstGeom prst="roundRect">
+            <a:avLst>
+              <a:gd name="adj" fmla="val 5000"/>
+            </a:avLst>
+          </a:prstGeom>
+          <a:solidFill>
+            <a:srgbClr val="E4F1EE"/>
+          </a:solidFill>
+          <a:ln>
+            <a:noFill/>
+          </a:ln>
+          <a:effectLst/>
+        </p:spPr>
+        <p:style>
+          <a:lnRef idx="1">
+            <a:schemeClr val="accent1"/>
+          </a:lnRef>
+          <a:fillRef idx="3">
+            <a:schemeClr val="accent1"/>
+          </a:fillRef>
+          <a:effectRef idx="2">
+            <a:schemeClr val="accent1"/>
+          </a:effectRef>
+          <a:fontRef idx="minor">
+            <a:schemeClr val="lt1"/>
+          </a:fontRef>
+        </p:style>
+        <p:txBody>
+          <a:bodyPr rtlCol="0" anchor="ctr"/>
+          <a:lstStyle/>
+          <a:p>
+            <a:pPr algn="ctr"/>
+          </a:p>
+        </p:txBody>
+      </p:sp>
+      <p:sp>
+        <p:nvSpPr>
+          <p:cNvPr id="44" name="Rounded Rectangle 43"/>
+          <p:cNvSpPr/>
+          <p:nvPr/>
+        </p:nvSpPr>
+        <p:spPr>
+          <a:xfrm>
+            <a:off x="475488" y="5477255"/>
+            <a:ext cx="54864" cy="941832"/>
+          </a:xfrm>
+          <a:prstGeom prst="roundRect">
+            <a:avLst>
+              <a:gd name="adj" fmla="val 50000"/>
+            </a:avLst>
+          </a:prstGeom>
+          <a:solidFill>
+            <a:srgbClr val="C9A227"/>
+          </a:solidFill>
+          <a:ln>
+            <a:noFill/>
+          </a:ln>
+          <a:effectLst/>
+        </p:spPr>
+        <p:style>
+          <a:lnRef idx="1">
+            <a:schemeClr val="accent1"/>
+          </a:lnRef>
+          <a:fillRef idx="3">
+            <a:schemeClr val="accent1"/>
+          </a:fillRef>
+          <a:effectRef idx="2">
+            <a:schemeClr val="accent1"/>
+          </a:effectRef>
+          <a:fontRef idx="minor">
+            <a:schemeClr val="lt1"/>
+          </a:fontRef>
+        </p:style>
+        <p:txBody>
+          <a:bodyPr rtlCol="0" anchor="ctr"/>
+          <a:lstStyle/>
+          <a:p>
+            <a:pPr algn="ctr"/>
+          </a:p>
+        </p:txBody>
+      </p:sp>
+      <p:sp>
+        <p:nvSpPr>
+          <p:cNvPr id="45" name="TextBox 44"/>
+          <p:cNvSpPr txBox="1"/>
+          <p:nvPr/>
+        </p:nvSpPr>
+        <p:spPr>
+          <a:xfrm>
+            <a:off x="676656" y="5550407"/>
+            <a:ext cx="10908792" cy="795528"/>
+          </a:xfrm>
+          <a:prstGeom prst="rect">
+            <a:avLst/>
+          </a:prstGeom>
+          <a:noFill/>
+        </p:spPr>
+        <p:txBody>
+          <a:bodyPr wrap="square" anchor="t" lIns="0" rIns="0" tIns="0" bIns="0">
+            <a:spAutoFit/>
+          </a:bodyPr>
+          <a:lstStyle/>
+          <a:p>
+            <a:pPr algn="l">
+              <a:lnSpc>
+                <a:spcPct val="124000"/>
+              </a:lnSpc>
+            </a:pPr>
+            <a:r>
+              <a:rPr sz="850" b="0">
+                <a:solidFill>
+                  <a:srgbClr val="1B2B28"/>
+                </a:solidFill>
+              </a:rPr>
+              <a:t>出处：工程化项目/p55_warehouse_orm/output/report.txt 第 139 节「分层达标」——本机 2026-10-28 05:08 实跑落盘，上表数字逐字摘录、未改写。</a:t>
+            </a:r>
+          </a:p>
+          <a:p>
+            <a:pPr algn="l">
+              <a:lnSpc>
+                <a:spcPct val="124000"/>
+              </a:lnSpc>
+            </a:pPr>
+            <a:r>
+              <a:rPr sz="850" b="0">
+                <a:solidFill>
+                  <a:srgbClr val="1B2B28"/>
+                </a:solidFill>
+              </a:rPr>
+              <a:t>复现：cd 工程化项目/p55_warehouse_orm &amp;&amp; python run.py &amp;&amp; python -m pytest -q -o addopts=''</a:t>
+            </a:r>
+          </a:p>
+          <a:p>
+            <a:pPr algn="l">
+              <a:lnSpc>
+                <a:spcPct val="124000"/>
+              </a:lnSpc>
+            </a:pPr>
+            <a:r>
+              <a:rPr sz="850" b="0">
+                <a:solidFill>
+                  <a:srgbClr val="1B2B28"/>
+                </a:solidFill>
+              </a:rPr>
+              <a:t>口径：表中「判定」沿用报告原词——绿=达标/通过，黄=仅本节取证项通过（未取证子项在报告里逐条点名），红=未达标。</a:t>
             </a:r>
           </a:p>
         </p:txBody>
@@ -13661,20 +13891,22 @@
       <p:grpSpPr/>
       <p:sp>
         <p:nvSpPr>
-          <p:cNvPr id="2" name="Rectangle 1"/>
+          <p:cNvPr id="2" name="Rounded Rectangle 1"/>
           <p:cNvSpPr/>
           <p:nvPr/>
         </p:nvSpPr>
         <p:spPr>
           <a:xfrm>
             <a:off x="0" y="0"/>
-            <a:ext cx="12192000" cy="6858000"/>
-          </a:xfrm>
-          <a:prstGeom prst="rect">
-            <a:avLst/>
+            <a:ext cx="12191695" cy="64008"/>
+          </a:xfrm>
+          <a:prstGeom prst="roundRect">
+            <a:avLst>
+              <a:gd name="adj" fmla="val 50000"/>
+            </a:avLst>
           </a:prstGeom>
           <a:solidFill>
-            <a:srgbClr val="010328"/>
+            <a:srgbClr val="0B5E54"/>
           </a:solidFill>
           <a:ln>
             <a:noFill/>
@@ -13705,20 +13937,60 @@
       </p:sp>
       <p:sp>
         <p:nvSpPr>
-          <p:cNvPr id="3" name="Rectangle 2"/>
+          <p:cNvPr id="3" name="TextBox 2"/>
+          <p:cNvSpPr txBox="1"/>
+          <p:nvPr/>
+        </p:nvSpPr>
+        <p:spPr>
+          <a:xfrm>
+            <a:off x="475488" y="146304"/>
+            <a:ext cx="8229600" cy="292608"/>
+          </a:xfrm>
+          <a:prstGeom prst="rect">
+            <a:avLst/>
+          </a:prstGeom>
+          <a:noFill/>
+        </p:spPr>
+        <p:txBody>
+          <a:bodyPr wrap="square" anchor="t" lIns="0" rIns="0" tIns="0" bIns="0">
+            <a:spAutoFit/>
+          </a:bodyPr>
+          <a:lstStyle/>
+          <a:p>
+            <a:pPr algn="l">
+              <a:lnSpc>
+                <a:spcPct val="114000"/>
+              </a:lnSpc>
+            </a:pPr>
+            <a:r>
+              <a:rPr sz="1100" b="1">
+                <a:solidFill>
+                  <a:srgbClr val="0B5E54"/>
+                </a:solidFill>
+              </a:rPr>
+              <a:t>工单实战 · 运行留证</a:t>
+            </a:r>
+          </a:p>
+        </p:txBody>
+      </p:sp>
+      <p:sp>
+        <p:nvSpPr>
+          <p:cNvPr id="4" name="Rounded Rectangle 3"/>
           <p:cNvSpPr/>
           <p:nvPr/>
         </p:nvSpPr>
         <p:spPr>
           <a:xfrm>
-            <a:off x="0" y="2880360"/>
-            <a:ext cx="12192000" cy="50000"/>
-          </a:xfrm>
-          <a:prstGeom prst="rect">
-            <a:avLst/>
+            <a:off x="475488" y="475488"/>
+            <a:ext cx="2027872" cy="310896"/>
+          </a:xfrm>
+          <a:prstGeom prst="roundRect">
+            <a:avLst>
+              <a:gd name="adj" fmla="val 50000"/>
+            </a:avLst>
           </a:prstGeom>
           <a:solidFill>
-            <a:srgbClr val="F5670F"/>
+            <a:srgbClr val="C9A227"/>
           </a:solidFill>
           <a:ln>
             <a:noFill/>
@@ -13749,14 +14021,14 @@
       </p:sp>
       <p:sp>
         <p:nvSpPr>
-          <p:cNvPr id="4" name="TextBox 3"/>
+          <p:cNvPr id="5" name="TextBox 4"/>
           <p:cNvSpPr txBox="1"/>
           <p:nvPr/>
         </p:nvSpPr>
         <p:spPr>
           <a:xfrm>
-            <a:off x="0" y="1645920"/>
-            <a:ext cx="12192000" cy="1500000"/>
+            <a:off x="475488" y="475488"/>
+            <a:ext cx="2027872" cy="310896"/>
           </a:xfrm>
           <a:prstGeom prst="rect">
             <a:avLst/>
@@ -13764,41 +14036,37 @@
           <a:noFill/>
         </p:spPr>
         <p:txBody>
-          <a:bodyPr wrap="square" anchor="t">
+          <a:bodyPr wrap="square" anchor="ctr" lIns="0" rIns="0" tIns="0" bIns="0">
             <a:spAutoFit/>
           </a:bodyPr>
           <a:lstStyle/>
           <a:p>
             <a:pPr algn="ctr">
               <a:lnSpc>
-                <a:spcPct val="110000"/>
+                <a:spcPct val="114000"/>
               </a:lnSpc>
-              <a:spcAft>
-                <a:spcPts val="600"/>
-              </a:spcAft>
             </a:pPr>
             <a:r>
-              <a:rPr sz="5400" b="1">
+              <a:rPr sz="1050" b="1">
                 <a:solidFill>
                   <a:srgbClr val="FFFFFF"/>
                 </a:solidFill>
-                <a:latin typeface="微软雅黑"/>
-              </a:rPr>
-              <a:t>THANKS</a:t>
-            </a:r>
-          </a:p>
-        </p:txBody>
-      </p:sp>
-      <p:sp>
-        <p:nvSpPr>
-          <p:cNvPr id="5" name="TextBox 4"/>
+              </a:rPr>
+              <a:t>SCREENSHOT · 终端逐字截图</a:t>
+            </a:r>
+          </a:p>
+        </p:txBody>
+      </p:sp>
+      <p:sp>
+        <p:nvSpPr>
+          <p:cNvPr id="6" name="TextBox 5"/>
           <p:cNvSpPr txBox="1"/>
           <p:nvPr/>
         </p:nvSpPr>
         <p:spPr>
           <a:xfrm>
-            <a:off x="0" y="3429000"/>
-            <a:ext cx="12192000" cy="800000"/>
+            <a:off x="475488" y="859536"/>
+            <a:ext cx="11237976" cy="502920"/>
           </a:xfrm>
           <a:prstGeom prst="rect">
             <a:avLst/>
@@ -13806,89 +14074,45 @@
           <a:noFill/>
         </p:spPr>
         <p:txBody>
-          <a:bodyPr wrap="square" anchor="t">
+          <a:bodyPr wrap="square" anchor="t" lIns="0" rIns="0" tIns="0" bIns="0">
             <a:spAutoFit/>
           </a:bodyPr>
           <a:lstStyle/>
           <a:p>
-            <a:pPr algn="ctr">
+            <a:pPr algn="l">
               <a:lnSpc>
-                <a:spcPct val="110000"/>
+                <a:spcPct val="114000"/>
               </a:lnSpc>
-              <a:spcAft>
-                <a:spcPts val="600"/>
-              </a:spcAft>
             </a:pPr>
             <a:r>
               <a:rPr sz="2200" b="1">
                 <a:solidFill>
-                  <a:srgbClr val="F5670F"/>
-                </a:solidFill>
-                <a:latin typeface="微软雅黑"/>
-              </a:rPr>
-              <a:t>感谢聆听 · 动手实践出真知</a:t>
-            </a:r>
-          </a:p>
-        </p:txBody>
-      </p:sp>
-      <p:sp>
-        <p:nvSpPr>
-          <p:cNvPr id="6" name="TextBox 5"/>
-          <p:cNvSpPr txBox="1"/>
-          <p:nvPr/>
-        </p:nvSpPr>
-        <p:spPr>
-          <a:xfrm>
-            <a:off x="0" y="4526280"/>
-            <a:ext cx="12192000" cy="600000"/>
-          </a:xfrm>
-          <a:prstGeom prst="rect">
-            <a:avLst/>
-          </a:prstGeom>
-          <a:noFill/>
-        </p:spPr>
-        <p:txBody>
-          <a:bodyPr wrap="square" anchor="t">
-            <a:spAutoFit/>
-          </a:bodyPr>
-          <a:lstStyle/>
-          <a:p>
-            <a:pPr algn="ctr">
-              <a:lnSpc>
-                <a:spcPct val="110000"/>
-              </a:lnSpc>
-              <a:spcAft>
-                <a:spcPts val="600"/>
-              </a:spcAft>
-            </a:pPr>
-            <a:r>
-              <a:rPr sz="1400" b="0">
-                <a:solidFill>
-                  <a:srgbClr val="BBC6E6"/>
-                </a:solidFill>
-                <a:latin typeface="微软雅黑"/>
-              </a:rPr>
-              <a:t>以生为本   |   做中学 · 学中做</a:t>
-            </a:r>
-          </a:p>
-        </p:txBody>
-      </p:sp>
-      <p:sp>
-        <p:nvSpPr>
-          <p:cNvPr id="7" name="Rectangle 6"/>
+                  <a:srgbClr val="1B2B28"/>
+                </a:solidFill>
+              </a:rPr>
+              <a:t>P5.1/P5.2 分层达标 · 四档逐字输出截图</a:t>
+            </a:r>
+          </a:p>
+        </p:txBody>
+      </p:sp>
+      <p:sp>
+        <p:nvSpPr>
+          <p:cNvPr id="7" name="Rounded Rectangle 6"/>
           <p:cNvSpPr/>
           <p:nvPr/>
         </p:nvSpPr>
         <p:spPr>
           <a:xfrm>
-            <a:off x="500000" y="6500000"/>
-            <a:ext cx="11100000" cy="20000"/>
-          </a:xfrm>
-          <a:prstGeom prst="rect">
-            <a:avLst/>
+            <a:off x="475488" y="1389888"/>
+            <a:ext cx="1234440" cy="27432"/>
+          </a:xfrm>
+          <a:prstGeom prst="roundRect">
+            <a:avLst>
+              <a:gd name="adj" fmla="val 50000"/>
+            </a:avLst>
           </a:prstGeom>
           <a:solidFill>
-            <a:srgbClr val="C9D4EE"/>
+            <a:srgbClr val="C9A227"/>
           </a:solidFill>
           <a:ln>
             <a:noFill/>
@@ -13919,14 +14143,60 @@
       </p:sp>
       <p:sp>
         <p:nvSpPr>
-          <p:cNvPr id="8" name="TextBox 7"/>
+          <p:cNvPr id="8" name="Rounded Rectangle 7"/>
+          <p:cNvSpPr/>
+          <p:nvPr/>
+        </p:nvSpPr>
+        <p:spPr>
+          <a:xfrm>
+            <a:off x="475488" y="6419088"/>
+            <a:ext cx="11237976" cy="10972"/>
+          </a:xfrm>
+          <a:prstGeom prst="roundRect">
+            <a:avLst>
+              <a:gd name="adj" fmla="val 50000"/>
+            </a:avLst>
+          </a:prstGeom>
+          <a:solidFill>
+            <a:srgbClr val="E4F1EE"/>
+          </a:solidFill>
+          <a:ln>
+            <a:noFill/>
+          </a:ln>
+          <a:effectLst/>
+        </p:spPr>
+        <p:style>
+          <a:lnRef idx="1">
+            <a:schemeClr val="accent1"/>
+          </a:lnRef>
+          <a:fillRef idx="3">
+            <a:schemeClr val="accent1"/>
+          </a:fillRef>
+          <a:effectRef idx="2">
+            <a:schemeClr val="accent1"/>
+          </a:effectRef>
+          <a:fontRef idx="minor">
+            <a:schemeClr val="lt1"/>
+          </a:fontRef>
+        </p:style>
+        <p:txBody>
+          <a:bodyPr rtlCol="0" anchor="ctr"/>
+          <a:lstStyle/>
+          <a:p>
+            <a:pPr algn="ctr"/>
+          </a:p>
+        </p:txBody>
+      </p:sp>
+      <p:sp>
+        <p:nvSpPr>
+          <p:cNvPr id="9" name="TextBox 8"/>
           <p:cNvSpPr txBox="1"/>
           <p:nvPr/>
         </p:nvSpPr>
         <p:spPr>
           <a:xfrm>
-            <a:off x="500000" y="6540000"/>
-            <a:ext cx="7000000" cy="300000"/>
+            <a:off x="475488" y="6455664"/>
+            <a:ext cx="7315200" cy="292608"/>
           </a:xfrm>
           <a:prstGeom prst="rect">
             <a:avLst/>
@@ -13934,25 +14204,21 @@
           <a:noFill/>
         </p:spPr>
         <p:txBody>
-          <a:bodyPr wrap="square" anchor="t">
+          <a:bodyPr wrap="square" anchor="t" lIns="0" rIns="0" tIns="0" bIns="0">
             <a:spAutoFit/>
           </a:bodyPr>
           <a:lstStyle/>
           <a:p>
             <a:pPr algn="l">
               <a:lnSpc>
-                <a:spcPct val="110000"/>
+                <a:spcPct val="114000"/>
               </a:lnSpc>
-              <a:spcAft>
-                <a:spcPts val="600"/>
-              </a:spcAft>
             </a:pPr>
             <a:r>
-              <a:rPr sz="1000" b="0">
-                <a:solidFill>
-                  <a:srgbClr val="8A97B5"/>
-                </a:solidFill>
-                <a:latin typeface="微软雅黑"/>
+              <a:rPr sz="900" b="0">
+                <a:solidFill>
+                  <a:srgbClr val="5C6E6A"/>
+                </a:solidFill>
               </a:rPr>
               <a:t>两江智造集团 · Python程序设计（项目实战）</a:t>
             </a:r>
@@ -13961,14 +14227,14 @@
       </p:sp>
       <p:sp>
         <p:nvSpPr>
-          <p:cNvPr id="9" name="TextBox 8"/>
+          <p:cNvPr id="10" name="TextBox 9"/>
           <p:cNvSpPr txBox="1"/>
           <p:nvPr/>
         </p:nvSpPr>
         <p:spPr>
           <a:xfrm>
-            <a:off x="10600000" y="6540000"/>
-            <a:ext cx="1000000" cy="300000"/>
+            <a:off x="10597896" y="6537960"/>
+            <a:ext cx="996696" cy="301752"/>
           </a:xfrm>
           <a:prstGeom prst="rect">
             <a:avLst/>
@@ -13976,27 +14242,123 @@
           <a:noFill/>
         </p:spPr>
         <p:txBody>
-          <a:bodyPr wrap="square" anchor="ctr">
+          <a:bodyPr wrap="square" anchor="t" lIns="0" rIns="0" tIns="0" bIns="0">
             <a:spAutoFit/>
           </a:bodyPr>
           <a:lstStyle/>
           <a:p>
             <a:pPr algn="r">
               <a:lnSpc>
-                <a:spcPct val="110000"/>
+                <a:spcPct val="114000"/>
               </a:lnSpc>
-              <a:spcAft>
-                <a:spcPts val="600"/>
-              </a:spcAft>
             </a:pPr>
             <a:r>
               <a:rPr sz="1000" b="0">
                 <a:solidFill>
                   <a:srgbClr val="8A97B5"/>
                 </a:solidFill>
-                <a:latin typeface="微软雅黑"/>
-              </a:rPr>
-              <a:t>12 / 13</a:t>
+              </a:rPr>
+              <a:t>9 / 13</a:t>
+            </a:r>
+          </a:p>
+        </p:txBody>
+      </p:sp>
+      <p:sp>
+        <p:nvSpPr>
+          <p:cNvPr id="11" name="TextBox 10"/>
+          <p:cNvSpPr txBox="1"/>
+          <p:nvPr/>
+        </p:nvSpPr>
+        <p:spPr>
+          <a:xfrm>
+            <a:off x="475488" y="1517904"/>
+            <a:ext cx="11237976" cy="237744"/>
+          </a:xfrm>
+          <a:prstGeom prst="rect">
+            <a:avLst/>
+          </a:prstGeom>
+          <a:noFill/>
+        </p:spPr>
+        <p:txBody>
+          <a:bodyPr wrap="square" anchor="t" lIns="0" rIns="0" tIns="0" bIns="0">
+            <a:spAutoFit/>
+          </a:bodyPr>
+          <a:lstStyle/>
+          <a:p>
+            <a:pPr algn="l">
+              <a:lnSpc>
+                <a:spcPct val="114000"/>
+              </a:lnSpc>
+            </a:pPr>
+            <a:r>
+              <a:rPr sz="1000" b="0">
+                <a:solidFill>
+                  <a:srgbClr val="5C6E6A"/>
+                </a:solidFill>
+              </a:rPr>
+              <a:t>终端窗口截图：由 report.txt 本节逐字渲染，未手工改写</a:t>
+            </a:r>
+          </a:p>
+        </p:txBody>
+      </p:sp>
+      <p:pic>
+        <p:nvPicPr>
+          <p:cNvPr id="12" name="Picture 11" descr="p55_warehouse_orm_classroom.png"/>
+          <p:cNvPicPr>
+            <a:picLocks noChangeAspect="1"/>
+          </p:cNvPicPr>
+          <p:nvPr/>
+        </p:nvPicPr>
+        <p:blipFill>
+          <a:blip r:embed="rId2"/>
+          <a:stretch>
+            <a:fillRect/>
+          </a:stretch>
+        </p:blipFill>
+        <p:spPr>
+          <a:xfrm>
+            <a:off x="475488" y="1823437"/>
+            <a:ext cx="11237976" cy="3787198"/>
+          </a:xfrm>
+          <a:prstGeom prst="rect">
+            <a:avLst/>
+          </a:prstGeom>
+        </p:spPr>
+      </p:pic>
+      <p:sp>
+        <p:nvSpPr>
+          <p:cNvPr id="13" name="TextBox 12"/>
+          <p:cNvSpPr txBox="1"/>
+          <p:nvPr/>
+        </p:nvSpPr>
+        <p:spPr>
+          <a:xfrm>
+            <a:off x="475488" y="5647210"/>
+            <a:ext cx="11237976" cy="256032"/>
+          </a:xfrm>
+          <a:prstGeom prst="rect">
+            <a:avLst/>
+          </a:prstGeom>
+          <a:noFill/>
+        </p:spPr>
+        <p:txBody>
+          <a:bodyPr wrap="square" anchor="t" lIns="0" rIns="0" tIns="0" bIns="0">
+            <a:spAutoFit/>
+          </a:bodyPr>
+          <a:lstStyle/>
+          <a:p>
+            <a:pPr algn="l">
+              <a:lnSpc>
+                <a:spcPct val="114000"/>
+              </a:lnSpc>
+            </a:pPr>
+            <a:r>
+              <a:rPr sz="850" b="0">
+                <a:solidFill>
+                  <a:srgbClr val="5C6E6A"/>
+                </a:solidFill>
+              </a:rPr>
+              <a:t>▲ p55_warehouse_orm：分层达标 第 139 行起的四档逐字原文（绿=达标/通过，黄=仅本节取证项，橙=未实测项）</a:t>
             </a:r>
           </a:p>
         </p:txBody>
